--- a/Aldo Alberto Martinez Ordenes/PTY4614_Capstone_004D/Equipo/Fase 1/Evidencias Grupales/Presentación EventApp.pptx
+++ b/Aldo Alberto Martinez Ordenes/PTY4614_Capstone_004D/Equipo/Fase 1/Evidencias Grupales/Presentación EventApp.pptx
@@ -7,6 +7,16 @@
   <p:sldIdLst>
     <p:sldId id="256" r:id="rId2"/>
     <p:sldId id="257" r:id="rId3"/>
+    <p:sldId id="258" r:id="rId4"/>
+    <p:sldId id="259" r:id="rId5"/>
+    <p:sldId id="260" r:id="rId6"/>
+    <p:sldId id="261" r:id="rId7"/>
+    <p:sldId id="262" r:id="rId8"/>
+    <p:sldId id="263" r:id="rId9"/>
+    <p:sldId id="264" r:id="rId10"/>
+    <p:sldId id="265" r:id="rId11"/>
+    <p:sldId id="266" r:id="rId12"/>
+    <p:sldId id="268" r:id="rId13"/>
   </p:sldIdLst>
   <p:sldSz cx="12192000" cy="6858000"/>
   <p:notesSz cx="6858000" cy="9144000"/>
@@ -2935,7 +2945,7 @@
           <a:lstStyle/>
           <a:p>
             <a:r>
-              <a:rPr lang="es-MX" dirty="0" err="1">
+              <a:rPr lang="es-MX" dirty="0">
                 <a:solidFill>
                   <a:schemeClr val="accent1"/>
                 </a:solidFill>
@@ -2969,18 +2979,21 @@
         <p:spPr>
           <a:xfrm>
             <a:off x="1524000" y="2447553"/>
-            <a:ext cx="9144000" cy="1655762"/>
+            <a:ext cx="9144000" cy="445502"/>
           </a:xfrm>
         </p:spPr>
         <p:txBody>
           <a:bodyPr/>
           <a:lstStyle/>
           <a:p>
-            <a:endParaRPr lang="es-CL" dirty="0">
-              <a:solidFill>
-                <a:schemeClr val="accent1"/>
-              </a:solidFill>
-            </a:endParaRPr>
+            <a:r>
+              <a:rPr lang="es-CL" dirty="0">
+                <a:solidFill>
+                  <a:schemeClr val="accent1"/>
+                </a:solidFill>
+              </a:rPr>
+              <a:t>Proyecto app móvil para eventos cercanos</a:t>
+            </a:r>
           </a:p>
         </p:txBody>
       </p:sp>
@@ -3376,10 +3389,1101 @@
           </p:style>
         </p:cxnSp>
       </p:grpSp>
+      <p:sp>
+        <p:nvSpPr>
+          <p:cNvPr id="7" name="CuadroTexto 6">
+            <a:extLst>
+              <a:ext uri="{FF2B5EF4-FFF2-40B4-BE49-F238E27FC236}">
+                <a16:creationId xmlns:a16="http://schemas.microsoft.com/office/drawing/2014/main" id="{829C1F1E-759E-FA34-3C5B-F9C8AFAAC381}"/>
+              </a:ext>
+            </a:extLst>
+          </p:cNvPr>
+          <p:cNvSpPr txBox="1"/>
+          <p:nvPr/>
+        </p:nvSpPr>
+        <p:spPr>
+          <a:xfrm>
+            <a:off x="743483" y="4374703"/>
+            <a:ext cx="5443669" cy="1815882"/>
+          </a:xfrm>
+          <a:prstGeom prst="rect">
+            <a:avLst/>
+          </a:prstGeom>
+          <a:noFill/>
+        </p:spPr>
+        <p:txBody>
+          <a:bodyPr wrap="square" rtlCol="0" anchor="ctr">
+            <a:spAutoFit/>
+          </a:bodyPr>
+          <a:lstStyle/>
+          <a:p>
+            <a:r>
+              <a:rPr lang="es-MX" sz="1400" dirty="0">
+                <a:solidFill>
+                  <a:schemeClr val="bg1"/>
+                </a:solidFill>
+              </a:rPr>
+              <a:t>Integrantes:</a:t>
+            </a:r>
+          </a:p>
+          <a:p>
+            <a:pPr marL="285750" indent="-285750">
+              <a:buFontTx/>
+              <a:buChar char="-"/>
+            </a:pPr>
+            <a:r>
+              <a:rPr lang="es-MX" sz="1400" dirty="0">
+                <a:solidFill>
+                  <a:schemeClr val="bg1"/>
+                </a:solidFill>
+              </a:rPr>
+              <a:t>Benjamín Díaz</a:t>
+            </a:r>
+          </a:p>
+          <a:p>
+            <a:pPr marL="285750" indent="-285750">
+              <a:buFontTx/>
+              <a:buChar char="-"/>
+            </a:pPr>
+            <a:r>
+              <a:rPr lang="es-MX" sz="1400" dirty="0">
+                <a:solidFill>
+                  <a:schemeClr val="bg1"/>
+                </a:solidFill>
+              </a:rPr>
+              <a:t>Iñaki Fernández</a:t>
+            </a:r>
+          </a:p>
+          <a:p>
+            <a:pPr marL="285750" indent="-285750">
+              <a:buFontTx/>
+              <a:buChar char="-"/>
+            </a:pPr>
+            <a:r>
+              <a:rPr lang="es-MX" sz="1400" dirty="0">
+                <a:solidFill>
+                  <a:schemeClr val="bg1"/>
+                </a:solidFill>
+              </a:rPr>
+              <a:t>Benjamín Vargas</a:t>
+            </a:r>
+          </a:p>
+          <a:p>
+            <a:endParaRPr lang="es-MX" sz="1400" dirty="0">
+              <a:solidFill>
+                <a:schemeClr val="bg1"/>
+              </a:solidFill>
+            </a:endParaRPr>
+          </a:p>
+          <a:p>
+            <a:r>
+              <a:rPr lang="es-MX" sz="1400" dirty="0">
+                <a:solidFill>
+                  <a:schemeClr val="bg1"/>
+                </a:solidFill>
+              </a:rPr>
+              <a:t>Capstone_004D</a:t>
+            </a:r>
+          </a:p>
+          <a:p>
+            <a:r>
+              <a:rPr lang="es-MX" sz="1400" dirty="0">
+                <a:solidFill>
+                  <a:schemeClr val="bg1"/>
+                </a:solidFill>
+              </a:rPr>
+              <a:t>Docente: </a:t>
+            </a:r>
+            <a:r>
+              <a:rPr lang="es-CL" sz="1400" dirty="0">
+                <a:solidFill>
+                  <a:schemeClr val="bg1"/>
+                </a:solidFill>
+              </a:rPr>
+              <a:t>ALDO ALBERTO MARTINEZ ORDENES</a:t>
+            </a:r>
+          </a:p>
+          <a:p>
+            <a:endParaRPr lang="es-CL" sz="1400" dirty="0">
+              <a:solidFill>
+                <a:schemeClr val="bg1"/>
+              </a:solidFill>
+            </a:endParaRPr>
+          </a:p>
+        </p:txBody>
+      </p:sp>
     </p:spTree>
     <p:extLst>
       <p:ext uri="{BB962C8B-B14F-4D97-AF65-F5344CB8AC3E}">
         <p14:creationId xmlns:p14="http://schemas.microsoft.com/office/powerpoint/2010/main" val="1556653329"/>
+      </p:ext>
+    </p:extLst>
+  </p:cSld>
+  <p:clrMapOvr>
+    <a:masterClrMapping/>
+  </p:clrMapOvr>
+</p:sld>
+</file>
+
+<file path=ppt/slides/slide10.xml><?xml version="1.0" encoding="utf-8"?>
+<p:sld xmlns:a="http://schemas.openxmlformats.org/drawingml/2006/main" xmlns:r="http://schemas.openxmlformats.org/officeDocument/2006/relationships" xmlns:p="http://schemas.openxmlformats.org/presentationml/2006/main">
+  <p:cSld>
+    <p:bg>
+      <p:bgPr>
+        <a:solidFill>
+          <a:schemeClr val="tx2"/>
+        </a:solidFill>
+        <a:effectLst/>
+      </p:bgPr>
+    </p:bg>
+    <p:spTree>
+      <p:nvGrpSpPr>
+        <p:cNvPr id="1" name="">
+          <a:extLst>
+            <a:ext uri="{FF2B5EF4-FFF2-40B4-BE49-F238E27FC236}">
+              <a16:creationId xmlns:a16="http://schemas.microsoft.com/office/drawing/2014/main" id="{E2474F52-F80C-9A7A-5152-D89A5F373266}"/>
+            </a:ext>
+          </a:extLst>
+        </p:cNvPr>
+        <p:cNvGrpSpPr/>
+        <p:nvPr/>
+      </p:nvGrpSpPr>
+      <p:grpSpPr>
+        <a:xfrm>
+          <a:off x="0" y="0"/>
+          <a:ext cx="0" cy="0"/>
+          <a:chOff x="0" y="0"/>
+          <a:chExt cx="0" cy="0"/>
+        </a:xfrm>
+      </p:grpSpPr>
+      <p:sp>
+        <p:nvSpPr>
+          <p:cNvPr id="8" name="CuadroTexto 7">
+            <a:extLst>
+              <a:ext uri="{FF2B5EF4-FFF2-40B4-BE49-F238E27FC236}">
+                <a16:creationId xmlns:a16="http://schemas.microsoft.com/office/drawing/2014/main" id="{4AA918F1-82FF-B5D1-5CE9-308B16E55A6B}"/>
+              </a:ext>
+            </a:extLst>
+          </p:cNvPr>
+          <p:cNvSpPr txBox="1"/>
+          <p:nvPr/>
+        </p:nvSpPr>
+        <p:spPr>
+          <a:xfrm>
+            <a:off x="2281727" y="2264635"/>
+            <a:ext cx="4349810" cy="2346540"/>
+          </a:xfrm>
+          <a:prstGeom prst="rect">
+            <a:avLst/>
+          </a:prstGeom>
+          <a:noFill/>
+        </p:spPr>
+        <p:txBody>
+          <a:bodyPr wrap="square" rtlCol="0">
+            <a:spAutoFit/>
+          </a:bodyPr>
+          <a:lstStyle/>
+          <a:p>
+            <a:pPr marL="285750" indent="-285750">
+              <a:lnSpc>
+                <a:spcPct val="150000"/>
+              </a:lnSpc>
+              <a:buFont typeface="Arial" panose="020B0604020202020204" pitchFamily="34" charset="0"/>
+              <a:buChar char="•"/>
+            </a:pPr>
+            <a:r>
+              <a:rPr lang="es-MX" sz="2000" dirty="0" err="1">
+                <a:solidFill>
+                  <a:schemeClr val="bg1"/>
+                </a:solidFill>
+              </a:rPr>
+              <a:t>Saf</a:t>
+            </a:r>
+            <a:endParaRPr lang="es-MX" sz="2000" dirty="0">
+              <a:solidFill>
+                <a:schemeClr val="bg1"/>
+              </a:solidFill>
+            </a:endParaRPr>
+          </a:p>
+          <a:p>
+            <a:pPr marL="285750" indent="-285750">
+              <a:lnSpc>
+                <a:spcPct val="150000"/>
+              </a:lnSpc>
+              <a:buFont typeface="Arial" panose="020B0604020202020204" pitchFamily="34" charset="0"/>
+              <a:buChar char="•"/>
+            </a:pPr>
+            <a:endParaRPr lang="es-CL" sz="2000" dirty="0">
+              <a:solidFill>
+                <a:schemeClr val="bg1"/>
+              </a:solidFill>
+            </a:endParaRPr>
+          </a:p>
+          <a:p>
+            <a:pPr marL="285750" indent="-285750">
+              <a:lnSpc>
+                <a:spcPct val="150000"/>
+              </a:lnSpc>
+              <a:buFont typeface="Arial" panose="020B0604020202020204" pitchFamily="34" charset="0"/>
+              <a:buChar char="•"/>
+            </a:pPr>
+            <a:r>
+              <a:rPr lang="es-CL" sz="2000" dirty="0">
+                <a:solidFill>
+                  <a:schemeClr val="bg1"/>
+                </a:solidFill>
+              </a:rPr>
+              <a:t>S</a:t>
+            </a:r>
+          </a:p>
+          <a:p>
+            <a:pPr marL="285750" indent="-285750">
+              <a:lnSpc>
+                <a:spcPct val="150000"/>
+              </a:lnSpc>
+              <a:buFont typeface="Arial" panose="020B0604020202020204" pitchFamily="34" charset="0"/>
+              <a:buChar char="•"/>
+            </a:pPr>
+            <a:endParaRPr lang="es-CL" sz="2000" dirty="0">
+              <a:solidFill>
+                <a:schemeClr val="bg1"/>
+              </a:solidFill>
+            </a:endParaRPr>
+          </a:p>
+          <a:p>
+            <a:pPr marL="285750" indent="-285750">
+              <a:lnSpc>
+                <a:spcPct val="150000"/>
+              </a:lnSpc>
+              <a:buFont typeface="Arial" panose="020B0604020202020204" pitchFamily="34" charset="0"/>
+              <a:buChar char="•"/>
+            </a:pPr>
+            <a:r>
+              <a:rPr lang="es-CL" sz="2000" dirty="0">
+                <a:solidFill>
+                  <a:schemeClr val="bg1"/>
+                </a:solidFill>
+              </a:rPr>
+              <a:t>s</a:t>
+            </a:r>
+            <a:endParaRPr lang="es-MX" sz="2000" dirty="0">
+              <a:solidFill>
+                <a:schemeClr val="bg1"/>
+              </a:solidFill>
+            </a:endParaRPr>
+          </a:p>
+        </p:txBody>
+      </p:sp>
+      <p:grpSp>
+        <p:nvGrpSpPr>
+          <p:cNvPr id="25" name="Grupo 24">
+            <a:extLst>
+              <a:ext uri="{FF2B5EF4-FFF2-40B4-BE49-F238E27FC236}">
+                <a16:creationId xmlns:a16="http://schemas.microsoft.com/office/drawing/2014/main" id="{AE0DEEA6-6BE8-12D1-5592-D3B27CFACED7}"/>
+              </a:ext>
+            </a:extLst>
+          </p:cNvPr>
+          <p:cNvGrpSpPr/>
+          <p:nvPr/>
+        </p:nvGrpSpPr>
+        <p:grpSpPr>
+          <a:xfrm>
+            <a:off x="841727" y="546930"/>
+            <a:ext cx="2880000" cy="540000"/>
+            <a:chOff x="786213" y="521293"/>
+            <a:chExt cx="2880000" cy="540000"/>
+          </a:xfrm>
+        </p:grpSpPr>
+        <p:cxnSp>
+          <p:nvCxnSpPr>
+            <p:cNvPr id="10" name="Conector recto 9">
+              <a:extLst>
+                <a:ext uri="{FF2B5EF4-FFF2-40B4-BE49-F238E27FC236}">
+                  <a16:creationId xmlns:a16="http://schemas.microsoft.com/office/drawing/2014/main" id="{032AC6CA-C53A-5493-154E-37F392B6BC78}"/>
+                </a:ext>
+              </a:extLst>
+            </p:cNvPr>
+            <p:cNvCxnSpPr/>
+            <p:nvPr/>
+          </p:nvCxnSpPr>
+          <p:spPr>
+            <a:xfrm>
+              <a:off x="786213" y="521293"/>
+              <a:ext cx="0" cy="540000"/>
+            </a:xfrm>
+            <a:prstGeom prst="line">
+              <a:avLst/>
+            </a:prstGeom>
+          </p:spPr>
+          <p:style>
+            <a:lnRef idx="3">
+              <a:schemeClr val="accent2"/>
+            </a:lnRef>
+            <a:fillRef idx="0">
+              <a:schemeClr val="accent2"/>
+            </a:fillRef>
+            <a:effectRef idx="2">
+              <a:schemeClr val="accent2"/>
+            </a:effectRef>
+            <a:fontRef idx="minor">
+              <a:schemeClr val="tx1"/>
+            </a:fontRef>
+          </p:style>
+        </p:cxnSp>
+        <p:cxnSp>
+          <p:nvCxnSpPr>
+            <p:cNvPr id="14" name="Conector recto 13">
+              <a:extLst>
+                <a:ext uri="{FF2B5EF4-FFF2-40B4-BE49-F238E27FC236}">
+                  <a16:creationId xmlns:a16="http://schemas.microsoft.com/office/drawing/2014/main" id="{22D99637-052D-9D8B-8A3F-5FC678DD9E65}"/>
+                </a:ext>
+              </a:extLst>
+            </p:cNvPr>
+            <p:cNvCxnSpPr>
+              <a:cxnSpLocks/>
+            </p:cNvCxnSpPr>
+            <p:nvPr/>
+          </p:nvCxnSpPr>
+          <p:spPr>
+            <a:xfrm>
+              <a:off x="786213" y="1061293"/>
+              <a:ext cx="2880000" cy="0"/>
+            </a:xfrm>
+            <a:prstGeom prst="line">
+              <a:avLst/>
+            </a:prstGeom>
+          </p:spPr>
+          <p:style>
+            <a:lnRef idx="3">
+              <a:schemeClr val="accent2"/>
+            </a:lnRef>
+            <a:fillRef idx="0">
+              <a:schemeClr val="accent2"/>
+            </a:fillRef>
+            <a:effectRef idx="2">
+              <a:schemeClr val="accent2"/>
+            </a:effectRef>
+            <a:fontRef idx="minor">
+              <a:schemeClr val="tx1"/>
+            </a:fontRef>
+          </p:style>
+        </p:cxnSp>
+      </p:grpSp>
+      <p:sp>
+        <p:nvSpPr>
+          <p:cNvPr id="3" name="CuadroTexto 2">
+            <a:extLst>
+              <a:ext uri="{FF2B5EF4-FFF2-40B4-BE49-F238E27FC236}">
+                <a16:creationId xmlns:a16="http://schemas.microsoft.com/office/drawing/2014/main" id="{B7EFF28F-B004-F7B6-F346-79049DEC0080}"/>
+              </a:ext>
+            </a:extLst>
+          </p:cNvPr>
+          <p:cNvSpPr txBox="1"/>
+          <p:nvPr/>
+        </p:nvSpPr>
+        <p:spPr>
+          <a:xfrm>
+            <a:off x="1031888" y="555724"/>
+            <a:ext cx="2499678" cy="369332"/>
+          </a:xfrm>
+          <a:prstGeom prst="rect">
+            <a:avLst/>
+          </a:prstGeom>
+          <a:noFill/>
+        </p:spPr>
+        <p:txBody>
+          <a:bodyPr wrap="square" rtlCol="0">
+            <a:spAutoFit/>
+          </a:bodyPr>
+          <a:lstStyle/>
+          <a:p>
+            <a:r>
+              <a:rPr lang="es-MX" dirty="0">
+                <a:solidFill>
+                  <a:schemeClr val="accent1"/>
+                </a:solidFill>
+                <a:latin typeface="+mj-lt"/>
+              </a:rPr>
+              <a:t>Riesgos</a:t>
+            </a:r>
+            <a:endParaRPr lang="es-CL" dirty="0">
+              <a:solidFill>
+                <a:schemeClr val="accent1"/>
+              </a:solidFill>
+              <a:latin typeface="+mj-lt"/>
+            </a:endParaRPr>
+          </a:p>
+        </p:txBody>
+      </p:sp>
+    </p:spTree>
+    <p:extLst>
+      <p:ext uri="{BB962C8B-B14F-4D97-AF65-F5344CB8AC3E}">
+        <p14:creationId xmlns:p14="http://schemas.microsoft.com/office/powerpoint/2010/main" val="1744374417"/>
+      </p:ext>
+    </p:extLst>
+  </p:cSld>
+  <p:clrMapOvr>
+    <a:masterClrMapping/>
+  </p:clrMapOvr>
+</p:sld>
+</file>
+
+<file path=ppt/slides/slide11.xml><?xml version="1.0" encoding="utf-8"?>
+<p:sld xmlns:a="http://schemas.openxmlformats.org/drawingml/2006/main" xmlns:r="http://schemas.openxmlformats.org/officeDocument/2006/relationships" xmlns:p="http://schemas.openxmlformats.org/presentationml/2006/main">
+  <p:cSld>
+    <p:bg>
+      <p:bgPr>
+        <a:solidFill>
+          <a:schemeClr val="tx2"/>
+        </a:solidFill>
+        <a:effectLst/>
+      </p:bgPr>
+    </p:bg>
+    <p:spTree>
+      <p:nvGrpSpPr>
+        <p:cNvPr id="1" name="">
+          <a:extLst>
+            <a:ext uri="{FF2B5EF4-FFF2-40B4-BE49-F238E27FC236}">
+              <a16:creationId xmlns:a16="http://schemas.microsoft.com/office/drawing/2014/main" id="{C9DD825B-358F-A2CE-A250-7CEE3EDF36A9}"/>
+            </a:ext>
+          </a:extLst>
+        </p:cNvPr>
+        <p:cNvGrpSpPr/>
+        <p:nvPr/>
+      </p:nvGrpSpPr>
+      <p:grpSpPr>
+        <a:xfrm>
+          <a:off x="0" y="0"/>
+          <a:ext cx="0" cy="0"/>
+          <a:chOff x="0" y="0"/>
+          <a:chExt cx="0" cy="0"/>
+        </a:xfrm>
+      </p:grpSpPr>
+      <p:grpSp>
+        <p:nvGrpSpPr>
+          <p:cNvPr id="25" name="Grupo 24">
+            <a:extLst>
+              <a:ext uri="{FF2B5EF4-FFF2-40B4-BE49-F238E27FC236}">
+                <a16:creationId xmlns:a16="http://schemas.microsoft.com/office/drawing/2014/main" id="{3F496617-0BEE-4BF7-6A40-8117DD9B74C6}"/>
+              </a:ext>
+            </a:extLst>
+          </p:cNvPr>
+          <p:cNvGrpSpPr/>
+          <p:nvPr/>
+        </p:nvGrpSpPr>
+        <p:grpSpPr>
+          <a:xfrm>
+            <a:off x="841727" y="546930"/>
+            <a:ext cx="2880000" cy="540000"/>
+            <a:chOff x="786213" y="521293"/>
+            <a:chExt cx="2880000" cy="540000"/>
+          </a:xfrm>
+        </p:grpSpPr>
+        <p:cxnSp>
+          <p:nvCxnSpPr>
+            <p:cNvPr id="10" name="Conector recto 9">
+              <a:extLst>
+                <a:ext uri="{FF2B5EF4-FFF2-40B4-BE49-F238E27FC236}">
+                  <a16:creationId xmlns:a16="http://schemas.microsoft.com/office/drawing/2014/main" id="{B89DF86A-4D6B-761A-5F37-4993F134A769}"/>
+                </a:ext>
+              </a:extLst>
+            </p:cNvPr>
+            <p:cNvCxnSpPr/>
+            <p:nvPr/>
+          </p:nvCxnSpPr>
+          <p:spPr>
+            <a:xfrm>
+              <a:off x="786213" y="521293"/>
+              <a:ext cx="0" cy="540000"/>
+            </a:xfrm>
+            <a:prstGeom prst="line">
+              <a:avLst/>
+            </a:prstGeom>
+          </p:spPr>
+          <p:style>
+            <a:lnRef idx="3">
+              <a:schemeClr val="accent2"/>
+            </a:lnRef>
+            <a:fillRef idx="0">
+              <a:schemeClr val="accent2"/>
+            </a:fillRef>
+            <a:effectRef idx="2">
+              <a:schemeClr val="accent2"/>
+            </a:effectRef>
+            <a:fontRef idx="minor">
+              <a:schemeClr val="tx1"/>
+            </a:fontRef>
+          </p:style>
+        </p:cxnSp>
+        <p:cxnSp>
+          <p:nvCxnSpPr>
+            <p:cNvPr id="14" name="Conector recto 13">
+              <a:extLst>
+                <a:ext uri="{FF2B5EF4-FFF2-40B4-BE49-F238E27FC236}">
+                  <a16:creationId xmlns:a16="http://schemas.microsoft.com/office/drawing/2014/main" id="{6EF7597D-2A65-90CE-3D62-FBC24A092902}"/>
+                </a:ext>
+              </a:extLst>
+            </p:cNvPr>
+            <p:cNvCxnSpPr>
+              <a:cxnSpLocks/>
+            </p:cNvCxnSpPr>
+            <p:nvPr/>
+          </p:nvCxnSpPr>
+          <p:spPr>
+            <a:xfrm>
+              <a:off x="786213" y="1061293"/>
+              <a:ext cx="2880000" cy="0"/>
+            </a:xfrm>
+            <a:prstGeom prst="line">
+              <a:avLst/>
+            </a:prstGeom>
+          </p:spPr>
+          <p:style>
+            <a:lnRef idx="3">
+              <a:schemeClr val="accent2"/>
+            </a:lnRef>
+            <a:fillRef idx="0">
+              <a:schemeClr val="accent2"/>
+            </a:fillRef>
+            <a:effectRef idx="2">
+              <a:schemeClr val="accent2"/>
+            </a:effectRef>
+            <a:fontRef idx="minor">
+              <a:schemeClr val="tx1"/>
+            </a:fontRef>
+          </p:style>
+        </p:cxnSp>
+      </p:grpSp>
+      <p:sp>
+        <p:nvSpPr>
+          <p:cNvPr id="3" name="CuadroTexto 2">
+            <a:extLst>
+              <a:ext uri="{FF2B5EF4-FFF2-40B4-BE49-F238E27FC236}">
+                <a16:creationId xmlns:a16="http://schemas.microsoft.com/office/drawing/2014/main" id="{C787C829-A612-8ECC-0E31-797BE398CEFB}"/>
+              </a:ext>
+            </a:extLst>
+          </p:cNvPr>
+          <p:cNvSpPr txBox="1"/>
+          <p:nvPr/>
+        </p:nvSpPr>
+        <p:spPr>
+          <a:xfrm>
+            <a:off x="1031888" y="555724"/>
+            <a:ext cx="2499678" cy="369332"/>
+          </a:xfrm>
+          <a:prstGeom prst="rect">
+            <a:avLst/>
+          </a:prstGeom>
+          <a:noFill/>
+        </p:spPr>
+        <p:txBody>
+          <a:bodyPr wrap="square" rtlCol="0">
+            <a:spAutoFit/>
+          </a:bodyPr>
+          <a:lstStyle/>
+          <a:p>
+            <a:r>
+              <a:rPr lang="es-MX" dirty="0">
+                <a:solidFill>
+                  <a:schemeClr val="accent1"/>
+                </a:solidFill>
+                <a:latin typeface="+mj-lt"/>
+              </a:rPr>
+              <a:t>Mockup</a:t>
+            </a:r>
+            <a:endParaRPr lang="es-CL" dirty="0">
+              <a:solidFill>
+                <a:schemeClr val="accent1"/>
+              </a:solidFill>
+              <a:latin typeface="+mj-lt"/>
+            </a:endParaRPr>
+          </a:p>
+        </p:txBody>
+      </p:sp>
+    </p:spTree>
+    <p:extLst>
+      <p:ext uri="{BB962C8B-B14F-4D97-AF65-F5344CB8AC3E}">
+        <p14:creationId xmlns:p14="http://schemas.microsoft.com/office/powerpoint/2010/main" val="636617653"/>
+      </p:ext>
+    </p:extLst>
+  </p:cSld>
+  <p:clrMapOvr>
+    <a:masterClrMapping/>
+  </p:clrMapOvr>
+</p:sld>
+</file>
+
+<file path=ppt/slides/slide12.xml><?xml version="1.0" encoding="utf-8"?>
+<p:sld xmlns:a="http://schemas.openxmlformats.org/drawingml/2006/main" xmlns:r="http://schemas.openxmlformats.org/officeDocument/2006/relationships" xmlns:p="http://schemas.openxmlformats.org/presentationml/2006/main">
+  <p:cSld>
+    <p:bg>
+      <p:bgPr>
+        <a:solidFill>
+          <a:schemeClr val="tx2"/>
+        </a:solidFill>
+        <a:effectLst/>
+      </p:bgPr>
+    </p:bg>
+    <p:spTree>
+      <p:nvGrpSpPr>
+        <p:cNvPr id="1" name="">
+          <a:extLst>
+            <a:ext uri="{FF2B5EF4-FFF2-40B4-BE49-F238E27FC236}">
+              <a16:creationId xmlns:a16="http://schemas.microsoft.com/office/drawing/2014/main" id="{1724048F-0A51-1547-B1AC-CC69CED3A6C6}"/>
+            </a:ext>
+          </a:extLst>
+        </p:cNvPr>
+        <p:cNvGrpSpPr/>
+        <p:nvPr/>
+      </p:nvGrpSpPr>
+      <p:grpSpPr>
+        <a:xfrm>
+          <a:off x="0" y="0"/>
+          <a:ext cx="0" cy="0"/>
+          <a:chOff x="0" y="0"/>
+          <a:chExt cx="0" cy="0"/>
+        </a:xfrm>
+      </p:grpSpPr>
+      <p:sp>
+        <p:nvSpPr>
+          <p:cNvPr id="2" name="Título 1">
+            <a:extLst>
+              <a:ext uri="{FF2B5EF4-FFF2-40B4-BE49-F238E27FC236}">
+                <a16:creationId xmlns:a16="http://schemas.microsoft.com/office/drawing/2014/main" id="{113D8B02-7FDE-FD35-ECC3-F577360F7947}"/>
+              </a:ext>
+            </a:extLst>
+          </p:cNvPr>
+          <p:cNvSpPr>
+            <a:spLocks noGrp="1"/>
+          </p:cNvSpPr>
+          <p:nvPr>
+            <p:ph type="ctrTitle"/>
+          </p:nvPr>
+        </p:nvSpPr>
+        <p:spPr>
+          <a:xfrm>
+            <a:off x="1524000" y="2915774"/>
+            <a:ext cx="9144000" cy="1026452"/>
+          </a:xfrm>
+        </p:spPr>
+        <p:txBody>
+          <a:bodyPr>
+            <a:normAutofit/>
+          </a:bodyPr>
+          <a:lstStyle/>
+          <a:p>
+            <a:r>
+              <a:rPr lang="es-MX" dirty="0">
+                <a:solidFill>
+                  <a:schemeClr val="accent1"/>
+                </a:solidFill>
+              </a:rPr>
+              <a:t>Conclusión</a:t>
+            </a:r>
+            <a:endParaRPr lang="es-CL" dirty="0">
+              <a:solidFill>
+                <a:schemeClr val="accent1"/>
+              </a:solidFill>
+            </a:endParaRPr>
+          </a:p>
+        </p:txBody>
+      </p:sp>
+      <p:grpSp>
+        <p:nvGrpSpPr>
+          <p:cNvPr id="16" name="Grupo 15">
+            <a:extLst>
+              <a:ext uri="{FF2B5EF4-FFF2-40B4-BE49-F238E27FC236}">
+                <a16:creationId xmlns:a16="http://schemas.microsoft.com/office/drawing/2014/main" id="{8C3FB05D-F257-1453-9D11-FA3D82CB4972}"/>
+              </a:ext>
+            </a:extLst>
+          </p:cNvPr>
+          <p:cNvGrpSpPr/>
+          <p:nvPr/>
+        </p:nvGrpSpPr>
+        <p:grpSpPr>
+          <a:xfrm>
+            <a:off x="666571" y="555477"/>
+            <a:ext cx="1800000" cy="1800000"/>
+            <a:chOff x="666571" y="555477"/>
+            <a:chExt cx="1800000" cy="1800000"/>
+          </a:xfrm>
+        </p:grpSpPr>
+        <p:cxnSp>
+          <p:nvCxnSpPr>
+            <p:cNvPr id="5" name="Conector recto 4">
+              <a:extLst>
+                <a:ext uri="{FF2B5EF4-FFF2-40B4-BE49-F238E27FC236}">
+                  <a16:creationId xmlns:a16="http://schemas.microsoft.com/office/drawing/2014/main" id="{36AE21F0-9FA5-9C66-DF8C-F2CB0AE8F8CC}"/>
+                </a:ext>
+              </a:extLst>
+            </p:cNvPr>
+            <p:cNvCxnSpPr/>
+            <p:nvPr/>
+          </p:nvCxnSpPr>
+          <p:spPr>
+            <a:xfrm>
+              <a:off x="666571" y="555477"/>
+              <a:ext cx="1800000" cy="0"/>
+            </a:xfrm>
+            <a:prstGeom prst="line">
+              <a:avLst/>
+            </a:prstGeom>
+            <a:ln/>
+          </p:spPr>
+          <p:style>
+            <a:lnRef idx="3">
+              <a:schemeClr val="accent2"/>
+            </a:lnRef>
+            <a:fillRef idx="0">
+              <a:schemeClr val="accent2"/>
+            </a:fillRef>
+            <a:effectRef idx="2">
+              <a:schemeClr val="accent2"/>
+            </a:effectRef>
+            <a:fontRef idx="minor">
+              <a:schemeClr val="tx1"/>
+            </a:fontRef>
+          </p:style>
+        </p:cxnSp>
+        <p:cxnSp>
+          <p:nvCxnSpPr>
+            <p:cNvPr id="6" name="Conector recto 5">
+              <a:extLst>
+                <a:ext uri="{FF2B5EF4-FFF2-40B4-BE49-F238E27FC236}">
+                  <a16:creationId xmlns:a16="http://schemas.microsoft.com/office/drawing/2014/main" id="{C5B731D4-E085-520D-A716-6B4B86BC252F}"/>
+                </a:ext>
+              </a:extLst>
+            </p:cNvPr>
+            <p:cNvCxnSpPr>
+              <a:cxnSpLocks/>
+            </p:cNvCxnSpPr>
+            <p:nvPr/>
+          </p:nvCxnSpPr>
+          <p:spPr>
+            <a:xfrm flipV="1">
+              <a:off x="666572" y="555477"/>
+              <a:ext cx="0" cy="1800000"/>
+            </a:xfrm>
+            <a:prstGeom prst="line">
+              <a:avLst/>
+            </a:prstGeom>
+            <a:ln/>
+          </p:spPr>
+          <p:style>
+            <a:lnRef idx="3">
+              <a:schemeClr val="accent2"/>
+            </a:lnRef>
+            <a:fillRef idx="0">
+              <a:schemeClr val="accent2"/>
+            </a:fillRef>
+            <a:effectRef idx="2">
+              <a:schemeClr val="accent2"/>
+            </a:effectRef>
+            <a:fontRef idx="minor">
+              <a:schemeClr val="tx1"/>
+            </a:fontRef>
+          </p:style>
+        </p:cxnSp>
+      </p:grpSp>
+      <p:grpSp>
+        <p:nvGrpSpPr>
+          <p:cNvPr id="15" name="Grupo 14">
+            <a:extLst>
+              <a:ext uri="{FF2B5EF4-FFF2-40B4-BE49-F238E27FC236}">
+                <a16:creationId xmlns:a16="http://schemas.microsoft.com/office/drawing/2014/main" id="{97B0F812-76AD-768A-9542-98B0219854F7}"/>
+              </a:ext>
+            </a:extLst>
+          </p:cNvPr>
+          <p:cNvGrpSpPr/>
+          <p:nvPr/>
+        </p:nvGrpSpPr>
+        <p:grpSpPr>
+          <a:xfrm>
+            <a:off x="9725428" y="4484588"/>
+            <a:ext cx="1800000" cy="1800000"/>
+            <a:chOff x="9801881" y="4357800"/>
+            <a:chExt cx="1800000" cy="1800000"/>
+          </a:xfrm>
+        </p:grpSpPr>
+        <p:cxnSp>
+          <p:nvCxnSpPr>
+            <p:cNvPr id="11" name="Conector recto 10">
+              <a:extLst>
+                <a:ext uri="{FF2B5EF4-FFF2-40B4-BE49-F238E27FC236}">
+                  <a16:creationId xmlns:a16="http://schemas.microsoft.com/office/drawing/2014/main" id="{6D1331FC-6749-70FE-28A6-E3D51B36AA84}"/>
+                </a:ext>
+              </a:extLst>
+            </p:cNvPr>
+            <p:cNvCxnSpPr>
+              <a:cxnSpLocks/>
+            </p:cNvCxnSpPr>
+            <p:nvPr/>
+          </p:nvCxnSpPr>
+          <p:spPr>
+            <a:xfrm rot="5400000">
+              <a:off x="10701880" y="5257800"/>
+              <a:ext cx="1800000" cy="0"/>
+            </a:xfrm>
+            <a:prstGeom prst="line">
+              <a:avLst/>
+            </a:prstGeom>
+            <a:ln/>
+          </p:spPr>
+          <p:style>
+            <a:lnRef idx="3">
+              <a:schemeClr val="accent2"/>
+            </a:lnRef>
+            <a:fillRef idx="0">
+              <a:schemeClr val="accent2"/>
+            </a:fillRef>
+            <a:effectRef idx="2">
+              <a:schemeClr val="accent2"/>
+            </a:effectRef>
+            <a:fontRef idx="minor">
+              <a:schemeClr val="tx1"/>
+            </a:fontRef>
+          </p:style>
+        </p:cxnSp>
+        <p:cxnSp>
+          <p:nvCxnSpPr>
+            <p:cNvPr id="12" name="Conector recto 11">
+              <a:extLst>
+                <a:ext uri="{FF2B5EF4-FFF2-40B4-BE49-F238E27FC236}">
+                  <a16:creationId xmlns:a16="http://schemas.microsoft.com/office/drawing/2014/main" id="{05D9BC12-B1D8-3A66-F8A5-F4B275658ACF}"/>
+                </a:ext>
+              </a:extLst>
+            </p:cNvPr>
+            <p:cNvCxnSpPr>
+              <a:cxnSpLocks/>
+            </p:cNvCxnSpPr>
+            <p:nvPr/>
+          </p:nvCxnSpPr>
+          <p:spPr>
+            <a:xfrm rot="5400000" flipV="1">
+              <a:off x="10701881" y="5257800"/>
+              <a:ext cx="0" cy="1800000"/>
+            </a:xfrm>
+            <a:prstGeom prst="line">
+              <a:avLst/>
+            </a:prstGeom>
+            <a:ln/>
+          </p:spPr>
+          <p:style>
+            <a:lnRef idx="3">
+              <a:schemeClr val="accent2"/>
+            </a:lnRef>
+            <a:fillRef idx="0">
+              <a:schemeClr val="accent2"/>
+            </a:fillRef>
+            <a:effectRef idx="2">
+              <a:schemeClr val="accent2"/>
+            </a:effectRef>
+            <a:fontRef idx="minor">
+              <a:schemeClr val="tx1"/>
+            </a:fontRef>
+          </p:style>
+        </p:cxnSp>
+      </p:grpSp>
+      <p:grpSp>
+        <p:nvGrpSpPr>
+          <p:cNvPr id="17" name="Grupo 16">
+            <a:extLst>
+              <a:ext uri="{FF2B5EF4-FFF2-40B4-BE49-F238E27FC236}">
+                <a16:creationId xmlns:a16="http://schemas.microsoft.com/office/drawing/2014/main" id="{EAC00E75-E8EA-811C-33EF-0E7FA95B8195}"/>
+              </a:ext>
+            </a:extLst>
+          </p:cNvPr>
+          <p:cNvGrpSpPr/>
+          <p:nvPr/>
+        </p:nvGrpSpPr>
+        <p:grpSpPr>
+          <a:xfrm rot="16200000">
+            <a:off x="666571" y="4502524"/>
+            <a:ext cx="1800000" cy="1800000"/>
+            <a:chOff x="666571" y="555477"/>
+            <a:chExt cx="1800000" cy="1800000"/>
+          </a:xfrm>
+        </p:grpSpPr>
+        <p:cxnSp>
+          <p:nvCxnSpPr>
+            <p:cNvPr id="18" name="Conector recto 17">
+              <a:extLst>
+                <a:ext uri="{FF2B5EF4-FFF2-40B4-BE49-F238E27FC236}">
+                  <a16:creationId xmlns:a16="http://schemas.microsoft.com/office/drawing/2014/main" id="{AF6D210B-8735-DB71-071E-4FA9EAB077FC}"/>
+                </a:ext>
+              </a:extLst>
+            </p:cNvPr>
+            <p:cNvCxnSpPr/>
+            <p:nvPr/>
+          </p:nvCxnSpPr>
+          <p:spPr>
+            <a:xfrm>
+              <a:off x="666571" y="555477"/>
+              <a:ext cx="1800000" cy="0"/>
+            </a:xfrm>
+            <a:prstGeom prst="line">
+              <a:avLst/>
+            </a:prstGeom>
+            <a:ln/>
+          </p:spPr>
+          <p:style>
+            <a:lnRef idx="3">
+              <a:schemeClr val="accent2"/>
+            </a:lnRef>
+            <a:fillRef idx="0">
+              <a:schemeClr val="accent2"/>
+            </a:fillRef>
+            <a:effectRef idx="2">
+              <a:schemeClr val="accent2"/>
+            </a:effectRef>
+            <a:fontRef idx="minor">
+              <a:schemeClr val="tx1"/>
+            </a:fontRef>
+          </p:style>
+        </p:cxnSp>
+        <p:cxnSp>
+          <p:nvCxnSpPr>
+            <p:cNvPr id="19" name="Conector recto 18">
+              <a:extLst>
+                <a:ext uri="{FF2B5EF4-FFF2-40B4-BE49-F238E27FC236}">
+                  <a16:creationId xmlns:a16="http://schemas.microsoft.com/office/drawing/2014/main" id="{22647290-651A-5B82-D83E-FFFEA7BEA823}"/>
+                </a:ext>
+              </a:extLst>
+            </p:cNvPr>
+            <p:cNvCxnSpPr>
+              <a:cxnSpLocks/>
+            </p:cNvCxnSpPr>
+            <p:nvPr/>
+          </p:nvCxnSpPr>
+          <p:spPr>
+            <a:xfrm flipV="1">
+              <a:off x="666572" y="555477"/>
+              <a:ext cx="0" cy="1800000"/>
+            </a:xfrm>
+            <a:prstGeom prst="line">
+              <a:avLst/>
+            </a:prstGeom>
+            <a:ln/>
+          </p:spPr>
+          <p:style>
+            <a:lnRef idx="3">
+              <a:schemeClr val="accent2"/>
+            </a:lnRef>
+            <a:fillRef idx="0">
+              <a:schemeClr val="accent2"/>
+            </a:fillRef>
+            <a:effectRef idx="2">
+              <a:schemeClr val="accent2"/>
+            </a:effectRef>
+            <a:fontRef idx="minor">
+              <a:schemeClr val="tx1"/>
+            </a:fontRef>
+          </p:style>
+        </p:cxnSp>
+      </p:grpSp>
+      <p:grpSp>
+        <p:nvGrpSpPr>
+          <p:cNvPr id="20" name="Grupo 19">
+            <a:extLst>
+              <a:ext uri="{FF2B5EF4-FFF2-40B4-BE49-F238E27FC236}">
+                <a16:creationId xmlns:a16="http://schemas.microsoft.com/office/drawing/2014/main" id="{D6E56B9D-13A2-D158-6A09-D7F4B98FA047}"/>
+              </a:ext>
+            </a:extLst>
+          </p:cNvPr>
+          <p:cNvGrpSpPr/>
+          <p:nvPr/>
+        </p:nvGrpSpPr>
+        <p:grpSpPr>
+          <a:xfrm rot="16200000">
+            <a:off x="9725428" y="555477"/>
+            <a:ext cx="1800000" cy="1800000"/>
+            <a:chOff x="9801881" y="4357800"/>
+            <a:chExt cx="1800000" cy="1800000"/>
+          </a:xfrm>
+        </p:grpSpPr>
+        <p:cxnSp>
+          <p:nvCxnSpPr>
+            <p:cNvPr id="21" name="Conector recto 20">
+              <a:extLst>
+                <a:ext uri="{FF2B5EF4-FFF2-40B4-BE49-F238E27FC236}">
+                  <a16:creationId xmlns:a16="http://schemas.microsoft.com/office/drawing/2014/main" id="{24488377-5AC6-96C8-D400-03941F08FF00}"/>
+                </a:ext>
+              </a:extLst>
+            </p:cNvPr>
+            <p:cNvCxnSpPr>
+              <a:cxnSpLocks/>
+            </p:cNvCxnSpPr>
+            <p:nvPr/>
+          </p:nvCxnSpPr>
+          <p:spPr>
+            <a:xfrm rot="5400000">
+              <a:off x="10701880" y="5257800"/>
+              <a:ext cx="1800000" cy="0"/>
+            </a:xfrm>
+            <a:prstGeom prst="line">
+              <a:avLst/>
+            </a:prstGeom>
+            <a:ln/>
+          </p:spPr>
+          <p:style>
+            <a:lnRef idx="3">
+              <a:schemeClr val="accent2"/>
+            </a:lnRef>
+            <a:fillRef idx="0">
+              <a:schemeClr val="accent2"/>
+            </a:fillRef>
+            <a:effectRef idx="2">
+              <a:schemeClr val="accent2"/>
+            </a:effectRef>
+            <a:fontRef idx="minor">
+              <a:schemeClr val="tx1"/>
+            </a:fontRef>
+          </p:style>
+        </p:cxnSp>
+        <p:cxnSp>
+          <p:nvCxnSpPr>
+            <p:cNvPr id="22" name="Conector recto 21">
+              <a:extLst>
+                <a:ext uri="{FF2B5EF4-FFF2-40B4-BE49-F238E27FC236}">
+                  <a16:creationId xmlns:a16="http://schemas.microsoft.com/office/drawing/2014/main" id="{DB771FAC-5FE3-EE29-1F76-52B2EC14A990}"/>
+                </a:ext>
+              </a:extLst>
+            </p:cNvPr>
+            <p:cNvCxnSpPr>
+              <a:cxnSpLocks/>
+            </p:cNvCxnSpPr>
+            <p:nvPr/>
+          </p:nvCxnSpPr>
+          <p:spPr>
+            <a:xfrm rot="5400000" flipV="1">
+              <a:off x="10701881" y="5257800"/>
+              <a:ext cx="0" cy="1800000"/>
+            </a:xfrm>
+            <a:prstGeom prst="line">
+              <a:avLst/>
+            </a:prstGeom>
+            <a:ln/>
+          </p:spPr>
+          <p:style>
+            <a:lnRef idx="3">
+              <a:schemeClr val="accent2"/>
+            </a:lnRef>
+            <a:fillRef idx="0">
+              <a:schemeClr val="accent2"/>
+            </a:fillRef>
+            <a:effectRef idx="2">
+              <a:schemeClr val="accent2"/>
+            </a:effectRef>
+            <a:fontRef idx="minor">
+              <a:schemeClr val="tx1"/>
+            </a:fontRef>
+          </p:style>
+        </p:cxnSp>
+      </p:grpSp>
+    </p:spTree>
+    <p:extLst>
+      <p:ext uri="{BB962C8B-B14F-4D97-AF65-F5344CB8AC3E}">
+        <p14:creationId xmlns:p14="http://schemas.microsoft.com/office/powerpoint/2010/main" val="3203620280"/>
       </p:ext>
     </p:extLst>
   </p:cSld>
@@ -3633,10 +4737,2059 @@
           </p:style>
         </p:cxnSp>
       </p:grpSp>
+      <p:sp>
+        <p:nvSpPr>
+          <p:cNvPr id="2" name="CuadroTexto 1">
+            <a:extLst>
+              <a:ext uri="{FF2B5EF4-FFF2-40B4-BE49-F238E27FC236}">
+                <a16:creationId xmlns:a16="http://schemas.microsoft.com/office/drawing/2014/main" id="{A52EA291-9314-4C35-B185-5C79AD8F90D0}"/>
+              </a:ext>
+            </a:extLst>
+          </p:cNvPr>
+          <p:cNvSpPr txBox="1"/>
+          <p:nvPr/>
+        </p:nvSpPr>
+        <p:spPr>
+          <a:xfrm>
+            <a:off x="1031888" y="555724"/>
+            <a:ext cx="2499678" cy="369332"/>
+          </a:xfrm>
+          <a:prstGeom prst="rect">
+            <a:avLst/>
+          </a:prstGeom>
+          <a:noFill/>
+        </p:spPr>
+        <p:txBody>
+          <a:bodyPr wrap="square" rtlCol="0">
+            <a:spAutoFit/>
+          </a:bodyPr>
+          <a:lstStyle/>
+          <a:p>
+            <a:r>
+              <a:rPr lang="es-MX" dirty="0">
+                <a:solidFill>
+                  <a:schemeClr val="accent1"/>
+                </a:solidFill>
+                <a:latin typeface="+mj-lt"/>
+              </a:rPr>
+              <a:t>Introducción</a:t>
+            </a:r>
+            <a:endParaRPr lang="es-CL" dirty="0">
+              <a:solidFill>
+                <a:schemeClr val="accent1"/>
+              </a:solidFill>
+              <a:latin typeface="+mj-lt"/>
+            </a:endParaRPr>
+          </a:p>
+        </p:txBody>
+      </p:sp>
     </p:spTree>
     <p:extLst>
       <p:ext uri="{BB962C8B-B14F-4D97-AF65-F5344CB8AC3E}">
         <p14:creationId xmlns:p14="http://schemas.microsoft.com/office/powerpoint/2010/main" val="2286011023"/>
+      </p:ext>
+    </p:extLst>
+  </p:cSld>
+  <p:clrMapOvr>
+    <a:masterClrMapping/>
+  </p:clrMapOvr>
+</p:sld>
+</file>
+
+<file path=ppt/slides/slide3.xml><?xml version="1.0" encoding="utf-8"?>
+<p:sld xmlns:a="http://schemas.openxmlformats.org/drawingml/2006/main" xmlns:r="http://schemas.openxmlformats.org/officeDocument/2006/relationships" xmlns:p="http://schemas.openxmlformats.org/presentationml/2006/main">
+  <p:cSld>
+    <p:bg>
+      <p:bgPr>
+        <a:solidFill>
+          <a:schemeClr val="tx2"/>
+        </a:solidFill>
+        <a:effectLst/>
+      </p:bgPr>
+    </p:bg>
+    <p:spTree>
+      <p:nvGrpSpPr>
+        <p:cNvPr id="1" name="">
+          <a:extLst>
+            <a:ext uri="{FF2B5EF4-FFF2-40B4-BE49-F238E27FC236}">
+              <a16:creationId xmlns:a16="http://schemas.microsoft.com/office/drawing/2014/main" id="{C540BD4A-40B1-A3B8-ABDA-4CC116E12B18}"/>
+            </a:ext>
+          </a:extLst>
+        </p:cNvPr>
+        <p:cNvGrpSpPr/>
+        <p:nvPr/>
+      </p:nvGrpSpPr>
+      <p:grpSpPr>
+        <a:xfrm>
+          <a:off x="0" y="0"/>
+          <a:ext cx="0" cy="0"/>
+          <a:chOff x="0" y="0"/>
+          <a:chExt cx="0" cy="0"/>
+        </a:xfrm>
+      </p:grpSpPr>
+      <p:sp>
+        <p:nvSpPr>
+          <p:cNvPr id="8" name="CuadroTexto 7">
+            <a:extLst>
+              <a:ext uri="{FF2B5EF4-FFF2-40B4-BE49-F238E27FC236}">
+                <a16:creationId xmlns:a16="http://schemas.microsoft.com/office/drawing/2014/main" id="{D697394C-3EB3-051E-BB3B-46414AC7ED3F}"/>
+              </a:ext>
+            </a:extLst>
+          </p:cNvPr>
+          <p:cNvSpPr txBox="1"/>
+          <p:nvPr/>
+        </p:nvSpPr>
+        <p:spPr>
+          <a:xfrm>
+            <a:off x="2281727" y="2264635"/>
+            <a:ext cx="4349810" cy="2346540"/>
+          </a:xfrm>
+          <a:prstGeom prst="rect">
+            <a:avLst/>
+          </a:prstGeom>
+          <a:noFill/>
+        </p:spPr>
+        <p:txBody>
+          <a:bodyPr wrap="square" rtlCol="0">
+            <a:spAutoFit/>
+          </a:bodyPr>
+          <a:lstStyle/>
+          <a:p>
+            <a:pPr marL="285750" indent="-285750">
+              <a:lnSpc>
+                <a:spcPct val="150000"/>
+              </a:lnSpc>
+              <a:buFont typeface="Arial" panose="020B0604020202020204" pitchFamily="34" charset="0"/>
+              <a:buChar char="•"/>
+            </a:pPr>
+            <a:r>
+              <a:rPr lang="es-MX" sz="2000" dirty="0" err="1">
+                <a:solidFill>
+                  <a:schemeClr val="bg1"/>
+                </a:solidFill>
+              </a:rPr>
+              <a:t>Saf</a:t>
+            </a:r>
+            <a:endParaRPr lang="es-MX" sz="2000" dirty="0">
+              <a:solidFill>
+                <a:schemeClr val="bg1"/>
+              </a:solidFill>
+            </a:endParaRPr>
+          </a:p>
+          <a:p>
+            <a:pPr marL="285750" indent="-285750">
+              <a:lnSpc>
+                <a:spcPct val="150000"/>
+              </a:lnSpc>
+              <a:buFont typeface="Arial" panose="020B0604020202020204" pitchFamily="34" charset="0"/>
+              <a:buChar char="•"/>
+            </a:pPr>
+            <a:endParaRPr lang="es-CL" sz="2000" dirty="0">
+              <a:solidFill>
+                <a:schemeClr val="bg1"/>
+              </a:solidFill>
+            </a:endParaRPr>
+          </a:p>
+          <a:p>
+            <a:pPr marL="285750" indent="-285750">
+              <a:lnSpc>
+                <a:spcPct val="150000"/>
+              </a:lnSpc>
+              <a:buFont typeface="Arial" panose="020B0604020202020204" pitchFamily="34" charset="0"/>
+              <a:buChar char="•"/>
+            </a:pPr>
+            <a:r>
+              <a:rPr lang="es-CL" sz="2000" dirty="0">
+                <a:solidFill>
+                  <a:schemeClr val="bg1"/>
+                </a:solidFill>
+              </a:rPr>
+              <a:t>S</a:t>
+            </a:r>
+          </a:p>
+          <a:p>
+            <a:pPr marL="285750" indent="-285750">
+              <a:lnSpc>
+                <a:spcPct val="150000"/>
+              </a:lnSpc>
+              <a:buFont typeface="Arial" panose="020B0604020202020204" pitchFamily="34" charset="0"/>
+              <a:buChar char="•"/>
+            </a:pPr>
+            <a:endParaRPr lang="es-CL" sz="2000" dirty="0">
+              <a:solidFill>
+                <a:schemeClr val="bg1"/>
+              </a:solidFill>
+            </a:endParaRPr>
+          </a:p>
+          <a:p>
+            <a:pPr marL="285750" indent="-285750">
+              <a:lnSpc>
+                <a:spcPct val="150000"/>
+              </a:lnSpc>
+              <a:buFont typeface="Arial" panose="020B0604020202020204" pitchFamily="34" charset="0"/>
+              <a:buChar char="•"/>
+            </a:pPr>
+            <a:r>
+              <a:rPr lang="es-CL" sz="2000" dirty="0">
+                <a:solidFill>
+                  <a:schemeClr val="bg1"/>
+                </a:solidFill>
+              </a:rPr>
+              <a:t>s</a:t>
+            </a:r>
+            <a:endParaRPr lang="es-MX" sz="2000" dirty="0">
+              <a:solidFill>
+                <a:schemeClr val="bg1"/>
+              </a:solidFill>
+            </a:endParaRPr>
+          </a:p>
+        </p:txBody>
+      </p:sp>
+      <p:grpSp>
+        <p:nvGrpSpPr>
+          <p:cNvPr id="25" name="Grupo 24">
+            <a:extLst>
+              <a:ext uri="{FF2B5EF4-FFF2-40B4-BE49-F238E27FC236}">
+                <a16:creationId xmlns:a16="http://schemas.microsoft.com/office/drawing/2014/main" id="{8F18C815-584E-60D6-D87B-F5489B7EEC3F}"/>
+              </a:ext>
+            </a:extLst>
+          </p:cNvPr>
+          <p:cNvGrpSpPr/>
+          <p:nvPr/>
+        </p:nvGrpSpPr>
+        <p:grpSpPr>
+          <a:xfrm>
+            <a:off x="841727" y="546930"/>
+            <a:ext cx="2880000" cy="540000"/>
+            <a:chOff x="786213" y="521293"/>
+            <a:chExt cx="2880000" cy="540000"/>
+          </a:xfrm>
+        </p:grpSpPr>
+        <p:cxnSp>
+          <p:nvCxnSpPr>
+            <p:cNvPr id="10" name="Conector recto 9">
+              <a:extLst>
+                <a:ext uri="{FF2B5EF4-FFF2-40B4-BE49-F238E27FC236}">
+                  <a16:creationId xmlns:a16="http://schemas.microsoft.com/office/drawing/2014/main" id="{4EBB4DEA-B4C9-22FB-0E84-B646F95232F4}"/>
+                </a:ext>
+              </a:extLst>
+            </p:cNvPr>
+            <p:cNvCxnSpPr/>
+            <p:nvPr/>
+          </p:nvCxnSpPr>
+          <p:spPr>
+            <a:xfrm>
+              <a:off x="786213" y="521293"/>
+              <a:ext cx="0" cy="540000"/>
+            </a:xfrm>
+            <a:prstGeom prst="line">
+              <a:avLst/>
+            </a:prstGeom>
+          </p:spPr>
+          <p:style>
+            <a:lnRef idx="3">
+              <a:schemeClr val="accent2"/>
+            </a:lnRef>
+            <a:fillRef idx="0">
+              <a:schemeClr val="accent2"/>
+            </a:fillRef>
+            <a:effectRef idx="2">
+              <a:schemeClr val="accent2"/>
+            </a:effectRef>
+            <a:fontRef idx="minor">
+              <a:schemeClr val="tx1"/>
+            </a:fontRef>
+          </p:style>
+        </p:cxnSp>
+        <p:cxnSp>
+          <p:nvCxnSpPr>
+            <p:cNvPr id="14" name="Conector recto 13">
+              <a:extLst>
+                <a:ext uri="{FF2B5EF4-FFF2-40B4-BE49-F238E27FC236}">
+                  <a16:creationId xmlns:a16="http://schemas.microsoft.com/office/drawing/2014/main" id="{7E3885E7-19E2-3DD2-08ED-5EB12021A7B0}"/>
+                </a:ext>
+              </a:extLst>
+            </p:cNvPr>
+            <p:cNvCxnSpPr>
+              <a:cxnSpLocks/>
+            </p:cNvCxnSpPr>
+            <p:nvPr/>
+          </p:nvCxnSpPr>
+          <p:spPr>
+            <a:xfrm>
+              <a:off x="786213" y="1061293"/>
+              <a:ext cx="2880000" cy="0"/>
+            </a:xfrm>
+            <a:prstGeom prst="line">
+              <a:avLst/>
+            </a:prstGeom>
+          </p:spPr>
+          <p:style>
+            <a:lnRef idx="3">
+              <a:schemeClr val="accent2"/>
+            </a:lnRef>
+            <a:fillRef idx="0">
+              <a:schemeClr val="accent2"/>
+            </a:fillRef>
+            <a:effectRef idx="2">
+              <a:schemeClr val="accent2"/>
+            </a:effectRef>
+            <a:fontRef idx="minor">
+              <a:schemeClr val="tx1"/>
+            </a:fontRef>
+          </p:style>
+        </p:cxnSp>
+      </p:grpSp>
+      <p:sp>
+        <p:nvSpPr>
+          <p:cNvPr id="3" name="CuadroTexto 2">
+            <a:extLst>
+              <a:ext uri="{FF2B5EF4-FFF2-40B4-BE49-F238E27FC236}">
+                <a16:creationId xmlns:a16="http://schemas.microsoft.com/office/drawing/2014/main" id="{F1EFD41A-FAFC-9BED-5C7C-5A2B46425529}"/>
+              </a:ext>
+            </a:extLst>
+          </p:cNvPr>
+          <p:cNvSpPr txBox="1"/>
+          <p:nvPr/>
+        </p:nvSpPr>
+        <p:spPr>
+          <a:xfrm>
+            <a:off x="1031888" y="555724"/>
+            <a:ext cx="2499678" cy="369332"/>
+          </a:xfrm>
+          <a:prstGeom prst="rect">
+            <a:avLst/>
+          </a:prstGeom>
+          <a:noFill/>
+        </p:spPr>
+        <p:txBody>
+          <a:bodyPr wrap="square" rtlCol="0">
+            <a:spAutoFit/>
+          </a:bodyPr>
+          <a:lstStyle/>
+          <a:p>
+            <a:r>
+              <a:rPr lang="es-MX" dirty="0">
+                <a:solidFill>
+                  <a:schemeClr val="accent1"/>
+                </a:solidFill>
+                <a:latin typeface="+mj-lt"/>
+              </a:rPr>
+              <a:t>Contexto</a:t>
+            </a:r>
+            <a:endParaRPr lang="es-CL" dirty="0">
+              <a:solidFill>
+                <a:schemeClr val="accent1"/>
+              </a:solidFill>
+              <a:latin typeface="+mj-lt"/>
+            </a:endParaRPr>
+          </a:p>
+        </p:txBody>
+      </p:sp>
+    </p:spTree>
+    <p:extLst>
+      <p:ext uri="{BB962C8B-B14F-4D97-AF65-F5344CB8AC3E}">
+        <p14:creationId xmlns:p14="http://schemas.microsoft.com/office/powerpoint/2010/main" val="3016230215"/>
+      </p:ext>
+    </p:extLst>
+  </p:cSld>
+  <p:clrMapOvr>
+    <a:masterClrMapping/>
+  </p:clrMapOvr>
+</p:sld>
+</file>
+
+<file path=ppt/slides/slide4.xml><?xml version="1.0" encoding="utf-8"?>
+<p:sld xmlns:a="http://schemas.openxmlformats.org/drawingml/2006/main" xmlns:r="http://schemas.openxmlformats.org/officeDocument/2006/relationships" xmlns:p="http://schemas.openxmlformats.org/presentationml/2006/main">
+  <p:cSld>
+    <p:bg>
+      <p:bgPr>
+        <a:solidFill>
+          <a:schemeClr val="tx2"/>
+        </a:solidFill>
+        <a:effectLst/>
+      </p:bgPr>
+    </p:bg>
+    <p:spTree>
+      <p:nvGrpSpPr>
+        <p:cNvPr id="1" name="">
+          <a:extLst>
+            <a:ext uri="{FF2B5EF4-FFF2-40B4-BE49-F238E27FC236}">
+              <a16:creationId xmlns:a16="http://schemas.microsoft.com/office/drawing/2014/main" id="{74E6E7D1-A8CB-59CE-25E5-1D3FFBA186C0}"/>
+            </a:ext>
+          </a:extLst>
+        </p:cNvPr>
+        <p:cNvGrpSpPr/>
+        <p:nvPr/>
+      </p:nvGrpSpPr>
+      <p:grpSpPr>
+        <a:xfrm>
+          <a:off x="0" y="0"/>
+          <a:ext cx="0" cy="0"/>
+          <a:chOff x="0" y="0"/>
+          <a:chExt cx="0" cy="0"/>
+        </a:xfrm>
+      </p:grpSpPr>
+      <p:sp>
+        <p:nvSpPr>
+          <p:cNvPr id="8" name="CuadroTexto 7">
+            <a:extLst>
+              <a:ext uri="{FF2B5EF4-FFF2-40B4-BE49-F238E27FC236}">
+                <a16:creationId xmlns:a16="http://schemas.microsoft.com/office/drawing/2014/main" id="{1BBB11A7-C6C1-2709-8586-91B19AC30FB9}"/>
+              </a:ext>
+            </a:extLst>
+          </p:cNvPr>
+          <p:cNvSpPr txBox="1"/>
+          <p:nvPr/>
+        </p:nvSpPr>
+        <p:spPr>
+          <a:xfrm>
+            <a:off x="2281727" y="2264635"/>
+            <a:ext cx="4349810" cy="2346540"/>
+          </a:xfrm>
+          <a:prstGeom prst="rect">
+            <a:avLst/>
+          </a:prstGeom>
+          <a:noFill/>
+        </p:spPr>
+        <p:txBody>
+          <a:bodyPr wrap="square" rtlCol="0">
+            <a:spAutoFit/>
+          </a:bodyPr>
+          <a:lstStyle/>
+          <a:p>
+            <a:pPr marL="285750" indent="-285750">
+              <a:lnSpc>
+                <a:spcPct val="150000"/>
+              </a:lnSpc>
+              <a:buFont typeface="Arial" panose="020B0604020202020204" pitchFamily="34" charset="0"/>
+              <a:buChar char="•"/>
+            </a:pPr>
+            <a:r>
+              <a:rPr lang="es-MX" sz="2000" dirty="0" err="1">
+                <a:solidFill>
+                  <a:schemeClr val="bg1"/>
+                </a:solidFill>
+              </a:rPr>
+              <a:t>Saf</a:t>
+            </a:r>
+            <a:endParaRPr lang="es-MX" sz="2000" dirty="0">
+              <a:solidFill>
+                <a:schemeClr val="bg1"/>
+              </a:solidFill>
+            </a:endParaRPr>
+          </a:p>
+          <a:p>
+            <a:pPr marL="285750" indent="-285750">
+              <a:lnSpc>
+                <a:spcPct val="150000"/>
+              </a:lnSpc>
+              <a:buFont typeface="Arial" panose="020B0604020202020204" pitchFamily="34" charset="0"/>
+              <a:buChar char="•"/>
+            </a:pPr>
+            <a:endParaRPr lang="es-CL" sz="2000" dirty="0">
+              <a:solidFill>
+                <a:schemeClr val="bg1"/>
+              </a:solidFill>
+            </a:endParaRPr>
+          </a:p>
+          <a:p>
+            <a:pPr marL="285750" indent="-285750">
+              <a:lnSpc>
+                <a:spcPct val="150000"/>
+              </a:lnSpc>
+              <a:buFont typeface="Arial" panose="020B0604020202020204" pitchFamily="34" charset="0"/>
+              <a:buChar char="•"/>
+            </a:pPr>
+            <a:r>
+              <a:rPr lang="es-CL" sz="2000" dirty="0">
+                <a:solidFill>
+                  <a:schemeClr val="bg1"/>
+                </a:solidFill>
+              </a:rPr>
+              <a:t>S</a:t>
+            </a:r>
+          </a:p>
+          <a:p>
+            <a:pPr marL="285750" indent="-285750">
+              <a:lnSpc>
+                <a:spcPct val="150000"/>
+              </a:lnSpc>
+              <a:buFont typeface="Arial" panose="020B0604020202020204" pitchFamily="34" charset="0"/>
+              <a:buChar char="•"/>
+            </a:pPr>
+            <a:endParaRPr lang="es-CL" sz="2000" dirty="0">
+              <a:solidFill>
+                <a:schemeClr val="bg1"/>
+              </a:solidFill>
+            </a:endParaRPr>
+          </a:p>
+          <a:p>
+            <a:pPr marL="285750" indent="-285750">
+              <a:lnSpc>
+                <a:spcPct val="150000"/>
+              </a:lnSpc>
+              <a:buFont typeface="Arial" panose="020B0604020202020204" pitchFamily="34" charset="0"/>
+              <a:buChar char="•"/>
+            </a:pPr>
+            <a:r>
+              <a:rPr lang="es-CL" sz="2000" dirty="0">
+                <a:solidFill>
+                  <a:schemeClr val="bg1"/>
+                </a:solidFill>
+              </a:rPr>
+              <a:t>s</a:t>
+            </a:r>
+            <a:endParaRPr lang="es-MX" sz="2000" dirty="0">
+              <a:solidFill>
+                <a:schemeClr val="bg1"/>
+              </a:solidFill>
+            </a:endParaRPr>
+          </a:p>
+        </p:txBody>
+      </p:sp>
+      <p:grpSp>
+        <p:nvGrpSpPr>
+          <p:cNvPr id="25" name="Grupo 24">
+            <a:extLst>
+              <a:ext uri="{FF2B5EF4-FFF2-40B4-BE49-F238E27FC236}">
+                <a16:creationId xmlns:a16="http://schemas.microsoft.com/office/drawing/2014/main" id="{1E6FD3C3-D76D-BCA6-68F4-128F41F25A06}"/>
+              </a:ext>
+            </a:extLst>
+          </p:cNvPr>
+          <p:cNvGrpSpPr/>
+          <p:nvPr/>
+        </p:nvGrpSpPr>
+        <p:grpSpPr>
+          <a:xfrm>
+            <a:off x="841727" y="546930"/>
+            <a:ext cx="2880000" cy="540000"/>
+            <a:chOff x="786213" y="521293"/>
+            <a:chExt cx="2880000" cy="540000"/>
+          </a:xfrm>
+        </p:grpSpPr>
+        <p:cxnSp>
+          <p:nvCxnSpPr>
+            <p:cNvPr id="10" name="Conector recto 9">
+              <a:extLst>
+                <a:ext uri="{FF2B5EF4-FFF2-40B4-BE49-F238E27FC236}">
+                  <a16:creationId xmlns:a16="http://schemas.microsoft.com/office/drawing/2014/main" id="{9ADD293C-6241-6C76-6469-43D0282BCE35}"/>
+                </a:ext>
+              </a:extLst>
+            </p:cNvPr>
+            <p:cNvCxnSpPr/>
+            <p:nvPr/>
+          </p:nvCxnSpPr>
+          <p:spPr>
+            <a:xfrm>
+              <a:off x="786213" y="521293"/>
+              <a:ext cx="0" cy="540000"/>
+            </a:xfrm>
+            <a:prstGeom prst="line">
+              <a:avLst/>
+            </a:prstGeom>
+          </p:spPr>
+          <p:style>
+            <a:lnRef idx="3">
+              <a:schemeClr val="accent2"/>
+            </a:lnRef>
+            <a:fillRef idx="0">
+              <a:schemeClr val="accent2"/>
+            </a:fillRef>
+            <a:effectRef idx="2">
+              <a:schemeClr val="accent2"/>
+            </a:effectRef>
+            <a:fontRef idx="minor">
+              <a:schemeClr val="tx1"/>
+            </a:fontRef>
+          </p:style>
+        </p:cxnSp>
+        <p:cxnSp>
+          <p:nvCxnSpPr>
+            <p:cNvPr id="14" name="Conector recto 13">
+              <a:extLst>
+                <a:ext uri="{FF2B5EF4-FFF2-40B4-BE49-F238E27FC236}">
+                  <a16:creationId xmlns:a16="http://schemas.microsoft.com/office/drawing/2014/main" id="{643A3B96-FD48-C215-3BB0-D0401F210303}"/>
+                </a:ext>
+              </a:extLst>
+            </p:cNvPr>
+            <p:cNvCxnSpPr>
+              <a:cxnSpLocks/>
+            </p:cNvCxnSpPr>
+            <p:nvPr/>
+          </p:nvCxnSpPr>
+          <p:spPr>
+            <a:xfrm>
+              <a:off x="786213" y="1061293"/>
+              <a:ext cx="2880000" cy="0"/>
+            </a:xfrm>
+            <a:prstGeom prst="line">
+              <a:avLst/>
+            </a:prstGeom>
+          </p:spPr>
+          <p:style>
+            <a:lnRef idx="3">
+              <a:schemeClr val="accent2"/>
+            </a:lnRef>
+            <a:fillRef idx="0">
+              <a:schemeClr val="accent2"/>
+            </a:fillRef>
+            <a:effectRef idx="2">
+              <a:schemeClr val="accent2"/>
+            </a:effectRef>
+            <a:fontRef idx="minor">
+              <a:schemeClr val="tx1"/>
+            </a:fontRef>
+          </p:style>
+        </p:cxnSp>
+      </p:grpSp>
+      <p:sp>
+        <p:nvSpPr>
+          <p:cNvPr id="3" name="CuadroTexto 2">
+            <a:extLst>
+              <a:ext uri="{FF2B5EF4-FFF2-40B4-BE49-F238E27FC236}">
+                <a16:creationId xmlns:a16="http://schemas.microsoft.com/office/drawing/2014/main" id="{0184CF6D-2473-0C0C-91D4-4826F8C50515}"/>
+              </a:ext>
+            </a:extLst>
+          </p:cNvPr>
+          <p:cNvSpPr txBox="1"/>
+          <p:nvPr/>
+        </p:nvSpPr>
+        <p:spPr>
+          <a:xfrm>
+            <a:off x="1031888" y="555724"/>
+            <a:ext cx="2499678" cy="369332"/>
+          </a:xfrm>
+          <a:prstGeom prst="rect">
+            <a:avLst/>
+          </a:prstGeom>
+          <a:noFill/>
+        </p:spPr>
+        <p:txBody>
+          <a:bodyPr wrap="square" rtlCol="0">
+            <a:spAutoFit/>
+          </a:bodyPr>
+          <a:lstStyle/>
+          <a:p>
+            <a:r>
+              <a:rPr lang="es-MX" dirty="0">
+                <a:solidFill>
+                  <a:schemeClr val="accent1"/>
+                </a:solidFill>
+                <a:latin typeface="+mj-lt"/>
+              </a:rPr>
+              <a:t>Problemática</a:t>
+            </a:r>
+            <a:endParaRPr lang="es-CL" dirty="0">
+              <a:solidFill>
+                <a:schemeClr val="accent1"/>
+              </a:solidFill>
+              <a:latin typeface="+mj-lt"/>
+            </a:endParaRPr>
+          </a:p>
+        </p:txBody>
+      </p:sp>
+    </p:spTree>
+    <p:extLst>
+      <p:ext uri="{BB962C8B-B14F-4D97-AF65-F5344CB8AC3E}">
+        <p14:creationId xmlns:p14="http://schemas.microsoft.com/office/powerpoint/2010/main" val="2158553757"/>
+      </p:ext>
+    </p:extLst>
+  </p:cSld>
+  <p:clrMapOvr>
+    <a:masterClrMapping/>
+  </p:clrMapOvr>
+</p:sld>
+</file>
+
+<file path=ppt/slides/slide5.xml><?xml version="1.0" encoding="utf-8"?>
+<p:sld xmlns:a="http://schemas.openxmlformats.org/drawingml/2006/main" xmlns:r="http://schemas.openxmlformats.org/officeDocument/2006/relationships" xmlns:p="http://schemas.openxmlformats.org/presentationml/2006/main">
+  <p:cSld>
+    <p:bg>
+      <p:bgPr>
+        <a:solidFill>
+          <a:schemeClr val="tx2"/>
+        </a:solidFill>
+        <a:effectLst/>
+      </p:bgPr>
+    </p:bg>
+    <p:spTree>
+      <p:nvGrpSpPr>
+        <p:cNvPr id="1" name="">
+          <a:extLst>
+            <a:ext uri="{FF2B5EF4-FFF2-40B4-BE49-F238E27FC236}">
+              <a16:creationId xmlns:a16="http://schemas.microsoft.com/office/drawing/2014/main" id="{12CD3DAA-EC76-4D2B-7B14-F9F33C6735ED}"/>
+            </a:ext>
+          </a:extLst>
+        </p:cNvPr>
+        <p:cNvGrpSpPr/>
+        <p:nvPr/>
+      </p:nvGrpSpPr>
+      <p:grpSpPr>
+        <a:xfrm>
+          <a:off x="0" y="0"/>
+          <a:ext cx="0" cy="0"/>
+          <a:chOff x="0" y="0"/>
+          <a:chExt cx="0" cy="0"/>
+        </a:xfrm>
+      </p:grpSpPr>
+      <p:sp>
+        <p:nvSpPr>
+          <p:cNvPr id="8" name="CuadroTexto 7">
+            <a:extLst>
+              <a:ext uri="{FF2B5EF4-FFF2-40B4-BE49-F238E27FC236}">
+                <a16:creationId xmlns:a16="http://schemas.microsoft.com/office/drawing/2014/main" id="{CB9D833E-7075-8BC0-8C3B-2DF7509CA7BB}"/>
+              </a:ext>
+            </a:extLst>
+          </p:cNvPr>
+          <p:cNvSpPr txBox="1"/>
+          <p:nvPr/>
+        </p:nvSpPr>
+        <p:spPr>
+          <a:xfrm>
+            <a:off x="2281727" y="2264635"/>
+            <a:ext cx="4349810" cy="2346540"/>
+          </a:xfrm>
+          <a:prstGeom prst="rect">
+            <a:avLst/>
+          </a:prstGeom>
+          <a:noFill/>
+        </p:spPr>
+        <p:txBody>
+          <a:bodyPr wrap="square" rtlCol="0">
+            <a:spAutoFit/>
+          </a:bodyPr>
+          <a:lstStyle/>
+          <a:p>
+            <a:pPr marL="285750" indent="-285750">
+              <a:lnSpc>
+                <a:spcPct val="150000"/>
+              </a:lnSpc>
+              <a:buFont typeface="Arial" panose="020B0604020202020204" pitchFamily="34" charset="0"/>
+              <a:buChar char="•"/>
+            </a:pPr>
+            <a:r>
+              <a:rPr lang="es-MX" sz="2000" dirty="0" err="1">
+                <a:solidFill>
+                  <a:schemeClr val="bg1"/>
+                </a:solidFill>
+              </a:rPr>
+              <a:t>Saf</a:t>
+            </a:r>
+            <a:endParaRPr lang="es-MX" sz="2000" dirty="0">
+              <a:solidFill>
+                <a:schemeClr val="bg1"/>
+              </a:solidFill>
+            </a:endParaRPr>
+          </a:p>
+          <a:p>
+            <a:pPr marL="285750" indent="-285750">
+              <a:lnSpc>
+                <a:spcPct val="150000"/>
+              </a:lnSpc>
+              <a:buFont typeface="Arial" panose="020B0604020202020204" pitchFamily="34" charset="0"/>
+              <a:buChar char="•"/>
+            </a:pPr>
+            <a:endParaRPr lang="es-CL" sz="2000" dirty="0">
+              <a:solidFill>
+                <a:schemeClr val="bg1"/>
+              </a:solidFill>
+            </a:endParaRPr>
+          </a:p>
+          <a:p>
+            <a:pPr marL="285750" indent="-285750">
+              <a:lnSpc>
+                <a:spcPct val="150000"/>
+              </a:lnSpc>
+              <a:buFont typeface="Arial" panose="020B0604020202020204" pitchFamily="34" charset="0"/>
+              <a:buChar char="•"/>
+            </a:pPr>
+            <a:r>
+              <a:rPr lang="es-CL" sz="2000" dirty="0">
+                <a:solidFill>
+                  <a:schemeClr val="bg1"/>
+                </a:solidFill>
+              </a:rPr>
+              <a:t>S</a:t>
+            </a:r>
+          </a:p>
+          <a:p>
+            <a:pPr marL="285750" indent="-285750">
+              <a:lnSpc>
+                <a:spcPct val="150000"/>
+              </a:lnSpc>
+              <a:buFont typeface="Arial" panose="020B0604020202020204" pitchFamily="34" charset="0"/>
+              <a:buChar char="•"/>
+            </a:pPr>
+            <a:endParaRPr lang="es-CL" sz="2000" dirty="0">
+              <a:solidFill>
+                <a:schemeClr val="bg1"/>
+              </a:solidFill>
+            </a:endParaRPr>
+          </a:p>
+          <a:p>
+            <a:pPr marL="285750" indent="-285750">
+              <a:lnSpc>
+                <a:spcPct val="150000"/>
+              </a:lnSpc>
+              <a:buFont typeface="Arial" panose="020B0604020202020204" pitchFamily="34" charset="0"/>
+              <a:buChar char="•"/>
+            </a:pPr>
+            <a:r>
+              <a:rPr lang="es-CL" sz="2000" dirty="0">
+                <a:solidFill>
+                  <a:schemeClr val="bg1"/>
+                </a:solidFill>
+              </a:rPr>
+              <a:t>s</a:t>
+            </a:r>
+            <a:endParaRPr lang="es-MX" sz="2000" dirty="0">
+              <a:solidFill>
+                <a:schemeClr val="bg1"/>
+              </a:solidFill>
+            </a:endParaRPr>
+          </a:p>
+        </p:txBody>
+      </p:sp>
+      <p:grpSp>
+        <p:nvGrpSpPr>
+          <p:cNvPr id="25" name="Grupo 24">
+            <a:extLst>
+              <a:ext uri="{FF2B5EF4-FFF2-40B4-BE49-F238E27FC236}">
+                <a16:creationId xmlns:a16="http://schemas.microsoft.com/office/drawing/2014/main" id="{CC8ED33D-819C-93A4-DA16-43A4C22921CC}"/>
+              </a:ext>
+            </a:extLst>
+          </p:cNvPr>
+          <p:cNvGrpSpPr/>
+          <p:nvPr/>
+        </p:nvGrpSpPr>
+        <p:grpSpPr>
+          <a:xfrm>
+            <a:off x="841727" y="546930"/>
+            <a:ext cx="2880000" cy="540000"/>
+            <a:chOff x="786213" y="521293"/>
+            <a:chExt cx="2880000" cy="540000"/>
+          </a:xfrm>
+        </p:grpSpPr>
+        <p:cxnSp>
+          <p:nvCxnSpPr>
+            <p:cNvPr id="10" name="Conector recto 9">
+              <a:extLst>
+                <a:ext uri="{FF2B5EF4-FFF2-40B4-BE49-F238E27FC236}">
+                  <a16:creationId xmlns:a16="http://schemas.microsoft.com/office/drawing/2014/main" id="{7D52BC26-EB38-21B4-CCEB-9E3D3CB9C4D1}"/>
+                </a:ext>
+              </a:extLst>
+            </p:cNvPr>
+            <p:cNvCxnSpPr/>
+            <p:nvPr/>
+          </p:nvCxnSpPr>
+          <p:spPr>
+            <a:xfrm>
+              <a:off x="786213" y="521293"/>
+              <a:ext cx="0" cy="540000"/>
+            </a:xfrm>
+            <a:prstGeom prst="line">
+              <a:avLst/>
+            </a:prstGeom>
+          </p:spPr>
+          <p:style>
+            <a:lnRef idx="3">
+              <a:schemeClr val="accent2"/>
+            </a:lnRef>
+            <a:fillRef idx="0">
+              <a:schemeClr val="accent2"/>
+            </a:fillRef>
+            <a:effectRef idx="2">
+              <a:schemeClr val="accent2"/>
+            </a:effectRef>
+            <a:fontRef idx="minor">
+              <a:schemeClr val="tx1"/>
+            </a:fontRef>
+          </p:style>
+        </p:cxnSp>
+        <p:cxnSp>
+          <p:nvCxnSpPr>
+            <p:cNvPr id="14" name="Conector recto 13">
+              <a:extLst>
+                <a:ext uri="{FF2B5EF4-FFF2-40B4-BE49-F238E27FC236}">
+                  <a16:creationId xmlns:a16="http://schemas.microsoft.com/office/drawing/2014/main" id="{9C98B482-3BB1-743C-8030-D11588CAA0AF}"/>
+                </a:ext>
+              </a:extLst>
+            </p:cNvPr>
+            <p:cNvCxnSpPr>
+              <a:cxnSpLocks/>
+            </p:cNvCxnSpPr>
+            <p:nvPr/>
+          </p:nvCxnSpPr>
+          <p:spPr>
+            <a:xfrm>
+              <a:off x="786213" y="1061293"/>
+              <a:ext cx="2880000" cy="0"/>
+            </a:xfrm>
+            <a:prstGeom prst="line">
+              <a:avLst/>
+            </a:prstGeom>
+          </p:spPr>
+          <p:style>
+            <a:lnRef idx="3">
+              <a:schemeClr val="accent2"/>
+            </a:lnRef>
+            <a:fillRef idx="0">
+              <a:schemeClr val="accent2"/>
+            </a:fillRef>
+            <a:effectRef idx="2">
+              <a:schemeClr val="accent2"/>
+            </a:effectRef>
+            <a:fontRef idx="minor">
+              <a:schemeClr val="tx1"/>
+            </a:fontRef>
+          </p:style>
+        </p:cxnSp>
+      </p:grpSp>
+      <p:sp>
+        <p:nvSpPr>
+          <p:cNvPr id="3" name="CuadroTexto 2">
+            <a:extLst>
+              <a:ext uri="{FF2B5EF4-FFF2-40B4-BE49-F238E27FC236}">
+                <a16:creationId xmlns:a16="http://schemas.microsoft.com/office/drawing/2014/main" id="{D6D4D9EB-CC89-7E64-F89B-39FF7E7490AF}"/>
+              </a:ext>
+            </a:extLst>
+          </p:cNvPr>
+          <p:cNvSpPr txBox="1"/>
+          <p:nvPr/>
+        </p:nvSpPr>
+        <p:spPr>
+          <a:xfrm>
+            <a:off x="1031888" y="502155"/>
+            <a:ext cx="2499678" cy="584775"/>
+          </a:xfrm>
+          <a:prstGeom prst="rect">
+            <a:avLst/>
+          </a:prstGeom>
+          <a:noFill/>
+        </p:spPr>
+        <p:txBody>
+          <a:bodyPr wrap="square" rtlCol="0">
+            <a:spAutoFit/>
+          </a:bodyPr>
+          <a:lstStyle/>
+          <a:p>
+            <a:r>
+              <a:rPr lang="es-MX" sz="1600" dirty="0">
+                <a:solidFill>
+                  <a:schemeClr val="accent1"/>
+                </a:solidFill>
+                <a:latin typeface="+mj-lt"/>
+              </a:rPr>
+              <a:t>Propuesta de Solución</a:t>
+            </a:r>
+            <a:endParaRPr lang="es-CL" sz="1600" dirty="0">
+              <a:solidFill>
+                <a:schemeClr val="accent1"/>
+              </a:solidFill>
+              <a:latin typeface="+mj-lt"/>
+            </a:endParaRPr>
+          </a:p>
+        </p:txBody>
+      </p:sp>
+    </p:spTree>
+    <p:extLst>
+      <p:ext uri="{BB962C8B-B14F-4D97-AF65-F5344CB8AC3E}">
+        <p14:creationId xmlns:p14="http://schemas.microsoft.com/office/powerpoint/2010/main" val="1263538641"/>
+      </p:ext>
+    </p:extLst>
+  </p:cSld>
+  <p:clrMapOvr>
+    <a:masterClrMapping/>
+  </p:clrMapOvr>
+</p:sld>
+</file>
+
+<file path=ppt/slides/slide6.xml><?xml version="1.0" encoding="utf-8"?>
+<p:sld xmlns:a="http://schemas.openxmlformats.org/drawingml/2006/main" xmlns:r="http://schemas.openxmlformats.org/officeDocument/2006/relationships" xmlns:p="http://schemas.openxmlformats.org/presentationml/2006/main">
+  <p:cSld>
+    <p:bg>
+      <p:bgPr>
+        <a:solidFill>
+          <a:schemeClr val="tx2"/>
+        </a:solidFill>
+        <a:effectLst/>
+      </p:bgPr>
+    </p:bg>
+    <p:spTree>
+      <p:nvGrpSpPr>
+        <p:cNvPr id="1" name="">
+          <a:extLst>
+            <a:ext uri="{FF2B5EF4-FFF2-40B4-BE49-F238E27FC236}">
+              <a16:creationId xmlns:a16="http://schemas.microsoft.com/office/drawing/2014/main" id="{256D6CAD-235E-3CA4-EC68-0B31B775B3BA}"/>
+            </a:ext>
+          </a:extLst>
+        </p:cNvPr>
+        <p:cNvGrpSpPr/>
+        <p:nvPr/>
+      </p:nvGrpSpPr>
+      <p:grpSpPr>
+        <a:xfrm>
+          <a:off x="0" y="0"/>
+          <a:ext cx="0" cy="0"/>
+          <a:chOff x="0" y="0"/>
+          <a:chExt cx="0" cy="0"/>
+        </a:xfrm>
+      </p:grpSpPr>
+      <p:sp>
+        <p:nvSpPr>
+          <p:cNvPr id="8" name="CuadroTexto 7">
+            <a:extLst>
+              <a:ext uri="{FF2B5EF4-FFF2-40B4-BE49-F238E27FC236}">
+                <a16:creationId xmlns:a16="http://schemas.microsoft.com/office/drawing/2014/main" id="{B1C796F1-C09E-5B89-AEDB-EB3778C6A5CA}"/>
+              </a:ext>
+            </a:extLst>
+          </p:cNvPr>
+          <p:cNvSpPr txBox="1"/>
+          <p:nvPr/>
+        </p:nvSpPr>
+        <p:spPr>
+          <a:xfrm>
+            <a:off x="2281727" y="2264635"/>
+            <a:ext cx="4349810" cy="2346540"/>
+          </a:xfrm>
+          <a:prstGeom prst="rect">
+            <a:avLst/>
+          </a:prstGeom>
+          <a:noFill/>
+        </p:spPr>
+        <p:txBody>
+          <a:bodyPr wrap="square" rtlCol="0">
+            <a:spAutoFit/>
+          </a:bodyPr>
+          <a:lstStyle/>
+          <a:p>
+            <a:pPr marL="285750" indent="-285750">
+              <a:lnSpc>
+                <a:spcPct val="150000"/>
+              </a:lnSpc>
+              <a:buFont typeface="Arial" panose="020B0604020202020204" pitchFamily="34" charset="0"/>
+              <a:buChar char="•"/>
+            </a:pPr>
+            <a:r>
+              <a:rPr lang="es-MX" sz="2000" dirty="0" err="1">
+                <a:solidFill>
+                  <a:schemeClr val="bg1"/>
+                </a:solidFill>
+              </a:rPr>
+              <a:t>Saf</a:t>
+            </a:r>
+            <a:endParaRPr lang="es-MX" sz="2000" dirty="0">
+              <a:solidFill>
+                <a:schemeClr val="bg1"/>
+              </a:solidFill>
+            </a:endParaRPr>
+          </a:p>
+          <a:p>
+            <a:pPr marL="285750" indent="-285750">
+              <a:lnSpc>
+                <a:spcPct val="150000"/>
+              </a:lnSpc>
+              <a:buFont typeface="Arial" panose="020B0604020202020204" pitchFamily="34" charset="0"/>
+              <a:buChar char="•"/>
+            </a:pPr>
+            <a:endParaRPr lang="es-CL" sz="2000" dirty="0">
+              <a:solidFill>
+                <a:schemeClr val="bg1"/>
+              </a:solidFill>
+            </a:endParaRPr>
+          </a:p>
+          <a:p>
+            <a:pPr marL="285750" indent="-285750">
+              <a:lnSpc>
+                <a:spcPct val="150000"/>
+              </a:lnSpc>
+              <a:buFont typeface="Arial" panose="020B0604020202020204" pitchFamily="34" charset="0"/>
+              <a:buChar char="•"/>
+            </a:pPr>
+            <a:r>
+              <a:rPr lang="es-CL" sz="2000" dirty="0">
+                <a:solidFill>
+                  <a:schemeClr val="bg1"/>
+                </a:solidFill>
+              </a:rPr>
+              <a:t>S</a:t>
+            </a:r>
+          </a:p>
+          <a:p>
+            <a:pPr marL="285750" indent="-285750">
+              <a:lnSpc>
+                <a:spcPct val="150000"/>
+              </a:lnSpc>
+              <a:buFont typeface="Arial" panose="020B0604020202020204" pitchFamily="34" charset="0"/>
+              <a:buChar char="•"/>
+            </a:pPr>
+            <a:endParaRPr lang="es-CL" sz="2000" dirty="0">
+              <a:solidFill>
+                <a:schemeClr val="bg1"/>
+              </a:solidFill>
+            </a:endParaRPr>
+          </a:p>
+          <a:p>
+            <a:pPr marL="285750" indent="-285750">
+              <a:lnSpc>
+                <a:spcPct val="150000"/>
+              </a:lnSpc>
+              <a:buFont typeface="Arial" panose="020B0604020202020204" pitchFamily="34" charset="0"/>
+              <a:buChar char="•"/>
+            </a:pPr>
+            <a:r>
+              <a:rPr lang="es-CL" sz="2000" dirty="0">
+                <a:solidFill>
+                  <a:schemeClr val="bg1"/>
+                </a:solidFill>
+              </a:rPr>
+              <a:t>s</a:t>
+            </a:r>
+            <a:endParaRPr lang="es-MX" sz="2000" dirty="0">
+              <a:solidFill>
+                <a:schemeClr val="bg1"/>
+              </a:solidFill>
+            </a:endParaRPr>
+          </a:p>
+        </p:txBody>
+      </p:sp>
+      <p:grpSp>
+        <p:nvGrpSpPr>
+          <p:cNvPr id="25" name="Grupo 24">
+            <a:extLst>
+              <a:ext uri="{FF2B5EF4-FFF2-40B4-BE49-F238E27FC236}">
+                <a16:creationId xmlns:a16="http://schemas.microsoft.com/office/drawing/2014/main" id="{5C1E000F-0678-BC9F-4398-D81B154A439A}"/>
+              </a:ext>
+            </a:extLst>
+          </p:cNvPr>
+          <p:cNvGrpSpPr/>
+          <p:nvPr/>
+        </p:nvGrpSpPr>
+        <p:grpSpPr>
+          <a:xfrm>
+            <a:off x="841727" y="546930"/>
+            <a:ext cx="2880000" cy="540000"/>
+            <a:chOff x="786213" y="521293"/>
+            <a:chExt cx="2880000" cy="540000"/>
+          </a:xfrm>
+        </p:grpSpPr>
+        <p:cxnSp>
+          <p:nvCxnSpPr>
+            <p:cNvPr id="10" name="Conector recto 9">
+              <a:extLst>
+                <a:ext uri="{FF2B5EF4-FFF2-40B4-BE49-F238E27FC236}">
+                  <a16:creationId xmlns:a16="http://schemas.microsoft.com/office/drawing/2014/main" id="{D9573E72-B276-4BA2-9D40-8675310FC4D5}"/>
+                </a:ext>
+              </a:extLst>
+            </p:cNvPr>
+            <p:cNvCxnSpPr/>
+            <p:nvPr/>
+          </p:nvCxnSpPr>
+          <p:spPr>
+            <a:xfrm>
+              <a:off x="786213" y="521293"/>
+              <a:ext cx="0" cy="540000"/>
+            </a:xfrm>
+            <a:prstGeom prst="line">
+              <a:avLst/>
+            </a:prstGeom>
+          </p:spPr>
+          <p:style>
+            <a:lnRef idx="3">
+              <a:schemeClr val="accent2"/>
+            </a:lnRef>
+            <a:fillRef idx="0">
+              <a:schemeClr val="accent2"/>
+            </a:fillRef>
+            <a:effectRef idx="2">
+              <a:schemeClr val="accent2"/>
+            </a:effectRef>
+            <a:fontRef idx="minor">
+              <a:schemeClr val="tx1"/>
+            </a:fontRef>
+          </p:style>
+        </p:cxnSp>
+        <p:cxnSp>
+          <p:nvCxnSpPr>
+            <p:cNvPr id="14" name="Conector recto 13">
+              <a:extLst>
+                <a:ext uri="{FF2B5EF4-FFF2-40B4-BE49-F238E27FC236}">
+                  <a16:creationId xmlns:a16="http://schemas.microsoft.com/office/drawing/2014/main" id="{349EC342-CD37-A9A2-E12C-585B612FF5B3}"/>
+                </a:ext>
+              </a:extLst>
+            </p:cNvPr>
+            <p:cNvCxnSpPr>
+              <a:cxnSpLocks/>
+            </p:cNvCxnSpPr>
+            <p:nvPr/>
+          </p:nvCxnSpPr>
+          <p:spPr>
+            <a:xfrm>
+              <a:off x="786213" y="1061293"/>
+              <a:ext cx="2880000" cy="0"/>
+            </a:xfrm>
+            <a:prstGeom prst="line">
+              <a:avLst/>
+            </a:prstGeom>
+          </p:spPr>
+          <p:style>
+            <a:lnRef idx="3">
+              <a:schemeClr val="accent2"/>
+            </a:lnRef>
+            <a:fillRef idx="0">
+              <a:schemeClr val="accent2"/>
+            </a:fillRef>
+            <a:effectRef idx="2">
+              <a:schemeClr val="accent2"/>
+            </a:effectRef>
+            <a:fontRef idx="minor">
+              <a:schemeClr val="tx1"/>
+            </a:fontRef>
+          </p:style>
+        </p:cxnSp>
+      </p:grpSp>
+      <p:sp>
+        <p:nvSpPr>
+          <p:cNvPr id="3" name="CuadroTexto 2">
+            <a:extLst>
+              <a:ext uri="{FF2B5EF4-FFF2-40B4-BE49-F238E27FC236}">
+                <a16:creationId xmlns:a16="http://schemas.microsoft.com/office/drawing/2014/main" id="{5F98089D-1DC2-36E4-88CE-13C5D75EAD87}"/>
+              </a:ext>
+            </a:extLst>
+          </p:cNvPr>
+          <p:cNvSpPr txBox="1"/>
+          <p:nvPr/>
+        </p:nvSpPr>
+        <p:spPr>
+          <a:xfrm>
+            <a:off x="1031888" y="555724"/>
+            <a:ext cx="2499678" cy="369332"/>
+          </a:xfrm>
+          <a:prstGeom prst="rect">
+            <a:avLst/>
+          </a:prstGeom>
+          <a:noFill/>
+        </p:spPr>
+        <p:txBody>
+          <a:bodyPr wrap="square" rtlCol="0">
+            <a:spAutoFit/>
+          </a:bodyPr>
+          <a:lstStyle/>
+          <a:p>
+            <a:r>
+              <a:rPr lang="es-MX" dirty="0">
+                <a:solidFill>
+                  <a:schemeClr val="accent1"/>
+                </a:solidFill>
+                <a:latin typeface="+mj-lt"/>
+              </a:rPr>
+              <a:t>Metodología</a:t>
+            </a:r>
+            <a:endParaRPr lang="es-CL" dirty="0">
+              <a:solidFill>
+                <a:schemeClr val="accent1"/>
+              </a:solidFill>
+              <a:latin typeface="+mj-lt"/>
+            </a:endParaRPr>
+          </a:p>
+        </p:txBody>
+      </p:sp>
+    </p:spTree>
+    <p:extLst>
+      <p:ext uri="{BB962C8B-B14F-4D97-AF65-F5344CB8AC3E}">
+        <p14:creationId xmlns:p14="http://schemas.microsoft.com/office/powerpoint/2010/main" val="2420977306"/>
+      </p:ext>
+    </p:extLst>
+  </p:cSld>
+  <p:clrMapOvr>
+    <a:masterClrMapping/>
+  </p:clrMapOvr>
+</p:sld>
+</file>
+
+<file path=ppt/slides/slide7.xml><?xml version="1.0" encoding="utf-8"?>
+<p:sld xmlns:a="http://schemas.openxmlformats.org/drawingml/2006/main" xmlns:r="http://schemas.openxmlformats.org/officeDocument/2006/relationships" xmlns:p="http://schemas.openxmlformats.org/presentationml/2006/main">
+  <p:cSld>
+    <p:bg>
+      <p:bgPr>
+        <a:solidFill>
+          <a:schemeClr val="tx2"/>
+        </a:solidFill>
+        <a:effectLst/>
+      </p:bgPr>
+    </p:bg>
+    <p:spTree>
+      <p:nvGrpSpPr>
+        <p:cNvPr id="1" name="">
+          <a:extLst>
+            <a:ext uri="{FF2B5EF4-FFF2-40B4-BE49-F238E27FC236}">
+              <a16:creationId xmlns:a16="http://schemas.microsoft.com/office/drawing/2014/main" id="{A02160D9-8295-011B-597F-3A87A890CCF8}"/>
+            </a:ext>
+          </a:extLst>
+        </p:cNvPr>
+        <p:cNvGrpSpPr/>
+        <p:nvPr/>
+      </p:nvGrpSpPr>
+      <p:grpSpPr>
+        <a:xfrm>
+          <a:off x="0" y="0"/>
+          <a:ext cx="0" cy="0"/>
+          <a:chOff x="0" y="0"/>
+          <a:chExt cx="0" cy="0"/>
+        </a:xfrm>
+      </p:grpSpPr>
+      <p:sp>
+        <p:nvSpPr>
+          <p:cNvPr id="8" name="CuadroTexto 7">
+            <a:extLst>
+              <a:ext uri="{FF2B5EF4-FFF2-40B4-BE49-F238E27FC236}">
+                <a16:creationId xmlns:a16="http://schemas.microsoft.com/office/drawing/2014/main" id="{F91A507E-95BB-1285-36AD-49FA92A72A3E}"/>
+              </a:ext>
+            </a:extLst>
+          </p:cNvPr>
+          <p:cNvSpPr txBox="1"/>
+          <p:nvPr/>
+        </p:nvSpPr>
+        <p:spPr>
+          <a:xfrm>
+            <a:off x="2281727" y="2264635"/>
+            <a:ext cx="4349810" cy="2346540"/>
+          </a:xfrm>
+          <a:prstGeom prst="rect">
+            <a:avLst/>
+          </a:prstGeom>
+          <a:noFill/>
+        </p:spPr>
+        <p:txBody>
+          <a:bodyPr wrap="square" rtlCol="0">
+            <a:spAutoFit/>
+          </a:bodyPr>
+          <a:lstStyle/>
+          <a:p>
+            <a:pPr marL="285750" indent="-285750">
+              <a:lnSpc>
+                <a:spcPct val="150000"/>
+              </a:lnSpc>
+              <a:buFont typeface="Arial" panose="020B0604020202020204" pitchFamily="34" charset="0"/>
+              <a:buChar char="•"/>
+            </a:pPr>
+            <a:r>
+              <a:rPr lang="es-MX" sz="2000" dirty="0" err="1">
+                <a:solidFill>
+                  <a:schemeClr val="bg1"/>
+                </a:solidFill>
+              </a:rPr>
+              <a:t>Saf</a:t>
+            </a:r>
+            <a:endParaRPr lang="es-MX" sz="2000" dirty="0">
+              <a:solidFill>
+                <a:schemeClr val="bg1"/>
+              </a:solidFill>
+            </a:endParaRPr>
+          </a:p>
+          <a:p>
+            <a:pPr marL="285750" indent="-285750">
+              <a:lnSpc>
+                <a:spcPct val="150000"/>
+              </a:lnSpc>
+              <a:buFont typeface="Arial" panose="020B0604020202020204" pitchFamily="34" charset="0"/>
+              <a:buChar char="•"/>
+            </a:pPr>
+            <a:endParaRPr lang="es-CL" sz="2000" dirty="0">
+              <a:solidFill>
+                <a:schemeClr val="bg1"/>
+              </a:solidFill>
+            </a:endParaRPr>
+          </a:p>
+          <a:p>
+            <a:pPr marL="285750" indent="-285750">
+              <a:lnSpc>
+                <a:spcPct val="150000"/>
+              </a:lnSpc>
+              <a:buFont typeface="Arial" panose="020B0604020202020204" pitchFamily="34" charset="0"/>
+              <a:buChar char="•"/>
+            </a:pPr>
+            <a:r>
+              <a:rPr lang="es-CL" sz="2000" dirty="0">
+                <a:solidFill>
+                  <a:schemeClr val="bg1"/>
+                </a:solidFill>
+              </a:rPr>
+              <a:t>S</a:t>
+            </a:r>
+          </a:p>
+          <a:p>
+            <a:pPr marL="285750" indent="-285750">
+              <a:lnSpc>
+                <a:spcPct val="150000"/>
+              </a:lnSpc>
+              <a:buFont typeface="Arial" panose="020B0604020202020204" pitchFamily="34" charset="0"/>
+              <a:buChar char="•"/>
+            </a:pPr>
+            <a:endParaRPr lang="es-CL" sz="2000" dirty="0">
+              <a:solidFill>
+                <a:schemeClr val="bg1"/>
+              </a:solidFill>
+            </a:endParaRPr>
+          </a:p>
+          <a:p>
+            <a:pPr marL="285750" indent="-285750">
+              <a:lnSpc>
+                <a:spcPct val="150000"/>
+              </a:lnSpc>
+              <a:buFont typeface="Arial" panose="020B0604020202020204" pitchFamily="34" charset="0"/>
+              <a:buChar char="•"/>
+            </a:pPr>
+            <a:r>
+              <a:rPr lang="es-CL" sz="2000" dirty="0">
+                <a:solidFill>
+                  <a:schemeClr val="bg1"/>
+                </a:solidFill>
+              </a:rPr>
+              <a:t>s</a:t>
+            </a:r>
+            <a:endParaRPr lang="es-MX" sz="2000" dirty="0">
+              <a:solidFill>
+                <a:schemeClr val="bg1"/>
+              </a:solidFill>
+            </a:endParaRPr>
+          </a:p>
+        </p:txBody>
+      </p:sp>
+      <p:grpSp>
+        <p:nvGrpSpPr>
+          <p:cNvPr id="25" name="Grupo 24">
+            <a:extLst>
+              <a:ext uri="{FF2B5EF4-FFF2-40B4-BE49-F238E27FC236}">
+                <a16:creationId xmlns:a16="http://schemas.microsoft.com/office/drawing/2014/main" id="{4DB2700E-45E4-6FDE-1D9D-5AC6ED6413E6}"/>
+              </a:ext>
+            </a:extLst>
+          </p:cNvPr>
+          <p:cNvGrpSpPr/>
+          <p:nvPr/>
+        </p:nvGrpSpPr>
+        <p:grpSpPr>
+          <a:xfrm>
+            <a:off x="841727" y="546930"/>
+            <a:ext cx="2880000" cy="540000"/>
+            <a:chOff x="786213" y="521293"/>
+            <a:chExt cx="2880000" cy="540000"/>
+          </a:xfrm>
+        </p:grpSpPr>
+        <p:cxnSp>
+          <p:nvCxnSpPr>
+            <p:cNvPr id="10" name="Conector recto 9">
+              <a:extLst>
+                <a:ext uri="{FF2B5EF4-FFF2-40B4-BE49-F238E27FC236}">
+                  <a16:creationId xmlns:a16="http://schemas.microsoft.com/office/drawing/2014/main" id="{98F212AB-BE6D-2040-D0AF-EF970EAECC80}"/>
+                </a:ext>
+              </a:extLst>
+            </p:cNvPr>
+            <p:cNvCxnSpPr/>
+            <p:nvPr/>
+          </p:nvCxnSpPr>
+          <p:spPr>
+            <a:xfrm>
+              <a:off x="786213" y="521293"/>
+              <a:ext cx="0" cy="540000"/>
+            </a:xfrm>
+            <a:prstGeom prst="line">
+              <a:avLst/>
+            </a:prstGeom>
+          </p:spPr>
+          <p:style>
+            <a:lnRef idx="3">
+              <a:schemeClr val="accent2"/>
+            </a:lnRef>
+            <a:fillRef idx="0">
+              <a:schemeClr val="accent2"/>
+            </a:fillRef>
+            <a:effectRef idx="2">
+              <a:schemeClr val="accent2"/>
+            </a:effectRef>
+            <a:fontRef idx="minor">
+              <a:schemeClr val="tx1"/>
+            </a:fontRef>
+          </p:style>
+        </p:cxnSp>
+        <p:cxnSp>
+          <p:nvCxnSpPr>
+            <p:cNvPr id="14" name="Conector recto 13">
+              <a:extLst>
+                <a:ext uri="{FF2B5EF4-FFF2-40B4-BE49-F238E27FC236}">
+                  <a16:creationId xmlns:a16="http://schemas.microsoft.com/office/drawing/2014/main" id="{C09DBE1A-D8C5-F3C3-62C9-C6BEB1634FEB}"/>
+                </a:ext>
+              </a:extLst>
+            </p:cNvPr>
+            <p:cNvCxnSpPr>
+              <a:cxnSpLocks/>
+            </p:cNvCxnSpPr>
+            <p:nvPr/>
+          </p:nvCxnSpPr>
+          <p:spPr>
+            <a:xfrm>
+              <a:off x="786213" y="1061293"/>
+              <a:ext cx="2880000" cy="0"/>
+            </a:xfrm>
+            <a:prstGeom prst="line">
+              <a:avLst/>
+            </a:prstGeom>
+          </p:spPr>
+          <p:style>
+            <a:lnRef idx="3">
+              <a:schemeClr val="accent2"/>
+            </a:lnRef>
+            <a:fillRef idx="0">
+              <a:schemeClr val="accent2"/>
+            </a:fillRef>
+            <a:effectRef idx="2">
+              <a:schemeClr val="accent2"/>
+            </a:effectRef>
+            <a:fontRef idx="minor">
+              <a:schemeClr val="tx1"/>
+            </a:fontRef>
+          </p:style>
+        </p:cxnSp>
+      </p:grpSp>
+      <p:sp>
+        <p:nvSpPr>
+          <p:cNvPr id="3" name="CuadroTexto 2">
+            <a:extLst>
+              <a:ext uri="{FF2B5EF4-FFF2-40B4-BE49-F238E27FC236}">
+                <a16:creationId xmlns:a16="http://schemas.microsoft.com/office/drawing/2014/main" id="{9F5FCEBF-155E-D8F4-D197-74B481C86AD5}"/>
+              </a:ext>
+            </a:extLst>
+          </p:cNvPr>
+          <p:cNvSpPr txBox="1"/>
+          <p:nvPr/>
+        </p:nvSpPr>
+        <p:spPr>
+          <a:xfrm>
+            <a:off x="1031888" y="555724"/>
+            <a:ext cx="2499678" cy="369332"/>
+          </a:xfrm>
+          <a:prstGeom prst="rect">
+            <a:avLst/>
+          </a:prstGeom>
+          <a:noFill/>
+        </p:spPr>
+        <p:txBody>
+          <a:bodyPr wrap="square" rtlCol="0">
+            <a:spAutoFit/>
+          </a:bodyPr>
+          <a:lstStyle/>
+          <a:p>
+            <a:r>
+              <a:rPr lang="es-MX" dirty="0">
+                <a:solidFill>
+                  <a:schemeClr val="accent1"/>
+                </a:solidFill>
+                <a:latin typeface="+mj-lt"/>
+              </a:rPr>
+              <a:t>Competencias</a:t>
+            </a:r>
+            <a:endParaRPr lang="es-CL" dirty="0">
+              <a:solidFill>
+                <a:schemeClr val="accent1"/>
+              </a:solidFill>
+              <a:latin typeface="+mj-lt"/>
+            </a:endParaRPr>
+          </a:p>
+        </p:txBody>
+      </p:sp>
+    </p:spTree>
+    <p:extLst>
+      <p:ext uri="{BB962C8B-B14F-4D97-AF65-F5344CB8AC3E}">
+        <p14:creationId xmlns:p14="http://schemas.microsoft.com/office/powerpoint/2010/main" val="3460436195"/>
+      </p:ext>
+    </p:extLst>
+  </p:cSld>
+  <p:clrMapOvr>
+    <a:masterClrMapping/>
+  </p:clrMapOvr>
+</p:sld>
+</file>
+
+<file path=ppt/slides/slide8.xml><?xml version="1.0" encoding="utf-8"?>
+<p:sld xmlns:a="http://schemas.openxmlformats.org/drawingml/2006/main" xmlns:r="http://schemas.openxmlformats.org/officeDocument/2006/relationships" xmlns:p="http://schemas.openxmlformats.org/presentationml/2006/main">
+  <p:cSld>
+    <p:bg>
+      <p:bgPr>
+        <a:solidFill>
+          <a:schemeClr val="tx2"/>
+        </a:solidFill>
+        <a:effectLst/>
+      </p:bgPr>
+    </p:bg>
+    <p:spTree>
+      <p:nvGrpSpPr>
+        <p:cNvPr id="1" name="">
+          <a:extLst>
+            <a:ext uri="{FF2B5EF4-FFF2-40B4-BE49-F238E27FC236}">
+              <a16:creationId xmlns:a16="http://schemas.microsoft.com/office/drawing/2014/main" id="{448CFD79-8C0A-30E0-792B-9C272D21AF3A}"/>
+            </a:ext>
+          </a:extLst>
+        </p:cNvPr>
+        <p:cNvGrpSpPr/>
+        <p:nvPr/>
+      </p:nvGrpSpPr>
+      <p:grpSpPr>
+        <a:xfrm>
+          <a:off x="0" y="0"/>
+          <a:ext cx="0" cy="0"/>
+          <a:chOff x="0" y="0"/>
+          <a:chExt cx="0" cy="0"/>
+        </a:xfrm>
+      </p:grpSpPr>
+      <p:grpSp>
+        <p:nvGrpSpPr>
+          <p:cNvPr id="25" name="Grupo 24">
+            <a:extLst>
+              <a:ext uri="{FF2B5EF4-FFF2-40B4-BE49-F238E27FC236}">
+                <a16:creationId xmlns:a16="http://schemas.microsoft.com/office/drawing/2014/main" id="{0D85F9DF-2EF3-DAE1-E3A7-3F4F4AE92497}"/>
+              </a:ext>
+            </a:extLst>
+          </p:cNvPr>
+          <p:cNvGrpSpPr/>
+          <p:nvPr/>
+        </p:nvGrpSpPr>
+        <p:grpSpPr>
+          <a:xfrm>
+            <a:off x="841727" y="546930"/>
+            <a:ext cx="2880000" cy="540000"/>
+            <a:chOff x="786213" y="521293"/>
+            <a:chExt cx="2880000" cy="540000"/>
+          </a:xfrm>
+        </p:grpSpPr>
+        <p:cxnSp>
+          <p:nvCxnSpPr>
+            <p:cNvPr id="10" name="Conector recto 9">
+              <a:extLst>
+                <a:ext uri="{FF2B5EF4-FFF2-40B4-BE49-F238E27FC236}">
+                  <a16:creationId xmlns:a16="http://schemas.microsoft.com/office/drawing/2014/main" id="{CB262ADA-C51A-7298-5621-D873B149376F}"/>
+                </a:ext>
+              </a:extLst>
+            </p:cNvPr>
+            <p:cNvCxnSpPr/>
+            <p:nvPr/>
+          </p:nvCxnSpPr>
+          <p:spPr>
+            <a:xfrm>
+              <a:off x="786213" y="521293"/>
+              <a:ext cx="0" cy="540000"/>
+            </a:xfrm>
+            <a:prstGeom prst="line">
+              <a:avLst/>
+            </a:prstGeom>
+          </p:spPr>
+          <p:style>
+            <a:lnRef idx="3">
+              <a:schemeClr val="accent2"/>
+            </a:lnRef>
+            <a:fillRef idx="0">
+              <a:schemeClr val="accent2"/>
+            </a:fillRef>
+            <a:effectRef idx="2">
+              <a:schemeClr val="accent2"/>
+            </a:effectRef>
+            <a:fontRef idx="minor">
+              <a:schemeClr val="tx1"/>
+            </a:fontRef>
+          </p:style>
+        </p:cxnSp>
+        <p:cxnSp>
+          <p:nvCxnSpPr>
+            <p:cNvPr id="14" name="Conector recto 13">
+              <a:extLst>
+                <a:ext uri="{FF2B5EF4-FFF2-40B4-BE49-F238E27FC236}">
+                  <a16:creationId xmlns:a16="http://schemas.microsoft.com/office/drawing/2014/main" id="{85370F90-7081-CD74-CA6A-C6B073C1B8D7}"/>
+                </a:ext>
+              </a:extLst>
+            </p:cNvPr>
+            <p:cNvCxnSpPr>
+              <a:cxnSpLocks/>
+            </p:cNvCxnSpPr>
+            <p:nvPr/>
+          </p:nvCxnSpPr>
+          <p:spPr>
+            <a:xfrm>
+              <a:off x="786213" y="1061293"/>
+              <a:ext cx="2880000" cy="0"/>
+            </a:xfrm>
+            <a:prstGeom prst="line">
+              <a:avLst/>
+            </a:prstGeom>
+          </p:spPr>
+          <p:style>
+            <a:lnRef idx="3">
+              <a:schemeClr val="accent2"/>
+            </a:lnRef>
+            <a:fillRef idx="0">
+              <a:schemeClr val="accent2"/>
+            </a:fillRef>
+            <a:effectRef idx="2">
+              <a:schemeClr val="accent2"/>
+            </a:effectRef>
+            <a:fontRef idx="minor">
+              <a:schemeClr val="tx1"/>
+            </a:fontRef>
+          </p:style>
+        </p:cxnSp>
+      </p:grpSp>
+      <p:sp>
+        <p:nvSpPr>
+          <p:cNvPr id="3" name="CuadroTexto 2">
+            <a:extLst>
+              <a:ext uri="{FF2B5EF4-FFF2-40B4-BE49-F238E27FC236}">
+                <a16:creationId xmlns:a16="http://schemas.microsoft.com/office/drawing/2014/main" id="{22D0628D-42D3-54A8-AC5D-97348A5BF44D}"/>
+              </a:ext>
+            </a:extLst>
+          </p:cNvPr>
+          <p:cNvSpPr txBox="1"/>
+          <p:nvPr/>
+        </p:nvSpPr>
+        <p:spPr>
+          <a:xfrm>
+            <a:off x="1031888" y="555724"/>
+            <a:ext cx="2499678" cy="369332"/>
+          </a:xfrm>
+          <a:prstGeom prst="rect">
+            <a:avLst/>
+          </a:prstGeom>
+          <a:noFill/>
+        </p:spPr>
+        <p:txBody>
+          <a:bodyPr wrap="square" rtlCol="0">
+            <a:spAutoFit/>
+          </a:bodyPr>
+          <a:lstStyle/>
+          <a:p>
+            <a:r>
+              <a:rPr lang="es-MX" dirty="0">
+                <a:solidFill>
+                  <a:schemeClr val="accent1"/>
+                </a:solidFill>
+                <a:latin typeface="+mj-lt"/>
+              </a:rPr>
+              <a:t>Mapa Tecnológico</a:t>
+            </a:r>
+            <a:endParaRPr lang="es-CL" dirty="0">
+              <a:solidFill>
+                <a:schemeClr val="accent1"/>
+              </a:solidFill>
+              <a:latin typeface="+mj-lt"/>
+            </a:endParaRPr>
+          </a:p>
+        </p:txBody>
+      </p:sp>
+    </p:spTree>
+    <p:extLst>
+      <p:ext uri="{BB962C8B-B14F-4D97-AF65-F5344CB8AC3E}">
+        <p14:creationId xmlns:p14="http://schemas.microsoft.com/office/powerpoint/2010/main" val="2462326697"/>
+      </p:ext>
+    </p:extLst>
+  </p:cSld>
+  <p:clrMapOvr>
+    <a:masterClrMapping/>
+  </p:clrMapOvr>
+</p:sld>
+</file>
+
+<file path=ppt/slides/slide9.xml><?xml version="1.0" encoding="utf-8"?>
+<p:sld xmlns:a="http://schemas.openxmlformats.org/drawingml/2006/main" xmlns:r="http://schemas.openxmlformats.org/officeDocument/2006/relationships" xmlns:p="http://schemas.openxmlformats.org/presentationml/2006/main">
+  <p:cSld>
+    <p:bg>
+      <p:bgPr>
+        <a:solidFill>
+          <a:schemeClr val="tx2"/>
+        </a:solidFill>
+        <a:effectLst/>
+      </p:bgPr>
+    </p:bg>
+    <p:spTree>
+      <p:nvGrpSpPr>
+        <p:cNvPr id="1" name="">
+          <a:extLst>
+            <a:ext uri="{FF2B5EF4-FFF2-40B4-BE49-F238E27FC236}">
+              <a16:creationId xmlns:a16="http://schemas.microsoft.com/office/drawing/2014/main" id="{551827A9-D0A6-68FD-56FF-EDF9A688F2A2}"/>
+            </a:ext>
+          </a:extLst>
+        </p:cNvPr>
+        <p:cNvGrpSpPr/>
+        <p:nvPr/>
+      </p:nvGrpSpPr>
+      <p:grpSpPr>
+        <a:xfrm>
+          <a:off x="0" y="0"/>
+          <a:ext cx="0" cy="0"/>
+          <a:chOff x="0" y="0"/>
+          <a:chExt cx="0" cy="0"/>
+        </a:xfrm>
+      </p:grpSpPr>
+      <p:sp>
+        <p:nvSpPr>
+          <p:cNvPr id="8" name="CuadroTexto 7">
+            <a:extLst>
+              <a:ext uri="{FF2B5EF4-FFF2-40B4-BE49-F238E27FC236}">
+                <a16:creationId xmlns:a16="http://schemas.microsoft.com/office/drawing/2014/main" id="{291A9698-138A-7EF7-D536-2E1DD2B84D6C}"/>
+              </a:ext>
+            </a:extLst>
+          </p:cNvPr>
+          <p:cNvSpPr txBox="1"/>
+          <p:nvPr/>
+        </p:nvSpPr>
+        <p:spPr>
+          <a:xfrm>
+            <a:off x="2281727" y="2264635"/>
+            <a:ext cx="4349810" cy="2346540"/>
+          </a:xfrm>
+          <a:prstGeom prst="rect">
+            <a:avLst/>
+          </a:prstGeom>
+          <a:noFill/>
+        </p:spPr>
+        <p:txBody>
+          <a:bodyPr wrap="square" rtlCol="0">
+            <a:spAutoFit/>
+          </a:bodyPr>
+          <a:lstStyle/>
+          <a:p>
+            <a:pPr marL="285750" indent="-285750">
+              <a:lnSpc>
+                <a:spcPct val="150000"/>
+              </a:lnSpc>
+              <a:buFont typeface="Arial" panose="020B0604020202020204" pitchFamily="34" charset="0"/>
+              <a:buChar char="•"/>
+            </a:pPr>
+            <a:r>
+              <a:rPr lang="es-MX" sz="2000" dirty="0" err="1">
+                <a:solidFill>
+                  <a:schemeClr val="bg1"/>
+                </a:solidFill>
+              </a:rPr>
+              <a:t>Saf</a:t>
+            </a:r>
+            <a:endParaRPr lang="es-MX" sz="2000" dirty="0">
+              <a:solidFill>
+                <a:schemeClr val="bg1"/>
+              </a:solidFill>
+            </a:endParaRPr>
+          </a:p>
+          <a:p>
+            <a:pPr marL="285750" indent="-285750">
+              <a:lnSpc>
+                <a:spcPct val="150000"/>
+              </a:lnSpc>
+              <a:buFont typeface="Arial" panose="020B0604020202020204" pitchFamily="34" charset="0"/>
+              <a:buChar char="•"/>
+            </a:pPr>
+            <a:endParaRPr lang="es-CL" sz="2000" dirty="0">
+              <a:solidFill>
+                <a:schemeClr val="bg1"/>
+              </a:solidFill>
+            </a:endParaRPr>
+          </a:p>
+          <a:p>
+            <a:pPr marL="285750" indent="-285750">
+              <a:lnSpc>
+                <a:spcPct val="150000"/>
+              </a:lnSpc>
+              <a:buFont typeface="Arial" panose="020B0604020202020204" pitchFamily="34" charset="0"/>
+              <a:buChar char="•"/>
+            </a:pPr>
+            <a:r>
+              <a:rPr lang="es-CL" sz="2000" dirty="0">
+                <a:solidFill>
+                  <a:schemeClr val="bg1"/>
+                </a:solidFill>
+              </a:rPr>
+              <a:t>S</a:t>
+            </a:r>
+          </a:p>
+          <a:p>
+            <a:pPr marL="285750" indent="-285750">
+              <a:lnSpc>
+                <a:spcPct val="150000"/>
+              </a:lnSpc>
+              <a:buFont typeface="Arial" panose="020B0604020202020204" pitchFamily="34" charset="0"/>
+              <a:buChar char="•"/>
+            </a:pPr>
+            <a:endParaRPr lang="es-CL" sz="2000" dirty="0">
+              <a:solidFill>
+                <a:schemeClr val="bg1"/>
+              </a:solidFill>
+            </a:endParaRPr>
+          </a:p>
+          <a:p>
+            <a:pPr marL="285750" indent="-285750">
+              <a:lnSpc>
+                <a:spcPct val="150000"/>
+              </a:lnSpc>
+              <a:buFont typeface="Arial" panose="020B0604020202020204" pitchFamily="34" charset="0"/>
+              <a:buChar char="•"/>
+            </a:pPr>
+            <a:r>
+              <a:rPr lang="es-CL" sz="2000" dirty="0">
+                <a:solidFill>
+                  <a:schemeClr val="bg1"/>
+                </a:solidFill>
+              </a:rPr>
+              <a:t>s</a:t>
+            </a:r>
+            <a:endParaRPr lang="es-MX" sz="2000" dirty="0">
+              <a:solidFill>
+                <a:schemeClr val="bg1"/>
+              </a:solidFill>
+            </a:endParaRPr>
+          </a:p>
+        </p:txBody>
+      </p:sp>
+      <p:grpSp>
+        <p:nvGrpSpPr>
+          <p:cNvPr id="25" name="Grupo 24">
+            <a:extLst>
+              <a:ext uri="{FF2B5EF4-FFF2-40B4-BE49-F238E27FC236}">
+                <a16:creationId xmlns:a16="http://schemas.microsoft.com/office/drawing/2014/main" id="{390B5309-AFE7-FC5D-3943-045FF3DC6525}"/>
+              </a:ext>
+            </a:extLst>
+          </p:cNvPr>
+          <p:cNvGrpSpPr/>
+          <p:nvPr/>
+        </p:nvGrpSpPr>
+        <p:grpSpPr>
+          <a:xfrm>
+            <a:off x="841727" y="546930"/>
+            <a:ext cx="2880000" cy="540000"/>
+            <a:chOff x="786213" y="521293"/>
+            <a:chExt cx="2880000" cy="540000"/>
+          </a:xfrm>
+        </p:grpSpPr>
+        <p:cxnSp>
+          <p:nvCxnSpPr>
+            <p:cNvPr id="10" name="Conector recto 9">
+              <a:extLst>
+                <a:ext uri="{FF2B5EF4-FFF2-40B4-BE49-F238E27FC236}">
+                  <a16:creationId xmlns:a16="http://schemas.microsoft.com/office/drawing/2014/main" id="{D49C6877-7C02-A0B1-6852-A782D0833B94}"/>
+                </a:ext>
+              </a:extLst>
+            </p:cNvPr>
+            <p:cNvCxnSpPr/>
+            <p:nvPr/>
+          </p:nvCxnSpPr>
+          <p:spPr>
+            <a:xfrm>
+              <a:off x="786213" y="521293"/>
+              <a:ext cx="0" cy="540000"/>
+            </a:xfrm>
+            <a:prstGeom prst="line">
+              <a:avLst/>
+            </a:prstGeom>
+          </p:spPr>
+          <p:style>
+            <a:lnRef idx="3">
+              <a:schemeClr val="accent2"/>
+            </a:lnRef>
+            <a:fillRef idx="0">
+              <a:schemeClr val="accent2"/>
+            </a:fillRef>
+            <a:effectRef idx="2">
+              <a:schemeClr val="accent2"/>
+            </a:effectRef>
+            <a:fontRef idx="minor">
+              <a:schemeClr val="tx1"/>
+            </a:fontRef>
+          </p:style>
+        </p:cxnSp>
+        <p:cxnSp>
+          <p:nvCxnSpPr>
+            <p:cNvPr id="14" name="Conector recto 13">
+              <a:extLst>
+                <a:ext uri="{FF2B5EF4-FFF2-40B4-BE49-F238E27FC236}">
+                  <a16:creationId xmlns:a16="http://schemas.microsoft.com/office/drawing/2014/main" id="{C3521BD6-4204-0E71-F755-DBBAB6CCE063}"/>
+                </a:ext>
+              </a:extLst>
+            </p:cNvPr>
+            <p:cNvCxnSpPr>
+              <a:cxnSpLocks/>
+            </p:cNvCxnSpPr>
+            <p:nvPr/>
+          </p:nvCxnSpPr>
+          <p:spPr>
+            <a:xfrm>
+              <a:off x="786213" y="1061293"/>
+              <a:ext cx="2880000" cy="0"/>
+            </a:xfrm>
+            <a:prstGeom prst="line">
+              <a:avLst/>
+            </a:prstGeom>
+          </p:spPr>
+          <p:style>
+            <a:lnRef idx="3">
+              <a:schemeClr val="accent2"/>
+            </a:lnRef>
+            <a:fillRef idx="0">
+              <a:schemeClr val="accent2"/>
+            </a:fillRef>
+            <a:effectRef idx="2">
+              <a:schemeClr val="accent2"/>
+            </a:effectRef>
+            <a:fontRef idx="minor">
+              <a:schemeClr val="tx1"/>
+            </a:fontRef>
+          </p:style>
+        </p:cxnSp>
+      </p:grpSp>
+      <p:sp>
+        <p:nvSpPr>
+          <p:cNvPr id="3" name="CuadroTexto 2">
+            <a:extLst>
+              <a:ext uri="{FF2B5EF4-FFF2-40B4-BE49-F238E27FC236}">
+                <a16:creationId xmlns:a16="http://schemas.microsoft.com/office/drawing/2014/main" id="{9666F5D7-0D7C-5AA5-C7DD-4D7A07ACF763}"/>
+              </a:ext>
+            </a:extLst>
+          </p:cNvPr>
+          <p:cNvSpPr txBox="1"/>
+          <p:nvPr/>
+        </p:nvSpPr>
+        <p:spPr>
+          <a:xfrm>
+            <a:off x="1031888" y="555724"/>
+            <a:ext cx="2499678" cy="369332"/>
+          </a:xfrm>
+          <a:prstGeom prst="rect">
+            <a:avLst/>
+          </a:prstGeom>
+          <a:noFill/>
+        </p:spPr>
+        <p:txBody>
+          <a:bodyPr wrap="square" rtlCol="0">
+            <a:spAutoFit/>
+          </a:bodyPr>
+          <a:lstStyle/>
+          <a:p>
+            <a:r>
+              <a:rPr lang="es-MX" dirty="0">
+                <a:solidFill>
+                  <a:schemeClr val="accent1"/>
+                </a:solidFill>
+                <a:latin typeface="+mj-lt"/>
+              </a:rPr>
+              <a:t>Seguridad</a:t>
+            </a:r>
+            <a:endParaRPr lang="es-CL" dirty="0">
+              <a:solidFill>
+                <a:schemeClr val="accent1"/>
+              </a:solidFill>
+              <a:latin typeface="+mj-lt"/>
+            </a:endParaRPr>
+          </a:p>
+        </p:txBody>
+      </p:sp>
+    </p:spTree>
+    <p:extLst>
+      <p:ext uri="{BB962C8B-B14F-4D97-AF65-F5344CB8AC3E}">
+        <p14:creationId xmlns:p14="http://schemas.microsoft.com/office/powerpoint/2010/main" val="1575871677"/>
       </p:ext>
     </p:extLst>
   </p:cSld>

--- a/Aldo Alberto Martinez Ordenes/PTY4614_Capstone_004D/Equipo/Fase 1/Evidencias Grupales/Presentación EventApp.pptx
+++ b/Aldo Alberto Martinez Ordenes/PTY4614_Capstone_004D/Equipo/Fase 1/Evidencias Grupales/Presentación EventApp.pptx
@@ -7,16 +7,15 @@
   <p:sldIdLst>
     <p:sldId id="256" r:id="rId2"/>
     <p:sldId id="257" r:id="rId3"/>
-    <p:sldId id="258" r:id="rId4"/>
-    <p:sldId id="259" r:id="rId5"/>
-    <p:sldId id="260" r:id="rId6"/>
-    <p:sldId id="261" r:id="rId7"/>
-    <p:sldId id="262" r:id="rId8"/>
-    <p:sldId id="263" r:id="rId9"/>
+    <p:sldId id="269" r:id="rId4"/>
+    <p:sldId id="260" r:id="rId5"/>
+    <p:sldId id="261" r:id="rId6"/>
+    <p:sldId id="262" r:id="rId7"/>
+    <p:sldId id="263" r:id="rId8"/>
+    <p:sldId id="265" r:id="rId9"/>
     <p:sldId id="264" r:id="rId10"/>
-    <p:sldId id="265" r:id="rId11"/>
-    <p:sldId id="266" r:id="rId12"/>
-    <p:sldId id="268" r:id="rId13"/>
+    <p:sldId id="266" r:id="rId11"/>
+    <p:sldId id="268" r:id="rId12"/>
   </p:sldIdLst>
   <p:sldSz cx="12192000" cy="6858000"/>
   <p:notesSz cx="6858000" cy="9144000"/>
@@ -263,7 +262,7 @@
           <a:p>
             <a:fld id="{5F70B7FF-D76F-4ECF-8C7E-07DA33D50581}" type="datetimeFigureOut">
               <a:rPr lang="es-ES" smtClean="0"/>
-              <a:t>31/08/2026</a:t>
+              <a:t>01/09/2026</a:t>
             </a:fld>
             <a:endParaRPr lang="es-ES"/>
           </a:p>
@@ -426,7 +425,7 @@
           <a:p>
             <a:fld id="{5F70B7FF-D76F-4ECF-8C7E-07DA33D50581}" type="datetimeFigureOut">
               <a:rPr lang="es-ES" smtClean="0"/>
-              <a:t>31/08/2026</a:t>
+              <a:t>01/09/2026</a:t>
             </a:fld>
             <a:endParaRPr lang="es-ES"/>
           </a:p>
@@ -599,7 +598,7 @@
           <a:p>
             <a:fld id="{5F70B7FF-D76F-4ECF-8C7E-07DA33D50581}" type="datetimeFigureOut">
               <a:rPr lang="es-ES" smtClean="0"/>
-              <a:t>31/08/2026</a:t>
+              <a:t>01/09/2026</a:t>
             </a:fld>
             <a:endParaRPr lang="es-ES"/>
           </a:p>
@@ -762,7 +761,7 @@
           <a:p>
             <a:fld id="{5F70B7FF-D76F-4ECF-8C7E-07DA33D50581}" type="datetimeFigureOut">
               <a:rPr lang="es-ES" smtClean="0"/>
-              <a:t>31/08/2026</a:t>
+              <a:t>01/09/2026</a:t>
             </a:fld>
             <a:endParaRPr lang="es-ES"/>
           </a:p>
@@ -1002,7 +1001,7 @@
           <a:p>
             <a:fld id="{5F70B7FF-D76F-4ECF-8C7E-07DA33D50581}" type="datetimeFigureOut">
               <a:rPr lang="es-ES" smtClean="0"/>
-              <a:t>31/08/2026</a:t>
+              <a:t>01/09/2026</a:t>
             </a:fld>
             <a:endParaRPr lang="es-ES"/>
           </a:p>
@@ -1226,7 +1225,7 @@
           <a:p>
             <a:fld id="{5F70B7FF-D76F-4ECF-8C7E-07DA33D50581}" type="datetimeFigureOut">
               <a:rPr lang="es-ES" smtClean="0"/>
-              <a:t>31/08/2026</a:t>
+              <a:t>01/09/2026</a:t>
             </a:fld>
             <a:endParaRPr lang="es-ES"/>
           </a:p>
@@ -1585,7 +1584,7 @@
           <a:p>
             <a:fld id="{5F70B7FF-D76F-4ECF-8C7E-07DA33D50581}" type="datetimeFigureOut">
               <a:rPr lang="es-ES" smtClean="0"/>
-              <a:t>31/08/2026</a:t>
+              <a:t>01/09/2026</a:t>
             </a:fld>
             <a:endParaRPr lang="es-ES"/>
           </a:p>
@@ -1697,7 +1696,7 @@
           <a:p>
             <a:fld id="{5F70B7FF-D76F-4ECF-8C7E-07DA33D50581}" type="datetimeFigureOut">
               <a:rPr lang="es-ES" smtClean="0"/>
-              <a:t>31/08/2026</a:t>
+              <a:t>01/09/2026</a:t>
             </a:fld>
             <a:endParaRPr lang="es-ES"/>
           </a:p>
@@ -1787,7 +1786,7 @@
           <a:p>
             <a:fld id="{5F70B7FF-D76F-4ECF-8C7E-07DA33D50581}" type="datetimeFigureOut">
               <a:rPr lang="es-ES" smtClean="0"/>
-              <a:t>31/08/2026</a:t>
+              <a:t>01/09/2026</a:t>
             </a:fld>
             <a:endParaRPr lang="es-ES"/>
           </a:p>
@@ -2057,7 +2056,7 @@
           <a:p>
             <a:fld id="{5F70B7FF-D76F-4ECF-8C7E-07DA33D50581}" type="datetimeFigureOut">
               <a:rPr lang="es-ES" smtClean="0"/>
-              <a:t>31/08/2026</a:t>
+              <a:t>01/09/2026</a:t>
             </a:fld>
             <a:endParaRPr lang="es-ES"/>
           </a:p>
@@ -2304,7 +2303,7 @@
           <a:p>
             <a:fld id="{5F70B7FF-D76F-4ECF-8C7E-07DA33D50581}" type="datetimeFigureOut">
               <a:rPr lang="es-ES" smtClean="0"/>
-              <a:t>31/08/2026</a:t>
+              <a:t>01/09/2026</a:t>
             </a:fld>
             <a:endParaRPr lang="es-ES"/>
           </a:p>
@@ -2510,7 +2509,7 @@
           <a:p>
             <a:fld id="{5F70B7FF-D76F-4ECF-8C7E-07DA33D50581}" type="datetimeFigureOut">
               <a:rPr lang="es-ES" smtClean="0"/>
-              <a:t>31/08/2026</a:t>
+              <a:t>01/09/2026</a:t>
             </a:fld>
             <a:endParaRPr lang="es-ES"/>
           </a:p>
@@ -3403,8 +3402,8 @@
         </p:nvSpPr>
         <p:spPr>
           <a:xfrm>
-            <a:off x="743483" y="4374703"/>
-            <a:ext cx="5443669" cy="1815882"/>
+            <a:off x="922944" y="4499484"/>
+            <a:ext cx="5443669" cy="1754326"/>
           </a:xfrm>
           <a:prstGeom prst="rect">
             <a:avLst/>
@@ -3418,7 +3417,7 @@
           <a:lstStyle/>
           <a:p>
             <a:r>
-              <a:rPr lang="es-MX" sz="1400" dirty="0">
+              <a:rPr lang="es-MX" sz="1200" dirty="0">
                 <a:solidFill>
                   <a:schemeClr val="bg1"/>
                 </a:solidFill>
@@ -3432,7 +3431,7 @@
               <a:buChar char="-"/>
             </a:pPr>
             <a:r>
-              <a:rPr lang="es-MX" sz="1400" dirty="0">
+              <a:rPr lang="es-MX" sz="1200" dirty="0">
                 <a:solidFill>
                   <a:schemeClr val="bg1"/>
                 </a:solidFill>
@@ -3446,7 +3445,7 @@
               <a:buChar char="-"/>
             </a:pPr>
             <a:r>
-              <a:rPr lang="es-MX" sz="1400" dirty="0">
+              <a:rPr lang="es-MX" sz="1200" dirty="0">
                 <a:solidFill>
                   <a:schemeClr val="bg1"/>
                 </a:solidFill>
@@ -3460,7 +3459,7 @@
               <a:buChar char="-"/>
             </a:pPr>
             <a:r>
-              <a:rPr lang="es-MX" sz="1400" dirty="0">
+              <a:rPr lang="es-MX" sz="1200" dirty="0">
                 <a:solidFill>
                   <a:schemeClr val="bg1"/>
                 </a:solidFill>
@@ -3469,7 +3468,7 @@
             </a:r>
           </a:p>
           <a:p>
-            <a:endParaRPr lang="es-MX" sz="1400" dirty="0">
+            <a:endParaRPr lang="es-MX" sz="1200" dirty="0">
               <a:solidFill>
                 <a:schemeClr val="bg1"/>
               </a:solidFill>
@@ -3477,7 +3476,17 @@
           </a:p>
           <a:p>
             <a:r>
-              <a:rPr lang="es-MX" sz="1400" dirty="0">
+              <a:rPr lang="es-MX" sz="1200" dirty="0">
+                <a:solidFill>
+                  <a:schemeClr val="bg1"/>
+                </a:solidFill>
+              </a:rPr>
+              <a:t>Grupo 1</a:t>
+            </a:r>
+          </a:p>
+          <a:p>
+            <a:r>
+              <a:rPr lang="es-MX" sz="1200" dirty="0">
                 <a:solidFill>
                   <a:schemeClr val="bg1"/>
                 </a:solidFill>
@@ -3487,7 +3496,7 @@
           </a:p>
           <a:p>
             <a:r>
-              <a:rPr lang="es-MX" sz="1400" dirty="0">
+              <a:rPr lang="es-MX" sz="1200" dirty="0">
                 <a:solidFill>
                   <a:schemeClr val="bg1"/>
                 </a:solidFill>
@@ -3495,7 +3504,7 @@
               <a:t>Docente: </a:t>
             </a:r>
             <a:r>
-              <a:rPr lang="es-CL" sz="1400" dirty="0">
+              <a:rPr lang="es-CL" sz="1200" dirty="0">
                 <a:solidFill>
                   <a:schemeClr val="bg1"/>
                 </a:solidFill>
@@ -3504,7 +3513,7 @@
             </a:r>
           </a:p>
           <a:p>
-            <a:endParaRPr lang="es-CL" sz="1400" dirty="0">
+            <a:endParaRPr lang="es-CL" sz="1200" dirty="0">
               <a:solidFill>
                 <a:schemeClr val="bg1"/>
               </a:solidFill>
@@ -3526,309 +3535,6 @@
 </file>
 
 <file path=ppt/slides/slide10.xml><?xml version="1.0" encoding="utf-8"?>
-<p:sld xmlns:a="http://schemas.openxmlformats.org/drawingml/2006/main" xmlns:r="http://schemas.openxmlformats.org/officeDocument/2006/relationships" xmlns:p="http://schemas.openxmlformats.org/presentationml/2006/main">
-  <p:cSld>
-    <p:bg>
-      <p:bgPr>
-        <a:solidFill>
-          <a:schemeClr val="tx2"/>
-        </a:solidFill>
-        <a:effectLst/>
-      </p:bgPr>
-    </p:bg>
-    <p:spTree>
-      <p:nvGrpSpPr>
-        <p:cNvPr id="1" name="">
-          <a:extLst>
-            <a:ext uri="{FF2B5EF4-FFF2-40B4-BE49-F238E27FC236}">
-              <a16:creationId xmlns:a16="http://schemas.microsoft.com/office/drawing/2014/main" id="{E2474F52-F80C-9A7A-5152-D89A5F373266}"/>
-            </a:ext>
-          </a:extLst>
-        </p:cNvPr>
-        <p:cNvGrpSpPr/>
-        <p:nvPr/>
-      </p:nvGrpSpPr>
-      <p:grpSpPr>
-        <a:xfrm>
-          <a:off x="0" y="0"/>
-          <a:ext cx="0" cy="0"/>
-          <a:chOff x="0" y="0"/>
-          <a:chExt cx="0" cy="0"/>
-        </a:xfrm>
-      </p:grpSpPr>
-      <p:sp>
-        <p:nvSpPr>
-          <p:cNvPr id="8" name="CuadroTexto 7">
-            <a:extLst>
-              <a:ext uri="{FF2B5EF4-FFF2-40B4-BE49-F238E27FC236}">
-                <a16:creationId xmlns:a16="http://schemas.microsoft.com/office/drawing/2014/main" id="{4AA918F1-82FF-B5D1-5CE9-308B16E55A6B}"/>
-              </a:ext>
-            </a:extLst>
-          </p:cNvPr>
-          <p:cNvSpPr txBox="1"/>
-          <p:nvPr/>
-        </p:nvSpPr>
-        <p:spPr>
-          <a:xfrm>
-            <a:off x="2281727" y="2264635"/>
-            <a:ext cx="4349810" cy="2346540"/>
-          </a:xfrm>
-          <a:prstGeom prst="rect">
-            <a:avLst/>
-          </a:prstGeom>
-          <a:noFill/>
-        </p:spPr>
-        <p:txBody>
-          <a:bodyPr wrap="square" rtlCol="0">
-            <a:spAutoFit/>
-          </a:bodyPr>
-          <a:lstStyle/>
-          <a:p>
-            <a:pPr marL="285750" indent="-285750">
-              <a:lnSpc>
-                <a:spcPct val="150000"/>
-              </a:lnSpc>
-              <a:buFont typeface="Arial" panose="020B0604020202020204" pitchFamily="34" charset="0"/>
-              <a:buChar char="•"/>
-            </a:pPr>
-            <a:r>
-              <a:rPr lang="es-MX" sz="2000" dirty="0" err="1">
-                <a:solidFill>
-                  <a:schemeClr val="bg1"/>
-                </a:solidFill>
-              </a:rPr>
-              <a:t>Saf</a:t>
-            </a:r>
-            <a:endParaRPr lang="es-MX" sz="2000" dirty="0">
-              <a:solidFill>
-                <a:schemeClr val="bg1"/>
-              </a:solidFill>
-            </a:endParaRPr>
-          </a:p>
-          <a:p>
-            <a:pPr marL="285750" indent="-285750">
-              <a:lnSpc>
-                <a:spcPct val="150000"/>
-              </a:lnSpc>
-              <a:buFont typeface="Arial" panose="020B0604020202020204" pitchFamily="34" charset="0"/>
-              <a:buChar char="•"/>
-            </a:pPr>
-            <a:endParaRPr lang="es-CL" sz="2000" dirty="0">
-              <a:solidFill>
-                <a:schemeClr val="bg1"/>
-              </a:solidFill>
-            </a:endParaRPr>
-          </a:p>
-          <a:p>
-            <a:pPr marL="285750" indent="-285750">
-              <a:lnSpc>
-                <a:spcPct val="150000"/>
-              </a:lnSpc>
-              <a:buFont typeface="Arial" panose="020B0604020202020204" pitchFamily="34" charset="0"/>
-              <a:buChar char="•"/>
-            </a:pPr>
-            <a:r>
-              <a:rPr lang="es-CL" sz="2000" dirty="0">
-                <a:solidFill>
-                  <a:schemeClr val="bg1"/>
-                </a:solidFill>
-              </a:rPr>
-              <a:t>S</a:t>
-            </a:r>
-          </a:p>
-          <a:p>
-            <a:pPr marL="285750" indent="-285750">
-              <a:lnSpc>
-                <a:spcPct val="150000"/>
-              </a:lnSpc>
-              <a:buFont typeface="Arial" panose="020B0604020202020204" pitchFamily="34" charset="0"/>
-              <a:buChar char="•"/>
-            </a:pPr>
-            <a:endParaRPr lang="es-CL" sz="2000" dirty="0">
-              <a:solidFill>
-                <a:schemeClr val="bg1"/>
-              </a:solidFill>
-            </a:endParaRPr>
-          </a:p>
-          <a:p>
-            <a:pPr marL="285750" indent="-285750">
-              <a:lnSpc>
-                <a:spcPct val="150000"/>
-              </a:lnSpc>
-              <a:buFont typeface="Arial" panose="020B0604020202020204" pitchFamily="34" charset="0"/>
-              <a:buChar char="•"/>
-            </a:pPr>
-            <a:r>
-              <a:rPr lang="es-CL" sz="2000" dirty="0">
-                <a:solidFill>
-                  <a:schemeClr val="bg1"/>
-                </a:solidFill>
-              </a:rPr>
-              <a:t>s</a:t>
-            </a:r>
-            <a:endParaRPr lang="es-MX" sz="2000" dirty="0">
-              <a:solidFill>
-                <a:schemeClr val="bg1"/>
-              </a:solidFill>
-            </a:endParaRPr>
-          </a:p>
-        </p:txBody>
-      </p:sp>
-      <p:grpSp>
-        <p:nvGrpSpPr>
-          <p:cNvPr id="25" name="Grupo 24">
-            <a:extLst>
-              <a:ext uri="{FF2B5EF4-FFF2-40B4-BE49-F238E27FC236}">
-                <a16:creationId xmlns:a16="http://schemas.microsoft.com/office/drawing/2014/main" id="{AE0DEEA6-6BE8-12D1-5592-D3B27CFACED7}"/>
-              </a:ext>
-            </a:extLst>
-          </p:cNvPr>
-          <p:cNvGrpSpPr/>
-          <p:nvPr/>
-        </p:nvGrpSpPr>
-        <p:grpSpPr>
-          <a:xfrm>
-            <a:off x="841727" y="546930"/>
-            <a:ext cx="2880000" cy="540000"/>
-            <a:chOff x="786213" y="521293"/>
-            <a:chExt cx="2880000" cy="540000"/>
-          </a:xfrm>
-        </p:grpSpPr>
-        <p:cxnSp>
-          <p:nvCxnSpPr>
-            <p:cNvPr id="10" name="Conector recto 9">
-              <a:extLst>
-                <a:ext uri="{FF2B5EF4-FFF2-40B4-BE49-F238E27FC236}">
-                  <a16:creationId xmlns:a16="http://schemas.microsoft.com/office/drawing/2014/main" id="{032AC6CA-C53A-5493-154E-37F392B6BC78}"/>
-                </a:ext>
-              </a:extLst>
-            </p:cNvPr>
-            <p:cNvCxnSpPr/>
-            <p:nvPr/>
-          </p:nvCxnSpPr>
-          <p:spPr>
-            <a:xfrm>
-              <a:off x="786213" y="521293"/>
-              <a:ext cx="0" cy="540000"/>
-            </a:xfrm>
-            <a:prstGeom prst="line">
-              <a:avLst/>
-            </a:prstGeom>
-          </p:spPr>
-          <p:style>
-            <a:lnRef idx="3">
-              <a:schemeClr val="accent2"/>
-            </a:lnRef>
-            <a:fillRef idx="0">
-              <a:schemeClr val="accent2"/>
-            </a:fillRef>
-            <a:effectRef idx="2">
-              <a:schemeClr val="accent2"/>
-            </a:effectRef>
-            <a:fontRef idx="minor">
-              <a:schemeClr val="tx1"/>
-            </a:fontRef>
-          </p:style>
-        </p:cxnSp>
-        <p:cxnSp>
-          <p:nvCxnSpPr>
-            <p:cNvPr id="14" name="Conector recto 13">
-              <a:extLst>
-                <a:ext uri="{FF2B5EF4-FFF2-40B4-BE49-F238E27FC236}">
-                  <a16:creationId xmlns:a16="http://schemas.microsoft.com/office/drawing/2014/main" id="{22D99637-052D-9D8B-8A3F-5FC678DD9E65}"/>
-                </a:ext>
-              </a:extLst>
-            </p:cNvPr>
-            <p:cNvCxnSpPr>
-              <a:cxnSpLocks/>
-            </p:cNvCxnSpPr>
-            <p:nvPr/>
-          </p:nvCxnSpPr>
-          <p:spPr>
-            <a:xfrm>
-              <a:off x="786213" y="1061293"/>
-              <a:ext cx="2880000" cy="0"/>
-            </a:xfrm>
-            <a:prstGeom prst="line">
-              <a:avLst/>
-            </a:prstGeom>
-          </p:spPr>
-          <p:style>
-            <a:lnRef idx="3">
-              <a:schemeClr val="accent2"/>
-            </a:lnRef>
-            <a:fillRef idx="0">
-              <a:schemeClr val="accent2"/>
-            </a:fillRef>
-            <a:effectRef idx="2">
-              <a:schemeClr val="accent2"/>
-            </a:effectRef>
-            <a:fontRef idx="minor">
-              <a:schemeClr val="tx1"/>
-            </a:fontRef>
-          </p:style>
-        </p:cxnSp>
-      </p:grpSp>
-      <p:sp>
-        <p:nvSpPr>
-          <p:cNvPr id="3" name="CuadroTexto 2">
-            <a:extLst>
-              <a:ext uri="{FF2B5EF4-FFF2-40B4-BE49-F238E27FC236}">
-                <a16:creationId xmlns:a16="http://schemas.microsoft.com/office/drawing/2014/main" id="{B7EFF28F-B004-F7B6-F346-79049DEC0080}"/>
-              </a:ext>
-            </a:extLst>
-          </p:cNvPr>
-          <p:cNvSpPr txBox="1"/>
-          <p:nvPr/>
-        </p:nvSpPr>
-        <p:spPr>
-          <a:xfrm>
-            <a:off x="1031888" y="555724"/>
-            <a:ext cx="2499678" cy="369332"/>
-          </a:xfrm>
-          <a:prstGeom prst="rect">
-            <a:avLst/>
-          </a:prstGeom>
-          <a:noFill/>
-        </p:spPr>
-        <p:txBody>
-          <a:bodyPr wrap="square" rtlCol="0">
-            <a:spAutoFit/>
-          </a:bodyPr>
-          <a:lstStyle/>
-          <a:p>
-            <a:r>
-              <a:rPr lang="es-MX" dirty="0">
-                <a:solidFill>
-                  <a:schemeClr val="accent1"/>
-                </a:solidFill>
-                <a:latin typeface="+mj-lt"/>
-              </a:rPr>
-              <a:t>Riesgos</a:t>
-            </a:r>
-            <a:endParaRPr lang="es-CL" dirty="0">
-              <a:solidFill>
-                <a:schemeClr val="accent1"/>
-              </a:solidFill>
-              <a:latin typeface="+mj-lt"/>
-            </a:endParaRPr>
-          </a:p>
-        </p:txBody>
-      </p:sp>
-    </p:spTree>
-    <p:extLst>
-      <p:ext uri="{BB962C8B-B14F-4D97-AF65-F5344CB8AC3E}">
-        <p14:creationId xmlns:p14="http://schemas.microsoft.com/office/powerpoint/2010/main" val="1744374417"/>
-      </p:ext>
-    </p:extLst>
-  </p:cSld>
-  <p:clrMapOvr>
-    <a:masterClrMapping/>
-  </p:clrMapOvr>
-</p:sld>
-</file>
-
-<file path=ppt/slides/slide11.xml><?xml version="1.0" encoding="utf-8"?>
 <p:sld xmlns:a="http://schemas.openxmlformats.org/drawingml/2006/main" xmlns:r="http://schemas.openxmlformats.org/officeDocument/2006/relationships" xmlns:p="http://schemas.openxmlformats.org/presentationml/2006/main">
   <p:cSld>
     <p:bg>
@@ -4013,7 +3719,7 @@
 </p:sld>
 </file>
 
-<file path=ppt/slides/slide12.xml><?xml version="1.0" encoding="utf-8"?>
+<file path=ppt/slides/slide11.xml><?xml version="1.0" encoding="utf-8"?>
 <p:sld xmlns:a="http://schemas.openxmlformats.org/drawingml/2006/main" xmlns:r="http://schemas.openxmlformats.org/officeDocument/2006/relationships" xmlns:p="http://schemas.openxmlformats.org/presentationml/2006/main">
   <p:cSld>
     <p:bg>
@@ -4538,8 +4244,8 @@
         </p:nvSpPr>
         <p:spPr>
           <a:xfrm>
-            <a:off x="2281727" y="2264635"/>
-            <a:ext cx="4349810" cy="2346540"/>
+            <a:off x="1546822" y="1697512"/>
+            <a:ext cx="4349810" cy="4193199"/>
           </a:xfrm>
           <a:prstGeom prst="rect">
             <a:avLst/>
@@ -4552,93 +4258,157 @@
           </a:bodyPr>
           <a:lstStyle/>
           <a:p>
-            <a:pPr marL="285750" indent="-285750">
+            <a:pPr marL="457200" indent="-457200">
               <a:lnSpc>
                 <a:spcPct val="150000"/>
               </a:lnSpc>
-              <a:buFont typeface="Arial" panose="020B0604020202020204" pitchFamily="34" charset="0"/>
-              <a:buChar char="•"/>
+              <a:buFont typeface="+mj-lt"/>
+              <a:buAutoNum type="arabicPeriod"/>
             </a:pPr>
             <a:r>
-              <a:rPr lang="es-MX" sz="2000" dirty="0" err="1">
+              <a:rPr lang="es-MX" sz="2000" dirty="0">
                 <a:solidFill>
                   <a:schemeClr val="bg1"/>
                 </a:solidFill>
               </a:rPr>
-              <a:t>Saf</a:t>
-            </a:r>
-            <a:endParaRPr lang="es-MX" sz="2000" dirty="0">
-              <a:solidFill>
-                <a:schemeClr val="bg1"/>
-              </a:solidFill>
-            </a:endParaRPr>
-          </a:p>
-          <a:p>
-            <a:pPr marL="285750" indent="-285750">
+              <a:t>Contexto</a:t>
+            </a:r>
+          </a:p>
+          <a:p>
+            <a:pPr marL="457200" indent="-457200">
               <a:lnSpc>
                 <a:spcPct val="150000"/>
               </a:lnSpc>
-              <a:buFont typeface="Arial" panose="020B0604020202020204" pitchFamily="34" charset="0"/>
-              <a:buChar char="•"/>
+              <a:buFont typeface="+mj-lt"/>
+              <a:buAutoNum type="arabicPeriod"/>
             </a:pPr>
-            <a:endParaRPr lang="es-CL" sz="2000" dirty="0">
-              <a:solidFill>
-                <a:schemeClr val="bg1"/>
-              </a:solidFill>
-            </a:endParaRPr>
-          </a:p>
-          <a:p>
-            <a:pPr marL="285750" indent="-285750">
-              <a:lnSpc>
-                <a:spcPct val="150000"/>
-              </a:lnSpc>
-              <a:buFont typeface="Arial" panose="020B0604020202020204" pitchFamily="34" charset="0"/>
-              <a:buChar char="•"/>
-            </a:pPr>
-            <a:r>
-              <a:rPr lang="es-CL" sz="2000" dirty="0">
+            <a:r>
+              <a:rPr lang="es-MX" sz="2000" dirty="0">
                 <a:solidFill>
                   <a:schemeClr val="bg1"/>
                 </a:solidFill>
               </a:rPr>
-              <a:t>S</a:t>
-            </a:r>
-          </a:p>
-          <a:p>
-            <a:pPr marL="285750" indent="-285750">
+              <a:t>Propuesta de Solución</a:t>
+            </a:r>
+          </a:p>
+          <a:p>
+            <a:pPr marL="457200" indent="-457200">
               <a:lnSpc>
                 <a:spcPct val="150000"/>
               </a:lnSpc>
-              <a:buFont typeface="Arial" panose="020B0604020202020204" pitchFamily="34" charset="0"/>
-              <a:buChar char="•"/>
+              <a:buFont typeface="+mj-lt"/>
+              <a:buAutoNum type="arabicPeriod"/>
             </a:pPr>
-            <a:endParaRPr lang="es-CL" sz="2000" dirty="0">
-              <a:solidFill>
-                <a:schemeClr val="bg1"/>
-              </a:solidFill>
-            </a:endParaRPr>
-          </a:p>
-          <a:p>
-            <a:pPr marL="285750" indent="-285750">
-              <a:lnSpc>
-                <a:spcPct val="150000"/>
-              </a:lnSpc>
-              <a:buFont typeface="Arial" panose="020B0604020202020204" pitchFamily="34" charset="0"/>
-              <a:buChar char="•"/>
-            </a:pPr>
-            <a:r>
-              <a:rPr lang="es-CL" sz="2000" dirty="0">
+            <a:r>
+              <a:rPr lang="es-MX" sz="2000" dirty="0">
                 <a:solidFill>
                   <a:schemeClr val="bg1"/>
                 </a:solidFill>
               </a:rPr>
-              <a:t>s</a:t>
-            </a:r>
-            <a:endParaRPr lang="es-MX" sz="2000" dirty="0">
-              <a:solidFill>
-                <a:schemeClr val="bg1"/>
-              </a:solidFill>
-            </a:endParaRPr>
+              <a:t>Metodología</a:t>
+            </a:r>
+          </a:p>
+          <a:p>
+            <a:pPr marL="457200" indent="-457200">
+              <a:lnSpc>
+                <a:spcPct val="150000"/>
+              </a:lnSpc>
+              <a:buFont typeface="+mj-lt"/>
+              <a:buAutoNum type="arabicPeriod"/>
+            </a:pPr>
+            <a:r>
+              <a:rPr lang="es-MX" sz="2000" dirty="0">
+                <a:solidFill>
+                  <a:schemeClr val="bg1"/>
+                </a:solidFill>
+              </a:rPr>
+              <a:t>Competencias</a:t>
+            </a:r>
+          </a:p>
+          <a:p>
+            <a:pPr marL="457200" indent="-457200">
+              <a:lnSpc>
+                <a:spcPct val="150000"/>
+              </a:lnSpc>
+              <a:buFont typeface="+mj-lt"/>
+              <a:buAutoNum type="arabicPeriod"/>
+            </a:pPr>
+            <a:r>
+              <a:rPr lang="es-MX" sz="2000" dirty="0">
+                <a:solidFill>
+                  <a:schemeClr val="bg1"/>
+                </a:solidFill>
+              </a:rPr>
+              <a:t>Mapa Tecnológico</a:t>
+            </a:r>
+          </a:p>
+          <a:p>
+            <a:pPr marL="457200" indent="-457200">
+              <a:lnSpc>
+                <a:spcPct val="150000"/>
+              </a:lnSpc>
+              <a:buFont typeface="+mj-lt"/>
+              <a:buAutoNum type="arabicPeriod"/>
+            </a:pPr>
+            <a:r>
+              <a:rPr lang="es-MX" sz="2000" dirty="0">
+                <a:solidFill>
+                  <a:schemeClr val="bg1"/>
+                </a:solidFill>
+              </a:rPr>
+              <a:t>Seguridad</a:t>
+            </a:r>
+          </a:p>
+          <a:p>
+            <a:pPr marL="457200" indent="-457200">
+              <a:lnSpc>
+                <a:spcPct val="150000"/>
+              </a:lnSpc>
+              <a:buFont typeface="+mj-lt"/>
+              <a:buAutoNum type="arabicPeriod"/>
+            </a:pPr>
+            <a:r>
+              <a:rPr lang="es-MX" sz="2000" dirty="0">
+                <a:solidFill>
+                  <a:schemeClr val="bg1"/>
+                </a:solidFill>
+              </a:rPr>
+              <a:t>Riesgos</a:t>
+            </a:r>
+          </a:p>
+          <a:p>
+            <a:pPr marL="457200" indent="-457200">
+              <a:lnSpc>
+                <a:spcPct val="150000"/>
+              </a:lnSpc>
+              <a:buFont typeface="+mj-lt"/>
+              <a:buAutoNum type="arabicPeriod"/>
+            </a:pPr>
+            <a:r>
+              <a:rPr lang="es-MX" sz="2000" dirty="0">
+                <a:solidFill>
+                  <a:schemeClr val="bg1"/>
+                </a:solidFill>
+              </a:rPr>
+              <a:t>Mockup</a:t>
+            </a:r>
+          </a:p>
+          <a:p>
+            <a:pPr marL="457200" indent="-457200">
+              <a:lnSpc>
+                <a:spcPct val="150000"/>
+              </a:lnSpc>
+              <a:buFont typeface="+mj-lt"/>
+              <a:buAutoNum type="arabicPeriod"/>
+            </a:pPr>
+            <a:r>
+              <a:rPr lang="es-MX" sz="2000" dirty="0">
+                <a:solidFill>
+                  <a:schemeClr val="bg1"/>
+                </a:solidFill>
+              </a:rPr>
+              <a:t>Conclusión</a:t>
+            </a:r>
           </a:p>
         </p:txBody>
       </p:sp>
@@ -4772,7 +4542,7 @@
                 </a:solidFill>
                 <a:latin typeface="+mj-lt"/>
               </a:rPr>
-              <a:t>Introducción</a:t>
+              <a:t>Índice</a:t>
             </a:r>
             <a:endParaRPr lang="es-CL" dirty="0">
               <a:solidFill>
@@ -4812,7 +4582,7 @@
         <p:cNvPr id="1" name="">
           <a:extLst>
             <a:ext uri="{FF2B5EF4-FFF2-40B4-BE49-F238E27FC236}">
-              <a16:creationId xmlns:a16="http://schemas.microsoft.com/office/drawing/2014/main" id="{C540BD4A-40B1-A3B8-ABDA-4CC116E12B18}"/>
+              <a16:creationId xmlns:a16="http://schemas.microsoft.com/office/drawing/2014/main" id="{4C7F4975-DFC2-D02F-2A97-E72D711A3E0C}"/>
             </a:ext>
           </a:extLst>
         </p:cNvPr>
@@ -4832,7 +4602,7 @@
           <p:cNvPr id="8" name="CuadroTexto 7">
             <a:extLst>
               <a:ext uri="{FF2B5EF4-FFF2-40B4-BE49-F238E27FC236}">
-                <a16:creationId xmlns:a16="http://schemas.microsoft.com/office/drawing/2014/main" id="{D697394C-3EB3-051E-BB3B-46414AC7ED3F}"/>
+                <a16:creationId xmlns:a16="http://schemas.microsoft.com/office/drawing/2014/main" id="{5B17338B-5EE1-F749-CA29-F1D22EEA30B2}"/>
               </a:ext>
             </a:extLst>
           </p:cNvPr>
@@ -4841,8 +4611,8 @@
         </p:nvSpPr>
         <p:spPr>
           <a:xfrm>
-            <a:off x="2281727" y="2264635"/>
-            <a:ext cx="4349810" cy="2346540"/>
+            <a:off x="1031888" y="2468089"/>
+            <a:ext cx="10094128" cy="2554545"/>
           </a:xfrm>
           <a:prstGeom prst="rect">
             <a:avLst/>
@@ -4857,29 +4627,24 @@
           <a:p>
             <a:pPr marL="285750" indent="-285750">
               <a:lnSpc>
-                <a:spcPct val="150000"/>
+                <a:spcPct val="100000"/>
               </a:lnSpc>
               <a:buFont typeface="Arial" panose="020B0604020202020204" pitchFamily="34" charset="0"/>
               <a:buChar char="•"/>
             </a:pPr>
             <a:r>
-              <a:rPr lang="es-MX" sz="2000" dirty="0" err="1">
+              <a:rPr lang="es-CL" sz="2000" dirty="0">
                 <a:solidFill>
                   <a:schemeClr val="bg1"/>
                 </a:solidFill>
               </a:rPr>
-              <a:t>Saf</a:t>
-            </a:r>
-            <a:endParaRPr lang="es-MX" sz="2000" dirty="0">
-              <a:solidFill>
-                <a:schemeClr val="bg1"/>
-              </a:solidFill>
-            </a:endParaRPr>
+              <a:t>Buscar un panorama que se ajuste a nuestros gustos y ubicación debería ser una experiencia emocionante y rápida, no una tarea frustrante.</a:t>
+            </a:r>
           </a:p>
           <a:p>
             <a:pPr marL="285750" indent="-285750">
               <a:lnSpc>
-                <a:spcPct val="150000"/>
+                <a:spcPct val="100000"/>
               </a:lnSpc>
               <a:buFont typeface="Arial" panose="020B0604020202020204" pitchFamily="34" charset="0"/>
               <a:buChar char="•"/>
@@ -4893,7 +4658,7 @@
           <a:p>
             <a:pPr marL="285750" indent="-285750">
               <a:lnSpc>
-                <a:spcPct val="150000"/>
+                <a:spcPct val="100000"/>
               </a:lnSpc>
               <a:buFont typeface="Arial" panose="020B0604020202020204" pitchFamily="34" charset="0"/>
               <a:buChar char="•"/>
@@ -4904,16 +4669,14 @@
                   <a:schemeClr val="bg1"/>
                 </a:solidFill>
               </a:rPr>
-              <a:t>S</a:t>
-            </a:r>
-          </a:p>
-          <a:p>
-            <a:pPr marL="285750" indent="-285750">
+              <a:t>La información de eventos tales como ferias, conciertos o fiestas, se encuentra dispersa a lo largo de diversas fuentes y plataformas independientes.</a:t>
+            </a:r>
+          </a:p>
+          <a:p>
+            <a:pPr>
               <a:lnSpc>
-                <a:spcPct val="150000"/>
+                <a:spcPct val="100000"/>
               </a:lnSpc>
-              <a:buFont typeface="Arial" panose="020B0604020202020204" pitchFamily="34" charset="0"/>
-              <a:buChar char="•"/>
             </a:pPr>
             <a:endParaRPr lang="es-CL" sz="2000" dirty="0">
               <a:solidFill>
@@ -4924,7 +4687,7 @@
           <a:p>
             <a:pPr marL="285750" indent="-285750">
               <a:lnSpc>
-                <a:spcPct val="150000"/>
+                <a:spcPct val="100000"/>
               </a:lnSpc>
               <a:buFont typeface="Arial" panose="020B0604020202020204" pitchFamily="34" charset="0"/>
               <a:buChar char="•"/>
@@ -4935,7 +4698,7 @@
                   <a:schemeClr val="bg1"/>
                 </a:solidFill>
               </a:rPr>
-              <a:t>s</a:t>
+              <a:t>Los usuarios finales no cuenten con una alternativa unificada para descubrir eventos cercanos a ellos</a:t>
             </a:r>
             <a:endParaRPr lang="es-MX" sz="2000" dirty="0">
               <a:solidFill>
@@ -4950,7 +4713,7 @@
           <p:cNvPr id="25" name="Grupo 24">
             <a:extLst>
               <a:ext uri="{FF2B5EF4-FFF2-40B4-BE49-F238E27FC236}">
-                <a16:creationId xmlns:a16="http://schemas.microsoft.com/office/drawing/2014/main" id="{8F18C815-584E-60D6-D87B-F5489B7EEC3F}"/>
+                <a16:creationId xmlns:a16="http://schemas.microsoft.com/office/drawing/2014/main" id="{5C8FF24F-ED2A-D29B-A973-3EC44F40C6D1}"/>
               </a:ext>
             </a:extLst>
           </p:cNvPr>
@@ -4970,7 +4733,7 @@
             <p:cNvPr id="10" name="Conector recto 9">
               <a:extLst>
                 <a:ext uri="{FF2B5EF4-FFF2-40B4-BE49-F238E27FC236}">
-                  <a16:creationId xmlns:a16="http://schemas.microsoft.com/office/drawing/2014/main" id="{4EBB4DEA-B4C9-22FB-0E84-B646F95232F4}"/>
+                  <a16:creationId xmlns:a16="http://schemas.microsoft.com/office/drawing/2014/main" id="{342D5717-BBB0-CF11-590A-003FE266605C}"/>
                 </a:ext>
               </a:extLst>
             </p:cNvPr>
@@ -5006,7 +4769,7 @@
             <p:cNvPr id="14" name="Conector recto 13">
               <a:extLst>
                 <a:ext uri="{FF2B5EF4-FFF2-40B4-BE49-F238E27FC236}">
-                  <a16:creationId xmlns:a16="http://schemas.microsoft.com/office/drawing/2014/main" id="{7E3885E7-19E2-3DD2-08ED-5EB12021A7B0}"/>
+                  <a16:creationId xmlns:a16="http://schemas.microsoft.com/office/drawing/2014/main" id="{A0DEC0E9-F1D5-3768-FB58-F5BC888C1FB1}"/>
                 </a:ext>
               </a:extLst>
             </p:cNvPr>
@@ -5042,10 +4805,10 @@
       </p:grpSp>
       <p:sp>
         <p:nvSpPr>
-          <p:cNvPr id="3" name="CuadroTexto 2">
+          <p:cNvPr id="2" name="CuadroTexto 1">
             <a:extLst>
               <a:ext uri="{FF2B5EF4-FFF2-40B4-BE49-F238E27FC236}">
-                <a16:creationId xmlns:a16="http://schemas.microsoft.com/office/drawing/2014/main" id="{F1EFD41A-FAFC-9BED-5C7C-5A2B46425529}"/>
+                <a16:creationId xmlns:a16="http://schemas.microsoft.com/office/drawing/2014/main" id="{64E35F60-58EC-4476-3022-CC7708FB2D4C}"/>
               </a:ext>
             </a:extLst>
           </p:cNvPr>
@@ -5089,7 +4852,7 @@
     </p:spTree>
     <p:extLst>
       <p:ext uri="{BB962C8B-B14F-4D97-AF65-F5344CB8AC3E}">
-        <p14:creationId xmlns:p14="http://schemas.microsoft.com/office/powerpoint/2010/main" val="3016230215"/>
+        <p14:creationId xmlns:p14="http://schemas.microsoft.com/office/powerpoint/2010/main" val="1025648124"/>
       </p:ext>
     </p:extLst>
   </p:cSld>
@@ -5100,309 +4863,6 @@
 </file>
 
 <file path=ppt/slides/slide4.xml><?xml version="1.0" encoding="utf-8"?>
-<p:sld xmlns:a="http://schemas.openxmlformats.org/drawingml/2006/main" xmlns:r="http://schemas.openxmlformats.org/officeDocument/2006/relationships" xmlns:p="http://schemas.openxmlformats.org/presentationml/2006/main">
-  <p:cSld>
-    <p:bg>
-      <p:bgPr>
-        <a:solidFill>
-          <a:schemeClr val="tx2"/>
-        </a:solidFill>
-        <a:effectLst/>
-      </p:bgPr>
-    </p:bg>
-    <p:spTree>
-      <p:nvGrpSpPr>
-        <p:cNvPr id="1" name="">
-          <a:extLst>
-            <a:ext uri="{FF2B5EF4-FFF2-40B4-BE49-F238E27FC236}">
-              <a16:creationId xmlns:a16="http://schemas.microsoft.com/office/drawing/2014/main" id="{74E6E7D1-A8CB-59CE-25E5-1D3FFBA186C0}"/>
-            </a:ext>
-          </a:extLst>
-        </p:cNvPr>
-        <p:cNvGrpSpPr/>
-        <p:nvPr/>
-      </p:nvGrpSpPr>
-      <p:grpSpPr>
-        <a:xfrm>
-          <a:off x="0" y="0"/>
-          <a:ext cx="0" cy="0"/>
-          <a:chOff x="0" y="0"/>
-          <a:chExt cx="0" cy="0"/>
-        </a:xfrm>
-      </p:grpSpPr>
-      <p:sp>
-        <p:nvSpPr>
-          <p:cNvPr id="8" name="CuadroTexto 7">
-            <a:extLst>
-              <a:ext uri="{FF2B5EF4-FFF2-40B4-BE49-F238E27FC236}">
-                <a16:creationId xmlns:a16="http://schemas.microsoft.com/office/drawing/2014/main" id="{1BBB11A7-C6C1-2709-8586-91B19AC30FB9}"/>
-              </a:ext>
-            </a:extLst>
-          </p:cNvPr>
-          <p:cNvSpPr txBox="1"/>
-          <p:nvPr/>
-        </p:nvSpPr>
-        <p:spPr>
-          <a:xfrm>
-            <a:off x="2281727" y="2264635"/>
-            <a:ext cx="4349810" cy="2346540"/>
-          </a:xfrm>
-          <a:prstGeom prst="rect">
-            <a:avLst/>
-          </a:prstGeom>
-          <a:noFill/>
-        </p:spPr>
-        <p:txBody>
-          <a:bodyPr wrap="square" rtlCol="0">
-            <a:spAutoFit/>
-          </a:bodyPr>
-          <a:lstStyle/>
-          <a:p>
-            <a:pPr marL="285750" indent="-285750">
-              <a:lnSpc>
-                <a:spcPct val="150000"/>
-              </a:lnSpc>
-              <a:buFont typeface="Arial" panose="020B0604020202020204" pitchFamily="34" charset="0"/>
-              <a:buChar char="•"/>
-            </a:pPr>
-            <a:r>
-              <a:rPr lang="es-MX" sz="2000" dirty="0" err="1">
-                <a:solidFill>
-                  <a:schemeClr val="bg1"/>
-                </a:solidFill>
-              </a:rPr>
-              <a:t>Saf</a:t>
-            </a:r>
-            <a:endParaRPr lang="es-MX" sz="2000" dirty="0">
-              <a:solidFill>
-                <a:schemeClr val="bg1"/>
-              </a:solidFill>
-            </a:endParaRPr>
-          </a:p>
-          <a:p>
-            <a:pPr marL="285750" indent="-285750">
-              <a:lnSpc>
-                <a:spcPct val="150000"/>
-              </a:lnSpc>
-              <a:buFont typeface="Arial" panose="020B0604020202020204" pitchFamily="34" charset="0"/>
-              <a:buChar char="•"/>
-            </a:pPr>
-            <a:endParaRPr lang="es-CL" sz="2000" dirty="0">
-              <a:solidFill>
-                <a:schemeClr val="bg1"/>
-              </a:solidFill>
-            </a:endParaRPr>
-          </a:p>
-          <a:p>
-            <a:pPr marL="285750" indent="-285750">
-              <a:lnSpc>
-                <a:spcPct val="150000"/>
-              </a:lnSpc>
-              <a:buFont typeface="Arial" panose="020B0604020202020204" pitchFamily="34" charset="0"/>
-              <a:buChar char="•"/>
-            </a:pPr>
-            <a:r>
-              <a:rPr lang="es-CL" sz="2000" dirty="0">
-                <a:solidFill>
-                  <a:schemeClr val="bg1"/>
-                </a:solidFill>
-              </a:rPr>
-              <a:t>S</a:t>
-            </a:r>
-          </a:p>
-          <a:p>
-            <a:pPr marL="285750" indent="-285750">
-              <a:lnSpc>
-                <a:spcPct val="150000"/>
-              </a:lnSpc>
-              <a:buFont typeface="Arial" panose="020B0604020202020204" pitchFamily="34" charset="0"/>
-              <a:buChar char="•"/>
-            </a:pPr>
-            <a:endParaRPr lang="es-CL" sz="2000" dirty="0">
-              <a:solidFill>
-                <a:schemeClr val="bg1"/>
-              </a:solidFill>
-            </a:endParaRPr>
-          </a:p>
-          <a:p>
-            <a:pPr marL="285750" indent="-285750">
-              <a:lnSpc>
-                <a:spcPct val="150000"/>
-              </a:lnSpc>
-              <a:buFont typeface="Arial" panose="020B0604020202020204" pitchFamily="34" charset="0"/>
-              <a:buChar char="•"/>
-            </a:pPr>
-            <a:r>
-              <a:rPr lang="es-CL" sz="2000" dirty="0">
-                <a:solidFill>
-                  <a:schemeClr val="bg1"/>
-                </a:solidFill>
-              </a:rPr>
-              <a:t>s</a:t>
-            </a:r>
-            <a:endParaRPr lang="es-MX" sz="2000" dirty="0">
-              <a:solidFill>
-                <a:schemeClr val="bg1"/>
-              </a:solidFill>
-            </a:endParaRPr>
-          </a:p>
-        </p:txBody>
-      </p:sp>
-      <p:grpSp>
-        <p:nvGrpSpPr>
-          <p:cNvPr id="25" name="Grupo 24">
-            <a:extLst>
-              <a:ext uri="{FF2B5EF4-FFF2-40B4-BE49-F238E27FC236}">
-                <a16:creationId xmlns:a16="http://schemas.microsoft.com/office/drawing/2014/main" id="{1E6FD3C3-D76D-BCA6-68F4-128F41F25A06}"/>
-              </a:ext>
-            </a:extLst>
-          </p:cNvPr>
-          <p:cNvGrpSpPr/>
-          <p:nvPr/>
-        </p:nvGrpSpPr>
-        <p:grpSpPr>
-          <a:xfrm>
-            <a:off x="841727" y="546930"/>
-            <a:ext cx="2880000" cy="540000"/>
-            <a:chOff x="786213" y="521293"/>
-            <a:chExt cx="2880000" cy="540000"/>
-          </a:xfrm>
-        </p:grpSpPr>
-        <p:cxnSp>
-          <p:nvCxnSpPr>
-            <p:cNvPr id="10" name="Conector recto 9">
-              <a:extLst>
-                <a:ext uri="{FF2B5EF4-FFF2-40B4-BE49-F238E27FC236}">
-                  <a16:creationId xmlns:a16="http://schemas.microsoft.com/office/drawing/2014/main" id="{9ADD293C-6241-6C76-6469-43D0282BCE35}"/>
-                </a:ext>
-              </a:extLst>
-            </p:cNvPr>
-            <p:cNvCxnSpPr/>
-            <p:nvPr/>
-          </p:nvCxnSpPr>
-          <p:spPr>
-            <a:xfrm>
-              <a:off x="786213" y="521293"/>
-              <a:ext cx="0" cy="540000"/>
-            </a:xfrm>
-            <a:prstGeom prst="line">
-              <a:avLst/>
-            </a:prstGeom>
-          </p:spPr>
-          <p:style>
-            <a:lnRef idx="3">
-              <a:schemeClr val="accent2"/>
-            </a:lnRef>
-            <a:fillRef idx="0">
-              <a:schemeClr val="accent2"/>
-            </a:fillRef>
-            <a:effectRef idx="2">
-              <a:schemeClr val="accent2"/>
-            </a:effectRef>
-            <a:fontRef idx="minor">
-              <a:schemeClr val="tx1"/>
-            </a:fontRef>
-          </p:style>
-        </p:cxnSp>
-        <p:cxnSp>
-          <p:nvCxnSpPr>
-            <p:cNvPr id="14" name="Conector recto 13">
-              <a:extLst>
-                <a:ext uri="{FF2B5EF4-FFF2-40B4-BE49-F238E27FC236}">
-                  <a16:creationId xmlns:a16="http://schemas.microsoft.com/office/drawing/2014/main" id="{643A3B96-FD48-C215-3BB0-D0401F210303}"/>
-                </a:ext>
-              </a:extLst>
-            </p:cNvPr>
-            <p:cNvCxnSpPr>
-              <a:cxnSpLocks/>
-            </p:cNvCxnSpPr>
-            <p:nvPr/>
-          </p:nvCxnSpPr>
-          <p:spPr>
-            <a:xfrm>
-              <a:off x="786213" y="1061293"/>
-              <a:ext cx="2880000" cy="0"/>
-            </a:xfrm>
-            <a:prstGeom prst="line">
-              <a:avLst/>
-            </a:prstGeom>
-          </p:spPr>
-          <p:style>
-            <a:lnRef idx="3">
-              <a:schemeClr val="accent2"/>
-            </a:lnRef>
-            <a:fillRef idx="0">
-              <a:schemeClr val="accent2"/>
-            </a:fillRef>
-            <a:effectRef idx="2">
-              <a:schemeClr val="accent2"/>
-            </a:effectRef>
-            <a:fontRef idx="minor">
-              <a:schemeClr val="tx1"/>
-            </a:fontRef>
-          </p:style>
-        </p:cxnSp>
-      </p:grpSp>
-      <p:sp>
-        <p:nvSpPr>
-          <p:cNvPr id="3" name="CuadroTexto 2">
-            <a:extLst>
-              <a:ext uri="{FF2B5EF4-FFF2-40B4-BE49-F238E27FC236}">
-                <a16:creationId xmlns:a16="http://schemas.microsoft.com/office/drawing/2014/main" id="{0184CF6D-2473-0C0C-91D4-4826F8C50515}"/>
-              </a:ext>
-            </a:extLst>
-          </p:cNvPr>
-          <p:cNvSpPr txBox="1"/>
-          <p:nvPr/>
-        </p:nvSpPr>
-        <p:spPr>
-          <a:xfrm>
-            <a:off x="1031888" y="555724"/>
-            <a:ext cx="2499678" cy="369332"/>
-          </a:xfrm>
-          <a:prstGeom prst="rect">
-            <a:avLst/>
-          </a:prstGeom>
-          <a:noFill/>
-        </p:spPr>
-        <p:txBody>
-          <a:bodyPr wrap="square" rtlCol="0">
-            <a:spAutoFit/>
-          </a:bodyPr>
-          <a:lstStyle/>
-          <a:p>
-            <a:r>
-              <a:rPr lang="es-MX" dirty="0">
-                <a:solidFill>
-                  <a:schemeClr val="accent1"/>
-                </a:solidFill>
-                <a:latin typeface="+mj-lt"/>
-              </a:rPr>
-              <a:t>Problemática</a:t>
-            </a:r>
-            <a:endParaRPr lang="es-CL" dirty="0">
-              <a:solidFill>
-                <a:schemeClr val="accent1"/>
-              </a:solidFill>
-              <a:latin typeface="+mj-lt"/>
-            </a:endParaRPr>
-          </a:p>
-        </p:txBody>
-      </p:sp>
-    </p:spTree>
-    <p:extLst>
-      <p:ext uri="{BB962C8B-B14F-4D97-AF65-F5344CB8AC3E}">
-        <p14:creationId xmlns:p14="http://schemas.microsoft.com/office/powerpoint/2010/main" val="2158553757"/>
-      </p:ext>
-    </p:extLst>
-  </p:cSld>
-  <p:clrMapOvr>
-    <a:masterClrMapping/>
-  </p:clrMapOvr>
-</p:sld>
-</file>
-
-<file path=ppt/slides/slide5.xml><?xml version="1.0" encoding="utf-8"?>
 <p:sld xmlns:a="http://schemas.openxmlformats.org/drawingml/2006/main" xmlns:r="http://schemas.openxmlformats.org/officeDocument/2006/relationships" xmlns:p="http://schemas.openxmlformats.org/presentationml/2006/main">
   <p:cSld>
     <p:bg>
@@ -5705,7 +5165,7 @@
 </p:sld>
 </file>
 
-<file path=ppt/slides/slide6.xml><?xml version="1.0" encoding="utf-8"?>
+<file path=ppt/slides/slide5.xml><?xml version="1.0" encoding="utf-8"?>
 <p:sld xmlns:a="http://schemas.openxmlformats.org/drawingml/2006/main" xmlns:r="http://schemas.openxmlformats.org/officeDocument/2006/relationships" xmlns:p="http://schemas.openxmlformats.org/presentationml/2006/main">
   <p:cSld>
     <p:bg>
@@ -6008,7 +5468,7 @@
 </p:sld>
 </file>
 
-<file path=ppt/slides/slide7.xml><?xml version="1.0" encoding="utf-8"?>
+<file path=ppt/slides/slide6.xml><?xml version="1.0" encoding="utf-8"?>
 <p:sld xmlns:a="http://schemas.openxmlformats.org/drawingml/2006/main" xmlns:r="http://schemas.openxmlformats.org/officeDocument/2006/relationships" xmlns:p="http://schemas.openxmlformats.org/presentationml/2006/main">
   <p:cSld>
     <p:bg>
@@ -6039,124 +5499,6 @@
           <a:chExt cx="0" cy="0"/>
         </a:xfrm>
       </p:grpSpPr>
-      <p:sp>
-        <p:nvSpPr>
-          <p:cNvPr id="8" name="CuadroTexto 7">
-            <a:extLst>
-              <a:ext uri="{FF2B5EF4-FFF2-40B4-BE49-F238E27FC236}">
-                <a16:creationId xmlns:a16="http://schemas.microsoft.com/office/drawing/2014/main" id="{F91A507E-95BB-1285-36AD-49FA92A72A3E}"/>
-              </a:ext>
-            </a:extLst>
-          </p:cNvPr>
-          <p:cNvSpPr txBox="1"/>
-          <p:nvPr/>
-        </p:nvSpPr>
-        <p:spPr>
-          <a:xfrm>
-            <a:off x="2281727" y="2264635"/>
-            <a:ext cx="4349810" cy="2346540"/>
-          </a:xfrm>
-          <a:prstGeom prst="rect">
-            <a:avLst/>
-          </a:prstGeom>
-          <a:noFill/>
-        </p:spPr>
-        <p:txBody>
-          <a:bodyPr wrap="square" rtlCol="0">
-            <a:spAutoFit/>
-          </a:bodyPr>
-          <a:lstStyle/>
-          <a:p>
-            <a:pPr marL="285750" indent="-285750">
-              <a:lnSpc>
-                <a:spcPct val="150000"/>
-              </a:lnSpc>
-              <a:buFont typeface="Arial" panose="020B0604020202020204" pitchFamily="34" charset="0"/>
-              <a:buChar char="•"/>
-            </a:pPr>
-            <a:r>
-              <a:rPr lang="es-MX" sz="2000" dirty="0" err="1">
-                <a:solidFill>
-                  <a:schemeClr val="bg1"/>
-                </a:solidFill>
-              </a:rPr>
-              <a:t>Saf</a:t>
-            </a:r>
-            <a:endParaRPr lang="es-MX" sz="2000" dirty="0">
-              <a:solidFill>
-                <a:schemeClr val="bg1"/>
-              </a:solidFill>
-            </a:endParaRPr>
-          </a:p>
-          <a:p>
-            <a:pPr marL="285750" indent="-285750">
-              <a:lnSpc>
-                <a:spcPct val="150000"/>
-              </a:lnSpc>
-              <a:buFont typeface="Arial" panose="020B0604020202020204" pitchFamily="34" charset="0"/>
-              <a:buChar char="•"/>
-            </a:pPr>
-            <a:endParaRPr lang="es-CL" sz="2000" dirty="0">
-              <a:solidFill>
-                <a:schemeClr val="bg1"/>
-              </a:solidFill>
-            </a:endParaRPr>
-          </a:p>
-          <a:p>
-            <a:pPr marL="285750" indent="-285750">
-              <a:lnSpc>
-                <a:spcPct val="150000"/>
-              </a:lnSpc>
-              <a:buFont typeface="Arial" panose="020B0604020202020204" pitchFamily="34" charset="0"/>
-              <a:buChar char="•"/>
-            </a:pPr>
-            <a:r>
-              <a:rPr lang="es-CL" sz="2000" dirty="0">
-                <a:solidFill>
-                  <a:schemeClr val="bg1"/>
-                </a:solidFill>
-              </a:rPr>
-              <a:t>S</a:t>
-            </a:r>
-          </a:p>
-          <a:p>
-            <a:pPr marL="285750" indent="-285750">
-              <a:lnSpc>
-                <a:spcPct val="150000"/>
-              </a:lnSpc>
-              <a:buFont typeface="Arial" panose="020B0604020202020204" pitchFamily="34" charset="0"/>
-              <a:buChar char="•"/>
-            </a:pPr>
-            <a:endParaRPr lang="es-CL" sz="2000" dirty="0">
-              <a:solidFill>
-                <a:schemeClr val="bg1"/>
-              </a:solidFill>
-            </a:endParaRPr>
-          </a:p>
-          <a:p>
-            <a:pPr marL="285750" indent="-285750">
-              <a:lnSpc>
-                <a:spcPct val="150000"/>
-              </a:lnSpc>
-              <a:buFont typeface="Arial" panose="020B0604020202020204" pitchFamily="34" charset="0"/>
-              <a:buChar char="•"/>
-            </a:pPr>
-            <a:r>
-              <a:rPr lang="es-CL" sz="2000" dirty="0">
-                <a:solidFill>
-                  <a:schemeClr val="bg1"/>
-                </a:solidFill>
-              </a:rPr>
-              <a:t>s</a:t>
-            </a:r>
-            <a:endParaRPr lang="es-MX" sz="2000" dirty="0">
-              <a:solidFill>
-                <a:schemeClr val="bg1"/>
-              </a:solidFill>
-            </a:endParaRPr>
-          </a:p>
-        </p:txBody>
-      </p:sp>
       <p:grpSp>
         <p:nvGrpSpPr>
           <p:cNvPr id="25" name="Grupo 24">
@@ -6298,6 +5640,241 @@
           </a:p>
         </p:txBody>
       </p:sp>
+      <p:sp>
+        <p:nvSpPr>
+          <p:cNvPr id="4" name="CuadroTexto 3">
+            <a:extLst>
+              <a:ext uri="{FF2B5EF4-FFF2-40B4-BE49-F238E27FC236}">
+                <a16:creationId xmlns:a16="http://schemas.microsoft.com/office/drawing/2014/main" id="{E452BF41-8C98-BA3E-E7B0-0B2E38801DDB}"/>
+              </a:ext>
+            </a:extLst>
+          </p:cNvPr>
+          <p:cNvSpPr txBox="1"/>
+          <p:nvPr/>
+        </p:nvSpPr>
+        <p:spPr>
+          <a:xfrm>
+            <a:off x="2007192" y="2298589"/>
+            <a:ext cx="1848990" cy="707886"/>
+          </a:xfrm>
+          <a:prstGeom prst="rect">
+            <a:avLst/>
+          </a:prstGeom>
+          <a:noFill/>
+        </p:spPr>
+        <p:txBody>
+          <a:bodyPr wrap="square" rtlCol="0">
+            <a:spAutoFit/>
+          </a:bodyPr>
+          <a:lstStyle/>
+          <a:p>
+            <a:pPr algn="ctr"/>
+            <a:r>
+              <a:rPr lang="es-MX" sz="2000" b="1" dirty="0">
+                <a:solidFill>
+                  <a:schemeClr val="accent2"/>
+                </a:solidFill>
+              </a:rPr>
+              <a:t>Metodología</a:t>
+            </a:r>
+          </a:p>
+          <a:p>
+            <a:pPr algn="ctr"/>
+            <a:r>
+              <a:rPr lang="es-MX" sz="2000" b="1" dirty="0">
+                <a:solidFill>
+                  <a:schemeClr val="accent2"/>
+                </a:solidFill>
+              </a:rPr>
+              <a:t>Cascada</a:t>
+            </a:r>
+            <a:endParaRPr lang="es-CL" sz="2000" b="1" dirty="0">
+              <a:solidFill>
+                <a:schemeClr val="accent2"/>
+              </a:solidFill>
+            </a:endParaRPr>
+          </a:p>
+        </p:txBody>
+      </p:sp>
+      <p:pic>
+        <p:nvPicPr>
+          <p:cNvPr id="6" name="Imagen 5">
+            <a:extLst>
+              <a:ext uri="{FF2B5EF4-FFF2-40B4-BE49-F238E27FC236}">
+                <a16:creationId xmlns:a16="http://schemas.microsoft.com/office/drawing/2014/main" id="{83630CB3-1539-00F2-A02F-2A54A7CDF43C}"/>
+              </a:ext>
+              <a:ext uri="{C183D7F6-B498-43B3-948B-1728B52AA6E4}">
+                <adec:decorative xmlns:adec="http://schemas.microsoft.com/office/drawing/2017/decorative" val="1"/>
+              </a:ext>
+            </a:extLst>
+          </p:cNvPr>
+          <p:cNvPicPr>
+            <a:picLocks noChangeAspect="1"/>
+          </p:cNvPicPr>
+          <p:nvPr/>
+        </p:nvPicPr>
+        <p:blipFill>
+          <a:blip r:embed="rId2"/>
+          <a:stretch>
+            <a:fillRect/>
+          </a:stretch>
+        </p:blipFill>
+        <p:spPr>
+          <a:xfrm>
+            <a:off x="2192475" y="3536750"/>
+            <a:ext cx="1478424" cy="1478424"/>
+          </a:xfrm>
+          <a:prstGeom prst="rect">
+            <a:avLst/>
+          </a:prstGeom>
+        </p:spPr>
+      </p:pic>
+      <p:sp>
+        <p:nvSpPr>
+          <p:cNvPr id="9" name="CuadroTexto 8">
+            <a:extLst>
+              <a:ext uri="{FF2B5EF4-FFF2-40B4-BE49-F238E27FC236}">
+                <a16:creationId xmlns:a16="http://schemas.microsoft.com/office/drawing/2014/main" id="{0EE98074-70CE-687D-4AB9-66492895BCDC}"/>
+              </a:ext>
+            </a:extLst>
+          </p:cNvPr>
+          <p:cNvSpPr txBox="1"/>
+          <p:nvPr/>
+        </p:nvSpPr>
+        <p:spPr>
+          <a:xfrm>
+            <a:off x="7707488" y="2298589"/>
+            <a:ext cx="2477320" cy="707886"/>
+          </a:xfrm>
+          <a:prstGeom prst="rect">
+            <a:avLst/>
+          </a:prstGeom>
+          <a:noFill/>
+        </p:spPr>
+        <p:txBody>
+          <a:bodyPr wrap="square" rtlCol="0">
+            <a:spAutoFit/>
+          </a:bodyPr>
+          <a:lstStyle/>
+          <a:p>
+            <a:pPr algn="ctr"/>
+            <a:r>
+              <a:rPr lang="es-MX" sz="2000" b="1" dirty="0">
+                <a:solidFill>
+                  <a:schemeClr val="accent2"/>
+                </a:solidFill>
+              </a:rPr>
+              <a:t>Web</a:t>
+            </a:r>
+          </a:p>
+          <a:p>
+            <a:pPr algn="ctr"/>
+            <a:r>
+              <a:rPr lang="es-MX" sz="2000" b="1" dirty="0">
+                <a:solidFill>
+                  <a:schemeClr val="accent2"/>
+                </a:solidFill>
+              </a:rPr>
+              <a:t>Scraping</a:t>
+            </a:r>
+            <a:endParaRPr lang="es-CL" sz="2000" b="1" dirty="0">
+              <a:solidFill>
+                <a:schemeClr val="accent2"/>
+              </a:solidFill>
+            </a:endParaRPr>
+          </a:p>
+        </p:txBody>
+      </p:sp>
+      <p:pic>
+        <p:nvPicPr>
+          <p:cNvPr id="15" name="Imagen 14" descr="PostgreSQL - Wikipedia, la enciclopedia libre">
+            <a:extLst>
+              <a:ext uri="{FF2B5EF4-FFF2-40B4-BE49-F238E27FC236}">
+                <a16:creationId xmlns:a16="http://schemas.microsoft.com/office/drawing/2014/main" id="{2064077E-CC8B-B432-C085-BE8D20A65007}"/>
+              </a:ext>
+            </a:extLst>
+          </p:cNvPr>
+          <p:cNvPicPr>
+            <a:picLocks noChangeAspect="1"/>
+          </p:cNvPicPr>
+          <p:nvPr/>
+        </p:nvPicPr>
+        <p:blipFill>
+          <a:blip r:embed="rId3"/>
+          <a:stretch>
+            <a:fillRect/>
+          </a:stretch>
+        </p:blipFill>
+        <p:spPr>
+          <a:xfrm>
+            <a:off x="5440218" y="1975765"/>
+            <a:ext cx="1311564" cy="1353534"/>
+          </a:xfrm>
+          <a:prstGeom prst="rect">
+            <a:avLst/>
+          </a:prstGeom>
+        </p:spPr>
+      </p:pic>
+      <p:pic>
+        <p:nvPicPr>
+          <p:cNvPr id="16" name="Imagen 15" descr="Archivo:Google-flutter-logo.png - Wikipedia, la enciclopedia libre">
+            <a:extLst>
+              <a:ext uri="{FF2B5EF4-FFF2-40B4-BE49-F238E27FC236}">
+                <a16:creationId xmlns:a16="http://schemas.microsoft.com/office/drawing/2014/main" id="{218AB787-DCB9-CF46-2A42-166BE8289EE4}"/>
+              </a:ext>
+            </a:extLst>
+          </p:cNvPr>
+          <p:cNvPicPr>
+            <a:picLocks noChangeAspect="1"/>
+          </p:cNvPicPr>
+          <p:nvPr/>
+        </p:nvPicPr>
+        <p:blipFill>
+          <a:blip r:embed="rId4"/>
+          <a:stretch>
+            <a:fillRect/>
+          </a:stretch>
+        </p:blipFill>
+        <p:spPr>
+          <a:xfrm>
+            <a:off x="7692966" y="3920794"/>
+            <a:ext cx="2491842" cy="711208"/>
+          </a:xfrm>
+          <a:prstGeom prst="rect">
+            <a:avLst/>
+          </a:prstGeom>
+        </p:spPr>
+      </p:pic>
+      <p:pic>
+        <p:nvPicPr>
+          <p:cNvPr id="17" name="Imagen 16" descr="File:Python-logo-notext.svg - Wikimedia Commons">
+            <a:extLst>
+              <a:ext uri="{FF2B5EF4-FFF2-40B4-BE49-F238E27FC236}">
+                <a16:creationId xmlns:a16="http://schemas.microsoft.com/office/drawing/2014/main" id="{DE24F697-3CC8-65DD-BD57-C4819752DA4B}"/>
+              </a:ext>
+            </a:extLst>
+          </p:cNvPr>
+          <p:cNvPicPr>
+            <a:picLocks noChangeAspect="1"/>
+          </p:cNvPicPr>
+          <p:nvPr/>
+        </p:nvPicPr>
+        <p:blipFill>
+          <a:blip r:embed="rId5"/>
+          <a:stretch>
+            <a:fillRect/>
+          </a:stretch>
+        </p:blipFill>
+        <p:spPr>
+          <a:xfrm>
+            <a:off x="5440218" y="3620180"/>
+            <a:ext cx="1311564" cy="1311564"/>
+          </a:xfrm>
+          <a:prstGeom prst="rect">
+            <a:avLst/>
+          </a:prstGeom>
+        </p:spPr>
+      </p:pic>
     </p:spTree>
     <p:extLst>
       <p:ext uri="{BB962C8B-B14F-4D97-AF65-F5344CB8AC3E}">
@@ -6311,7 +5888,7 @@
 </p:sld>
 </file>
 
-<file path=ppt/slides/slide8.xml><?xml version="1.0" encoding="utf-8"?>
+<file path=ppt/slides/slide7.xml><?xml version="1.0" encoding="utf-8"?>
 <p:sld xmlns:a="http://schemas.openxmlformats.org/drawingml/2006/main" xmlns:r="http://schemas.openxmlformats.org/officeDocument/2006/relationships" xmlns:p="http://schemas.openxmlformats.org/presentationml/2006/main">
   <p:cSld>
     <p:bg>
@@ -6483,10 +6060,352 @@
           </a:p>
         </p:txBody>
       </p:sp>
+      <p:pic>
+        <p:nvPicPr>
+          <p:cNvPr id="4" name="Imagen 3">
+            <a:extLst>
+              <a:ext uri="{FF2B5EF4-FFF2-40B4-BE49-F238E27FC236}">
+                <a16:creationId xmlns:a16="http://schemas.microsoft.com/office/drawing/2014/main" id="{736F7DC7-B0F5-EA65-9EDB-87B53E6F9BAE}"/>
+              </a:ext>
+            </a:extLst>
+          </p:cNvPr>
+          <p:cNvPicPr>
+            <a:picLocks noChangeAspect="1"/>
+          </p:cNvPicPr>
+          <p:nvPr/>
+        </p:nvPicPr>
+        <p:blipFill>
+          <a:blip r:embed="rId2">
+            <a:extLst>
+              <a:ext uri="{28A0092B-C50C-407E-A947-70E740481C1C}">
+                <a14:useLocalDpi xmlns:a14="http://schemas.microsoft.com/office/drawing/2010/main" val="0"/>
+              </a:ext>
+            </a:extLst>
+          </a:blip>
+          <a:stretch>
+            <a:fillRect/>
+          </a:stretch>
+        </p:blipFill>
+        <p:spPr>
+          <a:xfrm>
+            <a:off x="2196703" y="1465056"/>
+            <a:ext cx="7798594" cy="4684140"/>
+          </a:xfrm>
+          <a:prstGeom prst="rect">
+            <a:avLst/>
+          </a:prstGeom>
+          <a:ln>
+            <a:noFill/>
+          </a:ln>
+        </p:spPr>
+      </p:pic>
     </p:spTree>
     <p:extLst>
       <p:ext uri="{BB962C8B-B14F-4D97-AF65-F5344CB8AC3E}">
         <p14:creationId xmlns:p14="http://schemas.microsoft.com/office/powerpoint/2010/main" val="2462326697"/>
+      </p:ext>
+    </p:extLst>
+  </p:cSld>
+  <p:clrMapOvr>
+    <a:masterClrMapping/>
+  </p:clrMapOvr>
+</p:sld>
+</file>
+
+<file path=ppt/slides/slide8.xml><?xml version="1.0" encoding="utf-8"?>
+<p:sld xmlns:a="http://schemas.openxmlformats.org/drawingml/2006/main" xmlns:r="http://schemas.openxmlformats.org/officeDocument/2006/relationships" xmlns:p="http://schemas.openxmlformats.org/presentationml/2006/main">
+  <p:cSld>
+    <p:bg>
+      <p:bgPr>
+        <a:solidFill>
+          <a:schemeClr val="tx2"/>
+        </a:solidFill>
+        <a:effectLst/>
+      </p:bgPr>
+    </p:bg>
+    <p:spTree>
+      <p:nvGrpSpPr>
+        <p:cNvPr id="1" name="">
+          <a:extLst>
+            <a:ext uri="{FF2B5EF4-FFF2-40B4-BE49-F238E27FC236}">
+              <a16:creationId xmlns:a16="http://schemas.microsoft.com/office/drawing/2014/main" id="{E2474F52-F80C-9A7A-5152-D89A5F373266}"/>
+            </a:ext>
+          </a:extLst>
+        </p:cNvPr>
+        <p:cNvGrpSpPr/>
+        <p:nvPr/>
+      </p:nvGrpSpPr>
+      <p:grpSpPr>
+        <a:xfrm>
+          <a:off x="0" y="0"/>
+          <a:ext cx="0" cy="0"/>
+          <a:chOff x="0" y="0"/>
+          <a:chExt cx="0" cy="0"/>
+        </a:xfrm>
+      </p:grpSpPr>
+      <p:sp>
+        <p:nvSpPr>
+          <p:cNvPr id="8" name="CuadroTexto 7">
+            <a:extLst>
+              <a:ext uri="{FF2B5EF4-FFF2-40B4-BE49-F238E27FC236}">
+                <a16:creationId xmlns:a16="http://schemas.microsoft.com/office/drawing/2014/main" id="{4AA918F1-82FF-B5D1-5CE9-308B16E55A6B}"/>
+              </a:ext>
+            </a:extLst>
+          </p:cNvPr>
+          <p:cNvSpPr txBox="1"/>
+          <p:nvPr/>
+        </p:nvSpPr>
+        <p:spPr>
+          <a:xfrm>
+            <a:off x="2281727" y="2264635"/>
+            <a:ext cx="4349810" cy="2346540"/>
+          </a:xfrm>
+          <a:prstGeom prst="rect">
+            <a:avLst/>
+          </a:prstGeom>
+          <a:noFill/>
+        </p:spPr>
+        <p:txBody>
+          <a:bodyPr wrap="square" rtlCol="0">
+            <a:spAutoFit/>
+          </a:bodyPr>
+          <a:lstStyle/>
+          <a:p>
+            <a:pPr marL="285750" indent="-285750">
+              <a:lnSpc>
+                <a:spcPct val="150000"/>
+              </a:lnSpc>
+              <a:buFont typeface="Arial" panose="020B0604020202020204" pitchFamily="34" charset="0"/>
+              <a:buChar char="•"/>
+            </a:pPr>
+            <a:r>
+              <a:rPr lang="es-MX" sz="2000" dirty="0" err="1">
+                <a:solidFill>
+                  <a:schemeClr val="bg1"/>
+                </a:solidFill>
+              </a:rPr>
+              <a:t>Saf</a:t>
+            </a:r>
+            <a:endParaRPr lang="es-MX" sz="2000" dirty="0">
+              <a:solidFill>
+                <a:schemeClr val="bg1"/>
+              </a:solidFill>
+            </a:endParaRPr>
+          </a:p>
+          <a:p>
+            <a:pPr marL="285750" indent="-285750">
+              <a:lnSpc>
+                <a:spcPct val="150000"/>
+              </a:lnSpc>
+              <a:buFont typeface="Arial" panose="020B0604020202020204" pitchFamily="34" charset="0"/>
+              <a:buChar char="•"/>
+            </a:pPr>
+            <a:endParaRPr lang="es-CL" sz="2000" dirty="0">
+              <a:solidFill>
+                <a:schemeClr val="bg1"/>
+              </a:solidFill>
+            </a:endParaRPr>
+          </a:p>
+          <a:p>
+            <a:pPr marL="285750" indent="-285750">
+              <a:lnSpc>
+                <a:spcPct val="150000"/>
+              </a:lnSpc>
+              <a:buFont typeface="Arial" panose="020B0604020202020204" pitchFamily="34" charset="0"/>
+              <a:buChar char="•"/>
+            </a:pPr>
+            <a:r>
+              <a:rPr lang="es-CL" sz="2000" dirty="0">
+                <a:solidFill>
+                  <a:schemeClr val="bg1"/>
+                </a:solidFill>
+              </a:rPr>
+              <a:t>S</a:t>
+            </a:r>
+          </a:p>
+          <a:p>
+            <a:pPr marL="285750" indent="-285750">
+              <a:lnSpc>
+                <a:spcPct val="150000"/>
+              </a:lnSpc>
+              <a:buFont typeface="Arial" panose="020B0604020202020204" pitchFamily="34" charset="0"/>
+              <a:buChar char="•"/>
+            </a:pPr>
+            <a:endParaRPr lang="es-CL" sz="2000" dirty="0">
+              <a:solidFill>
+                <a:schemeClr val="bg1"/>
+              </a:solidFill>
+            </a:endParaRPr>
+          </a:p>
+          <a:p>
+            <a:pPr marL="285750" indent="-285750">
+              <a:lnSpc>
+                <a:spcPct val="150000"/>
+              </a:lnSpc>
+              <a:buFont typeface="Arial" panose="020B0604020202020204" pitchFamily="34" charset="0"/>
+              <a:buChar char="•"/>
+            </a:pPr>
+            <a:r>
+              <a:rPr lang="es-CL" sz="2000" dirty="0">
+                <a:solidFill>
+                  <a:schemeClr val="bg1"/>
+                </a:solidFill>
+              </a:rPr>
+              <a:t>s</a:t>
+            </a:r>
+            <a:endParaRPr lang="es-MX" sz="2000" dirty="0">
+              <a:solidFill>
+                <a:schemeClr val="bg1"/>
+              </a:solidFill>
+            </a:endParaRPr>
+          </a:p>
+        </p:txBody>
+      </p:sp>
+      <p:grpSp>
+        <p:nvGrpSpPr>
+          <p:cNvPr id="25" name="Grupo 24">
+            <a:extLst>
+              <a:ext uri="{FF2B5EF4-FFF2-40B4-BE49-F238E27FC236}">
+                <a16:creationId xmlns:a16="http://schemas.microsoft.com/office/drawing/2014/main" id="{AE0DEEA6-6BE8-12D1-5592-D3B27CFACED7}"/>
+              </a:ext>
+            </a:extLst>
+          </p:cNvPr>
+          <p:cNvGrpSpPr/>
+          <p:nvPr/>
+        </p:nvGrpSpPr>
+        <p:grpSpPr>
+          <a:xfrm>
+            <a:off x="841727" y="546930"/>
+            <a:ext cx="2880000" cy="540000"/>
+            <a:chOff x="786213" y="521293"/>
+            <a:chExt cx="2880000" cy="540000"/>
+          </a:xfrm>
+        </p:grpSpPr>
+        <p:cxnSp>
+          <p:nvCxnSpPr>
+            <p:cNvPr id="10" name="Conector recto 9">
+              <a:extLst>
+                <a:ext uri="{FF2B5EF4-FFF2-40B4-BE49-F238E27FC236}">
+                  <a16:creationId xmlns:a16="http://schemas.microsoft.com/office/drawing/2014/main" id="{032AC6CA-C53A-5493-154E-37F392B6BC78}"/>
+                </a:ext>
+              </a:extLst>
+            </p:cNvPr>
+            <p:cNvCxnSpPr/>
+            <p:nvPr/>
+          </p:nvCxnSpPr>
+          <p:spPr>
+            <a:xfrm>
+              <a:off x="786213" y="521293"/>
+              <a:ext cx="0" cy="540000"/>
+            </a:xfrm>
+            <a:prstGeom prst="line">
+              <a:avLst/>
+            </a:prstGeom>
+          </p:spPr>
+          <p:style>
+            <a:lnRef idx="3">
+              <a:schemeClr val="accent2"/>
+            </a:lnRef>
+            <a:fillRef idx="0">
+              <a:schemeClr val="accent2"/>
+            </a:fillRef>
+            <a:effectRef idx="2">
+              <a:schemeClr val="accent2"/>
+            </a:effectRef>
+            <a:fontRef idx="minor">
+              <a:schemeClr val="tx1"/>
+            </a:fontRef>
+          </p:style>
+        </p:cxnSp>
+        <p:cxnSp>
+          <p:nvCxnSpPr>
+            <p:cNvPr id="14" name="Conector recto 13">
+              <a:extLst>
+                <a:ext uri="{FF2B5EF4-FFF2-40B4-BE49-F238E27FC236}">
+                  <a16:creationId xmlns:a16="http://schemas.microsoft.com/office/drawing/2014/main" id="{22D99637-052D-9D8B-8A3F-5FC678DD9E65}"/>
+                </a:ext>
+              </a:extLst>
+            </p:cNvPr>
+            <p:cNvCxnSpPr>
+              <a:cxnSpLocks/>
+            </p:cNvCxnSpPr>
+            <p:nvPr/>
+          </p:nvCxnSpPr>
+          <p:spPr>
+            <a:xfrm>
+              <a:off x="786213" y="1061293"/>
+              <a:ext cx="2880000" cy="0"/>
+            </a:xfrm>
+            <a:prstGeom prst="line">
+              <a:avLst/>
+            </a:prstGeom>
+          </p:spPr>
+          <p:style>
+            <a:lnRef idx="3">
+              <a:schemeClr val="accent2"/>
+            </a:lnRef>
+            <a:fillRef idx="0">
+              <a:schemeClr val="accent2"/>
+            </a:fillRef>
+            <a:effectRef idx="2">
+              <a:schemeClr val="accent2"/>
+            </a:effectRef>
+            <a:fontRef idx="minor">
+              <a:schemeClr val="tx1"/>
+            </a:fontRef>
+          </p:style>
+        </p:cxnSp>
+      </p:grpSp>
+      <p:sp>
+        <p:nvSpPr>
+          <p:cNvPr id="3" name="CuadroTexto 2">
+            <a:extLst>
+              <a:ext uri="{FF2B5EF4-FFF2-40B4-BE49-F238E27FC236}">
+                <a16:creationId xmlns:a16="http://schemas.microsoft.com/office/drawing/2014/main" id="{B7EFF28F-B004-F7B6-F346-79049DEC0080}"/>
+              </a:ext>
+            </a:extLst>
+          </p:cNvPr>
+          <p:cNvSpPr txBox="1"/>
+          <p:nvPr/>
+        </p:nvSpPr>
+        <p:spPr>
+          <a:xfrm>
+            <a:off x="1031888" y="555724"/>
+            <a:ext cx="2499678" cy="369332"/>
+          </a:xfrm>
+          <a:prstGeom prst="rect">
+            <a:avLst/>
+          </a:prstGeom>
+          <a:noFill/>
+        </p:spPr>
+        <p:txBody>
+          <a:bodyPr wrap="square" rtlCol="0">
+            <a:spAutoFit/>
+          </a:bodyPr>
+          <a:lstStyle/>
+          <a:p>
+            <a:r>
+              <a:rPr lang="es-MX" dirty="0">
+                <a:solidFill>
+                  <a:schemeClr val="accent1"/>
+                </a:solidFill>
+                <a:latin typeface="+mj-lt"/>
+              </a:rPr>
+              <a:t>Riesgos</a:t>
+            </a:r>
+            <a:endParaRPr lang="es-CL" dirty="0">
+              <a:solidFill>
+                <a:schemeClr val="accent1"/>
+              </a:solidFill>
+              <a:latin typeface="+mj-lt"/>
+            </a:endParaRPr>
+          </a:p>
+        </p:txBody>
+      </p:sp>
+    </p:spTree>
+    <p:extLst>
+      <p:ext uri="{BB962C8B-B14F-4D97-AF65-F5344CB8AC3E}">
+        <p14:creationId xmlns:p14="http://schemas.microsoft.com/office/powerpoint/2010/main" val="1744374417"/>
       </p:ext>
     </p:extLst>
   </p:cSld>

--- a/Aldo Alberto Martinez Ordenes/PTY4614_Capstone_004D/Equipo/Fase 1/Evidencias Grupales/Presentación EventApp.pptx
+++ b/Aldo Alberto Martinez Ordenes/PTY4614_Capstone_004D/Equipo/Fase 1/Evidencias Grupales/Presentación EventApp.pptx
@@ -2991,7 +2991,7 @@
                   <a:schemeClr val="accent1"/>
                 </a:solidFill>
               </a:rPr>
-              <a:t>Proyecto app móvil para eventos cercanos</a:t>
+              <a:t>Proyecto app móvil eventos cercanos</a:t>
             </a:r>
           </a:p>
         </p:txBody>
@@ -3706,6 +3706,207 @@
           </a:p>
         </p:txBody>
       </p:sp>
+      <p:grpSp>
+        <p:nvGrpSpPr>
+          <p:cNvPr id="15" name="Grupo 14">
+            <a:extLst>
+              <a:ext uri="{FF2B5EF4-FFF2-40B4-BE49-F238E27FC236}">
+                <a16:creationId xmlns:a16="http://schemas.microsoft.com/office/drawing/2014/main" id="{64CADBF1-5FA0-8754-A84B-4A58294E244E}"/>
+              </a:ext>
+            </a:extLst>
+          </p:cNvPr>
+          <p:cNvGrpSpPr/>
+          <p:nvPr/>
+        </p:nvGrpSpPr>
+        <p:grpSpPr>
+          <a:xfrm>
+            <a:off x="310676" y="1738690"/>
+            <a:ext cx="11570648" cy="4032380"/>
+            <a:chOff x="90484" y="1480628"/>
+            <a:chExt cx="11570648" cy="4032380"/>
+          </a:xfrm>
+        </p:grpSpPr>
+        <p:pic>
+          <p:nvPicPr>
+            <p:cNvPr id="4" name="Imagen 3">
+              <a:extLst>
+                <a:ext uri="{FF2B5EF4-FFF2-40B4-BE49-F238E27FC236}">
+                  <a16:creationId xmlns:a16="http://schemas.microsoft.com/office/drawing/2014/main" id="{6E23BAAD-6828-52B2-5B03-4331678CFEF9}"/>
+                </a:ext>
+              </a:extLst>
+            </p:cNvPr>
+            <p:cNvPicPr>
+              <a:picLocks noChangeAspect="1"/>
+            </p:cNvPicPr>
+            <p:nvPr/>
+          </p:nvPicPr>
+          <p:blipFill>
+            <a:blip r:embed="rId2">
+              <a:extLst>
+                <a:ext uri="{28A0092B-C50C-407E-A947-70E740481C1C}">
+                  <a14:useLocalDpi xmlns:a14="http://schemas.microsoft.com/office/drawing/2010/main" val="0"/>
+                </a:ext>
+              </a:extLst>
+            </a:blip>
+            <a:stretch>
+              <a:fillRect/>
+            </a:stretch>
+          </p:blipFill>
+          <p:spPr>
+            <a:xfrm>
+              <a:off x="90484" y="1559288"/>
+              <a:ext cx="2057170" cy="3953720"/>
+            </a:xfrm>
+            <a:prstGeom prst="rect">
+              <a:avLst/>
+            </a:prstGeom>
+          </p:spPr>
+        </p:pic>
+        <p:pic>
+          <p:nvPicPr>
+            <p:cNvPr id="6" name="Imagen 5">
+              <a:extLst>
+                <a:ext uri="{FF2B5EF4-FFF2-40B4-BE49-F238E27FC236}">
+                  <a16:creationId xmlns:a16="http://schemas.microsoft.com/office/drawing/2014/main" id="{9F326FED-0D0E-6B28-6F43-F76E6D32C427}"/>
+                </a:ext>
+              </a:extLst>
+            </p:cNvPr>
+            <p:cNvPicPr>
+              <a:picLocks noChangeAspect="1"/>
+            </p:cNvPicPr>
+            <p:nvPr/>
+          </p:nvPicPr>
+          <p:blipFill>
+            <a:blip r:embed="rId3">
+              <a:extLst>
+                <a:ext uri="{28A0092B-C50C-407E-A947-70E740481C1C}">
+                  <a14:useLocalDpi xmlns:a14="http://schemas.microsoft.com/office/drawing/2010/main" val="0"/>
+                </a:ext>
+              </a:extLst>
+            </a:blip>
+            <a:stretch>
+              <a:fillRect/>
+            </a:stretch>
+          </p:blipFill>
+          <p:spPr>
+            <a:xfrm>
+              <a:off x="2496212" y="1559288"/>
+              <a:ext cx="2070708" cy="3944204"/>
+            </a:xfrm>
+            <a:prstGeom prst="rect">
+              <a:avLst/>
+            </a:prstGeom>
+          </p:spPr>
+        </p:pic>
+        <p:pic>
+          <p:nvPicPr>
+            <p:cNvPr id="8" name="Imagen 7">
+              <a:extLst>
+                <a:ext uri="{FF2B5EF4-FFF2-40B4-BE49-F238E27FC236}">
+                  <a16:creationId xmlns:a16="http://schemas.microsoft.com/office/drawing/2014/main" id="{F107B9B3-4849-961B-31FB-0985C549947E}"/>
+                </a:ext>
+              </a:extLst>
+            </p:cNvPr>
+            <p:cNvPicPr>
+              <a:picLocks noChangeAspect="1"/>
+            </p:cNvPicPr>
+            <p:nvPr/>
+          </p:nvPicPr>
+          <p:blipFill>
+            <a:blip r:embed="rId4">
+              <a:extLst>
+                <a:ext uri="{28A0092B-C50C-407E-A947-70E740481C1C}">
+                  <a14:useLocalDpi xmlns:a14="http://schemas.microsoft.com/office/drawing/2010/main" val="0"/>
+                </a:ext>
+              </a:extLst>
+            </a:blip>
+            <a:stretch>
+              <a:fillRect/>
+            </a:stretch>
+          </p:blipFill>
+          <p:spPr>
+            <a:xfrm>
+              <a:off x="4915478" y="1493200"/>
+              <a:ext cx="2005146" cy="3997720"/>
+            </a:xfrm>
+            <a:prstGeom prst="rect">
+              <a:avLst/>
+            </a:prstGeom>
+          </p:spPr>
+        </p:pic>
+        <p:pic>
+          <p:nvPicPr>
+            <p:cNvPr id="11" name="Imagen 10">
+              <a:extLst>
+                <a:ext uri="{FF2B5EF4-FFF2-40B4-BE49-F238E27FC236}">
+                  <a16:creationId xmlns:a16="http://schemas.microsoft.com/office/drawing/2014/main" id="{3DF132E4-540A-825C-6A3E-99710D43EC4B}"/>
+                </a:ext>
+              </a:extLst>
+            </p:cNvPr>
+            <p:cNvPicPr>
+              <a:picLocks noChangeAspect="1"/>
+            </p:cNvPicPr>
+            <p:nvPr/>
+          </p:nvPicPr>
+          <p:blipFill>
+            <a:blip r:embed="rId5">
+              <a:extLst>
+                <a:ext uri="{28A0092B-C50C-407E-A947-70E740481C1C}">
+                  <a14:useLocalDpi xmlns:a14="http://schemas.microsoft.com/office/drawing/2010/main" val="0"/>
+                </a:ext>
+              </a:extLst>
+            </a:blip>
+            <a:stretch>
+              <a:fillRect/>
+            </a:stretch>
+          </p:blipFill>
+          <p:spPr>
+            <a:xfrm>
+              <a:off x="7263731" y="1512056"/>
+              <a:ext cx="2024004" cy="3978864"/>
+            </a:xfrm>
+            <a:prstGeom prst="rect">
+              <a:avLst/>
+            </a:prstGeom>
+          </p:spPr>
+        </p:pic>
+        <p:pic>
+          <p:nvPicPr>
+            <p:cNvPr id="13" name="Imagen 12">
+              <a:extLst>
+                <a:ext uri="{FF2B5EF4-FFF2-40B4-BE49-F238E27FC236}">
+                  <a16:creationId xmlns:a16="http://schemas.microsoft.com/office/drawing/2014/main" id="{6464B18C-4D0B-4DE9-E93E-32E0942DB517}"/>
+                </a:ext>
+              </a:extLst>
+            </p:cNvPr>
+            <p:cNvPicPr>
+              <a:picLocks noChangeAspect="1"/>
+            </p:cNvPicPr>
+            <p:nvPr/>
+          </p:nvPicPr>
+          <p:blipFill>
+            <a:blip r:embed="rId6">
+              <a:extLst>
+                <a:ext uri="{28A0092B-C50C-407E-A947-70E740481C1C}">
+                  <a14:useLocalDpi xmlns:a14="http://schemas.microsoft.com/office/drawing/2010/main" val="0"/>
+                </a:ext>
+              </a:extLst>
+            </a:blip>
+            <a:stretch>
+              <a:fillRect/>
+            </a:stretch>
+          </p:blipFill>
+          <p:spPr>
+            <a:xfrm>
+              <a:off x="9630842" y="1480628"/>
+              <a:ext cx="2030290" cy="4010292"/>
+            </a:xfrm>
+            <a:prstGeom prst="rect">
+              <a:avLst/>
+            </a:prstGeom>
+          </p:spPr>
+        </p:pic>
+      </p:grpSp>
     </p:spTree>
     <p:extLst>
       <p:ext uri="{BB962C8B-B14F-4D97-AF65-F5344CB8AC3E}">
@@ -3779,14 +3980,14 @@
           <a:lstStyle/>
           <a:p>
             <a:r>
-              <a:rPr lang="es-MX" dirty="0">
+              <a:rPr lang="es-MX" u="sng" dirty="0">
                 <a:solidFill>
                   <a:schemeClr val="accent1"/>
                 </a:solidFill>
               </a:rPr>
               <a:t>Conclusión</a:t>
             </a:r>
-            <a:endParaRPr lang="es-CL" dirty="0">
+            <a:endParaRPr lang="es-CL" u="sng" dirty="0">
               <a:solidFill>
                 <a:schemeClr val="accent1"/>
               </a:solidFill>
@@ -4625,7 +4826,7 @@
           </a:bodyPr>
           <a:lstStyle/>
           <a:p>
-            <a:pPr marL="285750" indent="-285750">
+            <a:pPr marL="285750" indent="-285750" algn="just">
               <a:lnSpc>
                 <a:spcPct val="100000"/>
               </a:lnSpc>
@@ -4642,7 +4843,7 @@
             </a:r>
           </a:p>
           <a:p>
-            <a:pPr marL="285750" indent="-285750">
+            <a:pPr marL="285750" indent="-285750" algn="just">
               <a:lnSpc>
                 <a:spcPct val="100000"/>
               </a:lnSpc>
@@ -4656,7 +4857,7 @@
             </a:endParaRPr>
           </a:p>
           <a:p>
-            <a:pPr marL="285750" indent="-285750">
+            <a:pPr marL="285750" indent="-285750" algn="just">
               <a:lnSpc>
                 <a:spcPct val="100000"/>
               </a:lnSpc>
@@ -4673,7 +4874,7 @@
             </a:r>
           </a:p>
           <a:p>
-            <a:pPr>
+            <a:pPr algn="just">
               <a:lnSpc>
                 <a:spcPct val="100000"/>
               </a:lnSpc>
@@ -4685,7 +4886,7 @@
             </a:endParaRPr>
           </a:p>
           <a:p>
-            <a:pPr marL="285750" indent="-285750">
+            <a:pPr marL="285750" indent="-285750" algn="just">
               <a:lnSpc>
                 <a:spcPct val="100000"/>
               </a:lnSpc>
@@ -4893,124 +5094,6 @@
           <a:chExt cx="0" cy="0"/>
         </a:xfrm>
       </p:grpSpPr>
-      <p:sp>
-        <p:nvSpPr>
-          <p:cNvPr id="8" name="CuadroTexto 7">
-            <a:extLst>
-              <a:ext uri="{FF2B5EF4-FFF2-40B4-BE49-F238E27FC236}">
-                <a16:creationId xmlns:a16="http://schemas.microsoft.com/office/drawing/2014/main" id="{CB9D833E-7075-8BC0-8C3B-2DF7509CA7BB}"/>
-              </a:ext>
-            </a:extLst>
-          </p:cNvPr>
-          <p:cNvSpPr txBox="1"/>
-          <p:nvPr/>
-        </p:nvSpPr>
-        <p:spPr>
-          <a:xfrm>
-            <a:off x="2281727" y="2264635"/>
-            <a:ext cx="4349810" cy="2346540"/>
-          </a:xfrm>
-          <a:prstGeom prst="rect">
-            <a:avLst/>
-          </a:prstGeom>
-          <a:noFill/>
-        </p:spPr>
-        <p:txBody>
-          <a:bodyPr wrap="square" rtlCol="0">
-            <a:spAutoFit/>
-          </a:bodyPr>
-          <a:lstStyle/>
-          <a:p>
-            <a:pPr marL="285750" indent="-285750">
-              <a:lnSpc>
-                <a:spcPct val="150000"/>
-              </a:lnSpc>
-              <a:buFont typeface="Arial" panose="020B0604020202020204" pitchFamily="34" charset="0"/>
-              <a:buChar char="•"/>
-            </a:pPr>
-            <a:r>
-              <a:rPr lang="es-MX" sz="2000" dirty="0" err="1">
-                <a:solidFill>
-                  <a:schemeClr val="bg1"/>
-                </a:solidFill>
-              </a:rPr>
-              <a:t>Saf</a:t>
-            </a:r>
-            <a:endParaRPr lang="es-MX" sz="2000" dirty="0">
-              <a:solidFill>
-                <a:schemeClr val="bg1"/>
-              </a:solidFill>
-            </a:endParaRPr>
-          </a:p>
-          <a:p>
-            <a:pPr marL="285750" indent="-285750">
-              <a:lnSpc>
-                <a:spcPct val="150000"/>
-              </a:lnSpc>
-              <a:buFont typeface="Arial" panose="020B0604020202020204" pitchFamily="34" charset="0"/>
-              <a:buChar char="•"/>
-            </a:pPr>
-            <a:endParaRPr lang="es-CL" sz="2000" dirty="0">
-              <a:solidFill>
-                <a:schemeClr val="bg1"/>
-              </a:solidFill>
-            </a:endParaRPr>
-          </a:p>
-          <a:p>
-            <a:pPr marL="285750" indent="-285750">
-              <a:lnSpc>
-                <a:spcPct val="150000"/>
-              </a:lnSpc>
-              <a:buFont typeface="Arial" panose="020B0604020202020204" pitchFamily="34" charset="0"/>
-              <a:buChar char="•"/>
-            </a:pPr>
-            <a:r>
-              <a:rPr lang="es-CL" sz="2000" dirty="0">
-                <a:solidFill>
-                  <a:schemeClr val="bg1"/>
-                </a:solidFill>
-              </a:rPr>
-              <a:t>S</a:t>
-            </a:r>
-          </a:p>
-          <a:p>
-            <a:pPr marL="285750" indent="-285750">
-              <a:lnSpc>
-                <a:spcPct val="150000"/>
-              </a:lnSpc>
-              <a:buFont typeface="Arial" panose="020B0604020202020204" pitchFamily="34" charset="0"/>
-              <a:buChar char="•"/>
-            </a:pPr>
-            <a:endParaRPr lang="es-CL" sz="2000" dirty="0">
-              <a:solidFill>
-                <a:schemeClr val="bg1"/>
-              </a:solidFill>
-            </a:endParaRPr>
-          </a:p>
-          <a:p>
-            <a:pPr marL="285750" indent="-285750">
-              <a:lnSpc>
-                <a:spcPct val="150000"/>
-              </a:lnSpc>
-              <a:buFont typeface="Arial" panose="020B0604020202020204" pitchFamily="34" charset="0"/>
-              <a:buChar char="•"/>
-            </a:pPr>
-            <a:r>
-              <a:rPr lang="es-CL" sz="2000" dirty="0">
-                <a:solidFill>
-                  <a:schemeClr val="bg1"/>
-                </a:solidFill>
-              </a:rPr>
-              <a:t>s</a:t>
-            </a:r>
-            <a:endParaRPr lang="es-MX" sz="2000" dirty="0">
-              <a:solidFill>
-                <a:schemeClr val="bg1"/>
-              </a:solidFill>
-            </a:endParaRPr>
-          </a:p>
-        </p:txBody>
-      </p:sp>
       <p:grpSp>
         <p:nvGrpSpPr>
           <p:cNvPr id="25" name="Grupo 24">
@@ -5152,6 +5235,420 @@
           </a:p>
         </p:txBody>
       </p:sp>
+      <p:grpSp>
+        <p:nvGrpSpPr>
+          <p:cNvPr id="6" name="Grupo 5">
+            <a:extLst>
+              <a:ext uri="{FF2B5EF4-FFF2-40B4-BE49-F238E27FC236}">
+                <a16:creationId xmlns:a16="http://schemas.microsoft.com/office/drawing/2014/main" id="{D1BB0CDD-4F69-5DB7-33FF-08B03D5F2ECD}"/>
+              </a:ext>
+            </a:extLst>
+          </p:cNvPr>
+          <p:cNvGrpSpPr/>
+          <p:nvPr/>
+        </p:nvGrpSpPr>
+        <p:grpSpPr>
+          <a:xfrm>
+            <a:off x="4938043" y="2017921"/>
+            <a:ext cx="2315914" cy="2822157"/>
+            <a:chOff x="4614725" y="502156"/>
+            <a:chExt cx="2315914" cy="2822157"/>
+          </a:xfrm>
+        </p:grpSpPr>
+        <p:sp>
+          <p:nvSpPr>
+            <p:cNvPr id="2" name="Rectángulo 1">
+              <a:extLst>
+                <a:ext uri="{FF2B5EF4-FFF2-40B4-BE49-F238E27FC236}">
+                  <a16:creationId xmlns:a16="http://schemas.microsoft.com/office/drawing/2014/main" id="{D89E9F14-CACD-7A39-D842-D37D936FCAF4}"/>
+                </a:ext>
+              </a:extLst>
+            </p:cNvPr>
+            <p:cNvSpPr/>
+            <p:nvPr/>
+          </p:nvSpPr>
+          <p:spPr>
+            <a:xfrm>
+              <a:off x="4614729" y="502156"/>
+              <a:ext cx="2315910" cy="523340"/>
+            </a:xfrm>
+            <a:prstGeom prst="rect">
+              <a:avLst/>
+            </a:prstGeom>
+            <a:solidFill>
+              <a:schemeClr val="tx1"/>
+            </a:solidFill>
+            <a:ln>
+              <a:solidFill>
+                <a:schemeClr val="accent2"/>
+              </a:solidFill>
+            </a:ln>
+          </p:spPr>
+          <p:style>
+            <a:lnRef idx="2">
+              <a:schemeClr val="accent1">
+                <a:shade val="15000"/>
+              </a:schemeClr>
+            </a:lnRef>
+            <a:fillRef idx="1">
+              <a:schemeClr val="accent1"/>
+            </a:fillRef>
+            <a:effectRef idx="0">
+              <a:schemeClr val="accent1"/>
+            </a:effectRef>
+            <a:fontRef idx="minor">
+              <a:schemeClr val="lt1"/>
+            </a:fontRef>
+          </p:style>
+          <p:txBody>
+            <a:bodyPr rtlCol="0" anchor="ctr"/>
+            <a:lstStyle/>
+            <a:p>
+              <a:pPr algn="ctr"/>
+              <a:r>
+                <a:rPr lang="es-CL" b="1" dirty="0"/>
+                <a:t>Filtro Inteligente</a:t>
+              </a:r>
+            </a:p>
+          </p:txBody>
+        </p:sp>
+        <p:sp>
+          <p:nvSpPr>
+            <p:cNvPr id="5" name="Rectángulo 4">
+              <a:extLst>
+                <a:ext uri="{FF2B5EF4-FFF2-40B4-BE49-F238E27FC236}">
+                  <a16:creationId xmlns:a16="http://schemas.microsoft.com/office/drawing/2014/main" id="{39DDFAFB-479B-3B52-7BEB-DB4A8E082A6F}"/>
+                </a:ext>
+              </a:extLst>
+            </p:cNvPr>
+            <p:cNvSpPr/>
+            <p:nvPr/>
+          </p:nvSpPr>
+          <p:spPr>
+            <a:xfrm>
+              <a:off x="4614725" y="1025495"/>
+              <a:ext cx="2315910" cy="2298818"/>
+            </a:xfrm>
+            <a:prstGeom prst="rect">
+              <a:avLst/>
+            </a:prstGeom>
+            <a:solidFill>
+              <a:schemeClr val="tx1"/>
+            </a:solidFill>
+            <a:ln>
+              <a:solidFill>
+                <a:schemeClr val="accent2"/>
+              </a:solidFill>
+            </a:ln>
+          </p:spPr>
+          <p:style>
+            <a:lnRef idx="2">
+              <a:schemeClr val="accent1">
+                <a:shade val="15000"/>
+              </a:schemeClr>
+            </a:lnRef>
+            <a:fillRef idx="1">
+              <a:schemeClr val="accent1"/>
+            </a:fillRef>
+            <a:effectRef idx="0">
+              <a:schemeClr val="accent1"/>
+            </a:effectRef>
+            <a:fontRef idx="minor">
+              <a:schemeClr val="lt1"/>
+            </a:fontRef>
+          </p:style>
+          <p:txBody>
+            <a:bodyPr rtlCol="0" anchor="t"/>
+            <a:lstStyle/>
+            <a:p>
+              <a:pPr algn="just"/>
+              <a:r>
+                <a:rPr lang="es-CL" sz="1400" dirty="0"/>
+                <a:t>Los usuarios pueden buscar, filtrar y descubrir panoramas estrictamente de acuerdo a sus gustos personales (música, comida, arte) y su ubicación geográfica actual.</a:t>
+              </a:r>
+            </a:p>
+          </p:txBody>
+        </p:sp>
+      </p:grpSp>
+      <p:grpSp>
+        <p:nvGrpSpPr>
+          <p:cNvPr id="7" name="Grupo 6">
+            <a:extLst>
+              <a:ext uri="{FF2B5EF4-FFF2-40B4-BE49-F238E27FC236}">
+                <a16:creationId xmlns:a16="http://schemas.microsoft.com/office/drawing/2014/main" id="{2DAB8B7C-2D3C-13CB-6D1B-68CCFE272EDE}"/>
+              </a:ext>
+            </a:extLst>
+          </p:cNvPr>
+          <p:cNvGrpSpPr/>
+          <p:nvPr/>
+        </p:nvGrpSpPr>
+        <p:grpSpPr>
+          <a:xfrm>
+            <a:off x="1123770" y="2017921"/>
+            <a:ext cx="2315914" cy="2822157"/>
+            <a:chOff x="4614725" y="502156"/>
+            <a:chExt cx="2315914" cy="2822157"/>
+          </a:xfrm>
+        </p:grpSpPr>
+        <p:sp>
+          <p:nvSpPr>
+            <p:cNvPr id="9" name="Rectángulo 8">
+              <a:extLst>
+                <a:ext uri="{FF2B5EF4-FFF2-40B4-BE49-F238E27FC236}">
+                  <a16:creationId xmlns:a16="http://schemas.microsoft.com/office/drawing/2014/main" id="{A105AC6F-F22A-3932-213C-25B5DCEF0A05}"/>
+                </a:ext>
+              </a:extLst>
+            </p:cNvPr>
+            <p:cNvSpPr/>
+            <p:nvPr/>
+          </p:nvSpPr>
+          <p:spPr>
+            <a:xfrm>
+              <a:off x="4614729" y="502156"/>
+              <a:ext cx="2315910" cy="523340"/>
+            </a:xfrm>
+            <a:prstGeom prst="rect">
+              <a:avLst/>
+            </a:prstGeom>
+            <a:solidFill>
+              <a:schemeClr val="tx1"/>
+            </a:solidFill>
+            <a:ln>
+              <a:solidFill>
+                <a:schemeClr val="accent2"/>
+              </a:solidFill>
+            </a:ln>
+          </p:spPr>
+          <p:style>
+            <a:lnRef idx="2">
+              <a:schemeClr val="accent1">
+                <a:shade val="15000"/>
+              </a:schemeClr>
+            </a:lnRef>
+            <a:fillRef idx="1">
+              <a:schemeClr val="accent1"/>
+            </a:fillRef>
+            <a:effectRef idx="0">
+              <a:schemeClr val="accent1"/>
+            </a:effectRef>
+            <a:fontRef idx="minor">
+              <a:schemeClr val="lt1"/>
+            </a:fontRef>
+          </p:style>
+          <p:txBody>
+            <a:bodyPr rtlCol="0" anchor="ctr"/>
+            <a:lstStyle/>
+            <a:p>
+              <a:pPr algn="ctr"/>
+              <a:r>
+                <a:rPr lang="es-MX" dirty="0">
+                  <a:latin typeface="+mj-lt"/>
+                </a:rPr>
+                <a:t>Plataforma Móvil</a:t>
+              </a:r>
+              <a:endParaRPr lang="es-CL" dirty="0">
+                <a:latin typeface="+mj-lt"/>
+              </a:endParaRPr>
+            </a:p>
+          </p:txBody>
+        </p:sp>
+        <p:sp>
+          <p:nvSpPr>
+            <p:cNvPr id="11" name="Rectángulo 10">
+              <a:extLst>
+                <a:ext uri="{FF2B5EF4-FFF2-40B4-BE49-F238E27FC236}">
+                  <a16:creationId xmlns:a16="http://schemas.microsoft.com/office/drawing/2014/main" id="{BE241FE4-0D29-B7B2-EB53-852BF0C82FE2}"/>
+                </a:ext>
+              </a:extLst>
+            </p:cNvPr>
+            <p:cNvSpPr/>
+            <p:nvPr/>
+          </p:nvSpPr>
+          <p:spPr>
+            <a:xfrm>
+              <a:off x="4614725" y="1025495"/>
+              <a:ext cx="2315910" cy="2298818"/>
+            </a:xfrm>
+            <a:prstGeom prst="rect">
+              <a:avLst/>
+            </a:prstGeom>
+            <a:solidFill>
+              <a:schemeClr val="tx1"/>
+            </a:solidFill>
+            <a:ln>
+              <a:solidFill>
+                <a:schemeClr val="accent2"/>
+              </a:solidFill>
+            </a:ln>
+          </p:spPr>
+          <p:style>
+            <a:lnRef idx="2">
+              <a:schemeClr val="accent1">
+                <a:shade val="15000"/>
+              </a:schemeClr>
+            </a:lnRef>
+            <a:fillRef idx="1">
+              <a:schemeClr val="accent1"/>
+            </a:fillRef>
+            <a:effectRef idx="0">
+              <a:schemeClr val="accent1"/>
+            </a:effectRef>
+            <a:fontRef idx="minor">
+              <a:schemeClr val="lt1"/>
+            </a:fontRef>
+          </p:style>
+          <p:txBody>
+            <a:bodyPr rtlCol="0" anchor="t"/>
+            <a:lstStyle/>
+            <a:p>
+              <a:pPr algn="just"/>
+              <a:r>
+                <a:rPr lang="es-CL" sz="1400" dirty="0" err="1"/>
+                <a:t>EventApp</a:t>
+              </a:r>
+              <a:r>
+                <a:rPr lang="es-CL" sz="1400" dirty="0"/>
+                <a:t> es una aplicación móvil diseñada nativamente para ofrecer una experiencia fluida, permitiendo acceder a los panoramas desde la comodidad de un smartphone en cualquier lugar.</a:t>
+              </a:r>
+            </a:p>
+          </p:txBody>
+        </p:sp>
+      </p:grpSp>
+      <p:grpSp>
+        <p:nvGrpSpPr>
+          <p:cNvPr id="12" name="Grupo 11">
+            <a:extLst>
+              <a:ext uri="{FF2B5EF4-FFF2-40B4-BE49-F238E27FC236}">
+                <a16:creationId xmlns:a16="http://schemas.microsoft.com/office/drawing/2014/main" id="{F348C607-4E4E-ACC0-B13E-85388AF06E12}"/>
+              </a:ext>
+            </a:extLst>
+          </p:cNvPr>
+          <p:cNvGrpSpPr/>
+          <p:nvPr/>
+        </p:nvGrpSpPr>
+        <p:grpSpPr>
+          <a:xfrm>
+            <a:off x="8752312" y="2017921"/>
+            <a:ext cx="2315914" cy="2822157"/>
+            <a:chOff x="4614725" y="502156"/>
+            <a:chExt cx="2315914" cy="2822157"/>
+          </a:xfrm>
+        </p:grpSpPr>
+        <p:sp>
+          <p:nvSpPr>
+            <p:cNvPr id="13" name="Rectángulo 12">
+              <a:extLst>
+                <a:ext uri="{FF2B5EF4-FFF2-40B4-BE49-F238E27FC236}">
+                  <a16:creationId xmlns:a16="http://schemas.microsoft.com/office/drawing/2014/main" id="{B5E74A45-B93D-3E46-F588-FECC74B8ECF5}"/>
+                </a:ext>
+              </a:extLst>
+            </p:cNvPr>
+            <p:cNvSpPr/>
+            <p:nvPr/>
+          </p:nvSpPr>
+          <p:spPr>
+            <a:xfrm>
+              <a:off x="4614729" y="502156"/>
+              <a:ext cx="2315910" cy="523340"/>
+            </a:xfrm>
+            <a:prstGeom prst="rect">
+              <a:avLst/>
+            </a:prstGeom>
+            <a:solidFill>
+              <a:schemeClr val="tx1"/>
+            </a:solidFill>
+            <a:ln>
+              <a:solidFill>
+                <a:schemeClr val="accent2"/>
+              </a:solidFill>
+            </a:ln>
+          </p:spPr>
+          <p:style>
+            <a:lnRef idx="2">
+              <a:schemeClr val="accent1">
+                <a:shade val="15000"/>
+              </a:schemeClr>
+            </a:lnRef>
+            <a:fillRef idx="1">
+              <a:schemeClr val="accent1"/>
+            </a:fillRef>
+            <a:effectRef idx="0">
+              <a:schemeClr val="accent1"/>
+            </a:effectRef>
+            <a:fontRef idx="minor">
+              <a:schemeClr val="lt1"/>
+            </a:fontRef>
+          </p:style>
+          <p:txBody>
+            <a:bodyPr rtlCol="0" anchor="ctr"/>
+            <a:lstStyle/>
+            <a:p>
+              <a:pPr algn="ctr"/>
+              <a:r>
+                <a:rPr lang="es-CL" b="1" dirty="0"/>
+                <a:t>Enfoque Amplio</a:t>
+              </a:r>
+            </a:p>
+          </p:txBody>
+        </p:sp>
+        <p:sp>
+          <p:nvSpPr>
+            <p:cNvPr id="15" name="Rectángulo 14">
+              <a:extLst>
+                <a:ext uri="{FF2B5EF4-FFF2-40B4-BE49-F238E27FC236}">
+                  <a16:creationId xmlns:a16="http://schemas.microsoft.com/office/drawing/2014/main" id="{A83C34A2-B908-0A37-246B-FF2477BD2E58}"/>
+                </a:ext>
+              </a:extLst>
+            </p:cNvPr>
+            <p:cNvSpPr/>
+            <p:nvPr/>
+          </p:nvSpPr>
+          <p:spPr>
+            <a:xfrm>
+              <a:off x="4614725" y="1025495"/>
+              <a:ext cx="2315910" cy="2298818"/>
+            </a:xfrm>
+            <a:prstGeom prst="rect">
+              <a:avLst/>
+            </a:prstGeom>
+            <a:solidFill>
+              <a:schemeClr val="tx1"/>
+            </a:solidFill>
+            <a:ln>
+              <a:solidFill>
+                <a:schemeClr val="accent2"/>
+              </a:solidFill>
+            </a:ln>
+          </p:spPr>
+          <p:style>
+            <a:lnRef idx="2">
+              <a:schemeClr val="accent1">
+                <a:shade val="15000"/>
+              </a:schemeClr>
+            </a:lnRef>
+            <a:fillRef idx="1">
+              <a:schemeClr val="accent1"/>
+            </a:fillRef>
+            <a:effectRef idx="0">
+              <a:schemeClr val="accent1"/>
+            </a:effectRef>
+            <a:fontRef idx="minor">
+              <a:schemeClr val="lt1"/>
+            </a:fontRef>
+          </p:style>
+          <p:txBody>
+            <a:bodyPr rtlCol="0" anchor="t"/>
+            <a:lstStyle/>
+            <a:p>
+              <a:pPr algn="just"/>
+              <a:r>
+                <a:rPr lang="es-CL" sz="1400" dirty="0"/>
+                <a:t>Pensado para personas dinámicas a las que les gustan las ferias de todo tipo, conciertos masivos u otros panoramas al aire libre, centralizando la oferta cultural y de ocio.</a:t>
+              </a:r>
+            </a:p>
+          </p:txBody>
+        </p:sp>
+      </p:grpSp>
     </p:spTree>
     <p:extLst>
       <p:ext uri="{BB962C8B-B14F-4D97-AF65-F5344CB8AC3E}">
@@ -5210,8 +5707,8 @@
         </p:nvSpPr>
         <p:spPr>
           <a:xfrm>
-            <a:off x="2281727" y="2264635"/>
-            <a:ext cx="4349810" cy="2346540"/>
+            <a:off x="841727" y="2205588"/>
+            <a:ext cx="8203963" cy="2446824"/>
           </a:xfrm>
           <a:prstGeom prst="rect">
             <a:avLst/>
@@ -5224,89 +5721,121 @@
           </a:bodyPr>
           <a:lstStyle/>
           <a:p>
-            <a:pPr marL="285750" indent="-285750">
+            <a:pPr marL="285750" indent="-285750" algn="just">
+              <a:lnSpc>
+                <a:spcPct val="100000"/>
+              </a:lnSpc>
+              <a:buFont typeface="Arial" panose="020B0604020202020204" pitchFamily="34" charset="0"/>
+              <a:buChar char="•"/>
+            </a:pPr>
+            <a:r>
+              <a:rPr lang="es-CL" dirty="0">
+                <a:solidFill>
+                  <a:schemeClr val="bg1"/>
+                </a:solidFill>
+              </a:rPr>
+              <a:t>Uso de metodología en cascada con 5 fases definidas.</a:t>
+            </a:r>
+          </a:p>
+          <a:p>
+            <a:pPr algn="just">
+              <a:lnSpc>
+                <a:spcPct val="100000"/>
+              </a:lnSpc>
+            </a:pPr>
+            <a:endParaRPr lang="es-CL" dirty="0">
+              <a:solidFill>
+                <a:schemeClr val="bg1"/>
+              </a:solidFill>
+            </a:endParaRPr>
+          </a:p>
+          <a:p>
+            <a:pPr marL="285750" indent="-285750" algn="just">
+              <a:lnSpc>
+                <a:spcPct val="100000"/>
+              </a:lnSpc>
+              <a:buFont typeface="Arial" panose="020B0604020202020204" pitchFamily="34" charset="0"/>
+              <a:buChar char="•"/>
+            </a:pPr>
+            <a:r>
+              <a:rPr lang="es-CL" b="1" dirty="0">
+                <a:solidFill>
+                  <a:schemeClr val="bg1"/>
+                </a:solidFill>
+              </a:rPr>
+              <a:t>Roles Clave:</a:t>
+            </a:r>
+            <a:r>
+              <a:rPr lang="es-CL" dirty="0">
+                <a:solidFill>
+                  <a:schemeClr val="bg1"/>
+                </a:solidFill>
+              </a:rPr>
+              <a:t> Director de Proyecto, Desarrollador y Analista de datos.</a:t>
+            </a:r>
+          </a:p>
+          <a:p>
+            <a:pPr marL="285750" indent="-285750" algn="just">
               <a:lnSpc>
                 <a:spcPct val="150000"/>
               </a:lnSpc>
               <a:buFont typeface="Arial" panose="020B0604020202020204" pitchFamily="34" charset="0"/>
               <a:buChar char="•"/>
             </a:pPr>
-            <a:r>
-              <a:rPr lang="es-MX" sz="2000" dirty="0" err="1">
+            <a:endParaRPr lang="es-CL" dirty="0">
+              <a:solidFill>
+                <a:schemeClr val="bg1"/>
+              </a:solidFill>
+            </a:endParaRPr>
+          </a:p>
+          <a:p>
+            <a:pPr marL="285750" indent="-285750" algn="just">
+              <a:lnSpc>
+                <a:spcPct val="100000"/>
+              </a:lnSpc>
+              <a:buFont typeface="Arial" panose="020B0604020202020204" pitchFamily="34" charset="0"/>
+              <a:buChar char="•"/>
+            </a:pPr>
+            <a:r>
+              <a:rPr lang="es-CL" dirty="0">
                 <a:solidFill>
                   <a:schemeClr val="bg1"/>
                 </a:solidFill>
               </a:rPr>
-              <a:t>Saf</a:t>
-            </a:r>
-            <a:endParaRPr lang="es-MX" sz="2000" dirty="0">
+              <a:t>Reuniones Mensuales por videollamada y chat diario para dudas rápidas.</a:t>
+            </a:r>
+          </a:p>
+          <a:p>
+            <a:pPr marL="285750" indent="-285750" algn="just">
+              <a:lnSpc>
+                <a:spcPct val="100000"/>
+              </a:lnSpc>
+              <a:buFont typeface="Arial" panose="020B0604020202020204" pitchFamily="34" charset="0"/>
+              <a:buChar char="•"/>
+            </a:pPr>
+            <a:endParaRPr lang="es-CL" dirty="0">
               <a:solidFill>
                 <a:schemeClr val="bg1"/>
               </a:solidFill>
             </a:endParaRPr>
           </a:p>
           <a:p>
-            <a:pPr marL="285750" indent="-285750">
+            <a:pPr marL="285750" indent="-285750" algn="just">
               <a:lnSpc>
-                <a:spcPct val="150000"/>
+                <a:spcPct val="100000"/>
               </a:lnSpc>
               <a:buFont typeface="Arial" panose="020B0604020202020204" pitchFamily="34" charset="0"/>
               <a:buChar char="•"/>
             </a:pPr>
-            <a:endParaRPr lang="es-CL" sz="2000" dirty="0">
-              <a:solidFill>
-                <a:schemeClr val="bg1"/>
-              </a:solidFill>
-            </a:endParaRPr>
-          </a:p>
-          <a:p>
-            <a:pPr marL="285750" indent="-285750">
-              <a:lnSpc>
-                <a:spcPct val="150000"/>
-              </a:lnSpc>
-              <a:buFont typeface="Arial" panose="020B0604020202020204" pitchFamily="34" charset="0"/>
-              <a:buChar char="•"/>
-            </a:pPr>
-            <a:r>
-              <a:rPr lang="es-CL" sz="2000" dirty="0">
+            <a:r>
+              <a:rPr lang="es-CL" dirty="0">
                 <a:solidFill>
                   <a:schemeClr val="bg1"/>
                 </a:solidFill>
               </a:rPr>
-              <a:t>S</a:t>
-            </a:r>
-          </a:p>
-          <a:p>
-            <a:pPr marL="285750" indent="-285750">
-              <a:lnSpc>
-                <a:spcPct val="150000"/>
-              </a:lnSpc>
-              <a:buFont typeface="Arial" panose="020B0604020202020204" pitchFamily="34" charset="0"/>
-              <a:buChar char="•"/>
-            </a:pPr>
-            <a:endParaRPr lang="es-CL" sz="2000" dirty="0">
-              <a:solidFill>
-                <a:schemeClr val="bg1"/>
-              </a:solidFill>
-            </a:endParaRPr>
-          </a:p>
-          <a:p>
-            <a:pPr marL="285750" indent="-285750">
-              <a:lnSpc>
-                <a:spcPct val="150000"/>
-              </a:lnSpc>
-              <a:buFont typeface="Arial" panose="020B0604020202020204" pitchFamily="34" charset="0"/>
-              <a:buChar char="•"/>
-            </a:pPr>
-            <a:r>
-              <a:rPr lang="es-CL" sz="2000" dirty="0">
-                <a:solidFill>
-                  <a:schemeClr val="bg1"/>
-                </a:solidFill>
-              </a:rPr>
-              <a:t>s</a:t>
-            </a:r>
-            <a:endParaRPr lang="es-MX" sz="2000" dirty="0">
+              <a:t>Uso de herramientas de seguimiento y repositorio.</a:t>
+            </a:r>
+            <a:endParaRPr lang="es-MX" dirty="0">
               <a:solidFill>
                 <a:schemeClr val="bg1"/>
               </a:solidFill>
@@ -6062,10 +6591,10 @@
       </p:sp>
       <p:pic>
         <p:nvPicPr>
-          <p:cNvPr id="4" name="Imagen 3">
+          <p:cNvPr id="5" name="Imagen 4">
             <a:extLst>
               <a:ext uri="{FF2B5EF4-FFF2-40B4-BE49-F238E27FC236}">
-                <a16:creationId xmlns:a16="http://schemas.microsoft.com/office/drawing/2014/main" id="{736F7DC7-B0F5-EA65-9EDB-87B53E6F9BAE}"/>
+                <a16:creationId xmlns:a16="http://schemas.microsoft.com/office/drawing/2014/main" id="{2919BD85-C15F-8378-B13D-39EDCC66C405}"/>
               </a:ext>
             </a:extLst>
           </p:cNvPr>
@@ -6088,15 +6617,12 @@
         </p:blipFill>
         <p:spPr>
           <a:xfrm>
-            <a:off x="2196703" y="1465056"/>
-            <a:ext cx="7798594" cy="4684140"/>
+            <a:off x="2118101" y="1248805"/>
+            <a:ext cx="7955798" cy="5368794"/>
           </a:xfrm>
           <a:prstGeom prst="rect">
             <a:avLst/>
           </a:prstGeom>
-          <a:ln>
-            <a:noFill/>
-          </a:ln>
         </p:spPr>
       </p:pic>
     </p:spTree>
@@ -6157,8 +6683,8 @@
         </p:nvSpPr>
         <p:spPr>
           <a:xfrm>
-            <a:off x="2281727" y="2264635"/>
-            <a:ext cx="4349810" cy="2346540"/>
+            <a:off x="841727" y="1820254"/>
+            <a:ext cx="6755484" cy="3783152"/>
           </a:xfrm>
           <a:prstGeom prst="rect">
             <a:avLst/>
@@ -6179,18 +6705,29 @@
               <a:buChar char="•"/>
             </a:pPr>
             <a:r>
-              <a:rPr lang="es-MX" sz="2000" dirty="0" err="1">
+              <a:rPr lang="es-MX" dirty="0">
                 <a:solidFill>
                   <a:schemeClr val="bg1"/>
                 </a:solidFill>
               </a:rPr>
-              <a:t>Saf</a:t>
-            </a:r>
-            <a:endParaRPr lang="es-MX" sz="2000" dirty="0">
-              <a:solidFill>
-                <a:schemeClr val="bg1"/>
-              </a:solidFill>
-            </a:endParaRPr>
+              <a:t>Scope </a:t>
+            </a:r>
+            <a:r>
+              <a:rPr lang="es-MX" dirty="0" err="1">
+                <a:solidFill>
+                  <a:schemeClr val="bg1"/>
+                </a:solidFill>
+              </a:rPr>
+              <a:t>creep</a:t>
+            </a:r>
+            <a:r>
+              <a:rPr lang="es-MX" dirty="0">
+                <a:solidFill>
+                  <a:schemeClr val="bg1"/>
+                </a:solidFill>
+              </a:rPr>
+              <a:t>.</a:t>
+            </a:r>
           </a:p>
           <a:p>
             <a:pPr marL="285750" indent="-285750">
@@ -6200,7 +6737,7 @@
               <a:buFont typeface="Arial" panose="020B0604020202020204" pitchFamily="34" charset="0"/>
               <a:buChar char="•"/>
             </a:pPr>
-            <a:endParaRPr lang="es-CL" sz="2000" dirty="0">
+            <a:endParaRPr lang="es-CL" dirty="0">
               <a:solidFill>
                 <a:schemeClr val="bg1"/>
               </a:solidFill>
@@ -6215,12 +6752,12 @@
               <a:buChar char="•"/>
             </a:pPr>
             <a:r>
-              <a:rPr lang="es-CL" sz="2000" dirty="0">
+              <a:rPr lang="es-CL" dirty="0">
                 <a:solidFill>
                   <a:schemeClr val="bg1"/>
                 </a:solidFill>
               </a:rPr>
-              <a:t>S</a:t>
+              <a:t>Retraso en hitos y entregas importantes.</a:t>
             </a:r>
           </a:p>
           <a:p>
@@ -6231,7 +6768,7 @@
               <a:buFont typeface="Arial" panose="020B0604020202020204" pitchFamily="34" charset="0"/>
               <a:buChar char="•"/>
             </a:pPr>
-            <a:endParaRPr lang="es-CL" sz="2000" dirty="0">
+            <a:endParaRPr lang="es-CL" dirty="0">
               <a:solidFill>
                 <a:schemeClr val="bg1"/>
               </a:solidFill>
@@ -6246,14 +6783,76 @@
               <a:buChar char="•"/>
             </a:pPr>
             <a:r>
-              <a:rPr lang="es-CL" sz="2000" dirty="0">
+              <a:rPr lang="es-CL" dirty="0">
                 <a:solidFill>
                   <a:schemeClr val="bg1"/>
                 </a:solidFill>
               </a:rPr>
-              <a:t>s</a:t>
-            </a:r>
-            <a:endParaRPr lang="es-MX" sz="2000" dirty="0">
+              <a:t>Disponibilidad del equipo de trabajo.</a:t>
+            </a:r>
+          </a:p>
+          <a:p>
+            <a:pPr marL="285750" indent="-285750">
+              <a:lnSpc>
+                <a:spcPct val="150000"/>
+              </a:lnSpc>
+              <a:buFont typeface="Arial" panose="020B0604020202020204" pitchFamily="34" charset="0"/>
+              <a:buChar char="•"/>
+            </a:pPr>
+            <a:endParaRPr lang="es-CL" dirty="0">
+              <a:solidFill>
+                <a:schemeClr val="bg1"/>
+              </a:solidFill>
+            </a:endParaRPr>
+          </a:p>
+          <a:p>
+            <a:pPr marL="285750" indent="-285750">
+              <a:lnSpc>
+                <a:spcPct val="150000"/>
+              </a:lnSpc>
+              <a:buFont typeface="Arial" panose="020B0604020202020204" pitchFamily="34" charset="0"/>
+              <a:buChar char="•"/>
+            </a:pPr>
+            <a:r>
+              <a:rPr lang="es-CL" dirty="0">
+                <a:solidFill>
+                  <a:schemeClr val="bg1"/>
+                </a:solidFill>
+              </a:rPr>
+              <a:t>Poca aceptación de los usuarios.</a:t>
+            </a:r>
+          </a:p>
+          <a:p>
+            <a:pPr marL="285750" indent="-285750">
+              <a:lnSpc>
+                <a:spcPct val="150000"/>
+              </a:lnSpc>
+              <a:buFont typeface="Arial" panose="020B0604020202020204" pitchFamily="34" charset="0"/>
+              <a:buChar char="•"/>
+            </a:pPr>
+            <a:endParaRPr lang="es-CL" dirty="0">
+              <a:solidFill>
+                <a:schemeClr val="bg1"/>
+              </a:solidFill>
+            </a:endParaRPr>
+          </a:p>
+          <a:p>
+            <a:pPr marL="285750" indent="-285750">
+              <a:lnSpc>
+                <a:spcPct val="150000"/>
+              </a:lnSpc>
+              <a:buFont typeface="Arial" panose="020B0604020202020204" pitchFamily="34" charset="0"/>
+              <a:buChar char="•"/>
+            </a:pPr>
+            <a:r>
+              <a:rPr lang="es-CL" dirty="0">
+                <a:solidFill>
+                  <a:schemeClr val="bg1"/>
+                </a:solidFill>
+              </a:rPr>
+              <a:t>Problemas técnicos en la fase de desarrollo</a:t>
+            </a:r>
+            <a:endParaRPr lang="es-MX" dirty="0">
               <a:solidFill>
                 <a:schemeClr val="bg1"/>
               </a:solidFill>
@@ -6460,8 +7059,8 @@
         </p:nvSpPr>
         <p:spPr>
           <a:xfrm>
-            <a:off x="2281727" y="2264635"/>
-            <a:ext cx="4349810" cy="2346540"/>
+            <a:off x="841727" y="2136449"/>
+            <a:ext cx="6840942" cy="2308324"/>
           </a:xfrm>
           <a:prstGeom prst="rect">
             <a:avLst/>
@@ -6476,20 +7075,35 @@
           <a:p>
             <a:pPr marL="285750" indent="-285750">
               <a:lnSpc>
-                <a:spcPct val="150000"/>
+                <a:spcPct val="100000"/>
               </a:lnSpc>
               <a:buFont typeface="Arial" panose="020B0604020202020204" pitchFamily="34" charset="0"/>
               <a:buChar char="•"/>
             </a:pPr>
             <a:r>
-              <a:rPr lang="es-MX" sz="2000" dirty="0" err="1">
+              <a:rPr lang="es-CL" b="1" dirty="0">
                 <a:solidFill>
                   <a:schemeClr val="bg1"/>
                 </a:solidFill>
               </a:rPr>
-              <a:t>Saf</a:t>
-            </a:r>
-            <a:endParaRPr lang="es-MX" sz="2000" dirty="0">
+              <a:t>Protección Robusta:</a:t>
+            </a:r>
+            <a:r>
+              <a:rPr lang="es-CL" dirty="0">
+                <a:solidFill>
+                  <a:schemeClr val="bg1"/>
+                </a:solidFill>
+              </a:rPr>
+              <a:t> Transmisión de datos cifrada con altos estándares de la industria.</a:t>
+            </a:r>
+          </a:p>
+          <a:p>
+            <a:pPr>
+              <a:lnSpc>
+                <a:spcPct val="100000"/>
+              </a:lnSpc>
+            </a:pPr>
+            <a:endParaRPr lang="es-CL" dirty="0">
               <a:solidFill>
                 <a:schemeClr val="bg1"/>
               </a:solidFill>
@@ -6498,12 +7112,35 @@
           <a:p>
             <a:pPr marL="285750" indent="-285750">
               <a:lnSpc>
-                <a:spcPct val="150000"/>
+                <a:spcPct val="100000"/>
               </a:lnSpc>
               <a:buFont typeface="Arial" panose="020B0604020202020204" pitchFamily="34" charset="0"/>
               <a:buChar char="•"/>
             </a:pPr>
-            <a:endParaRPr lang="es-CL" sz="2000" dirty="0">
+            <a:r>
+              <a:rPr lang="es-CL" b="1" dirty="0">
+                <a:solidFill>
+                  <a:schemeClr val="bg1"/>
+                </a:solidFill>
+              </a:rPr>
+              <a:t>Gobernanza de Datos:</a:t>
+            </a:r>
+            <a:r>
+              <a:rPr lang="es-CL" dirty="0">
+                <a:solidFill>
+                  <a:schemeClr val="bg1"/>
+                </a:solidFill>
+              </a:rPr>
+              <a:t> Control total sobre la información mediante roles y permisos de acceso estrictos.</a:t>
+            </a:r>
+          </a:p>
+          <a:p>
+            <a:pPr>
+              <a:lnSpc>
+                <a:spcPct val="100000"/>
+              </a:lnSpc>
+            </a:pPr>
+            <a:endParaRPr lang="es-CL" dirty="0">
               <a:solidFill>
                 <a:schemeClr val="bg1"/>
               </a:solidFill>
@@ -6512,55 +7149,27 @@
           <a:p>
             <a:pPr marL="285750" indent="-285750">
               <a:lnSpc>
-                <a:spcPct val="150000"/>
+                <a:spcPct val="100000"/>
               </a:lnSpc>
               <a:buFont typeface="Arial" panose="020B0604020202020204" pitchFamily="34" charset="0"/>
               <a:buChar char="•"/>
             </a:pPr>
             <a:r>
-              <a:rPr lang="es-CL" sz="2000" dirty="0">
+              <a:rPr lang="es-CL" b="1" dirty="0">
                 <a:solidFill>
                   <a:schemeClr val="bg1"/>
                 </a:solidFill>
               </a:rPr>
-              <a:t>S</a:t>
-            </a:r>
-          </a:p>
-          <a:p>
-            <a:pPr marL="285750" indent="-285750">
-              <a:lnSpc>
-                <a:spcPct val="150000"/>
-              </a:lnSpc>
-              <a:buFont typeface="Arial" panose="020B0604020202020204" pitchFamily="34" charset="0"/>
-              <a:buChar char="•"/>
-            </a:pPr>
-            <a:endParaRPr lang="es-CL" sz="2000" dirty="0">
-              <a:solidFill>
-                <a:schemeClr val="bg1"/>
-              </a:solidFill>
-            </a:endParaRPr>
-          </a:p>
-          <a:p>
-            <a:pPr marL="285750" indent="-285750">
-              <a:lnSpc>
-                <a:spcPct val="150000"/>
-              </a:lnSpc>
-              <a:buFont typeface="Arial" panose="020B0604020202020204" pitchFamily="34" charset="0"/>
-              <a:buChar char="•"/>
-            </a:pPr>
-            <a:r>
-              <a:rPr lang="es-CL" sz="2000" dirty="0">
+              <a:t>Continuidad del Negocio:</a:t>
+            </a:r>
+            <a:r>
+              <a:rPr lang="es-CL" dirty="0">
                 <a:solidFill>
                   <a:schemeClr val="bg1"/>
                 </a:solidFill>
               </a:rPr>
-              <a:t>s</a:t>
-            </a:r>
-            <a:endParaRPr lang="es-MX" sz="2000" dirty="0">
-              <a:solidFill>
-                <a:schemeClr val="bg1"/>
-              </a:solidFill>
-            </a:endParaRPr>
+              <a:t> Copias de seguridad automáticas y cumplimiento normativo vigente.</a:t>
+            </a:r>
           </a:p>
         </p:txBody>
       </p:sp>
